--- a/presentation/slides.pptx
+++ b/presentation/slides.pptx
@@ -5,32 +5,35 @@
     <p:sldMasterId id="2147483648" r:id="rId1"/>
   </p:sldMasterIdLst>
   <p:sldIdLst>
-    <p:sldId id="256" r:id="rId2"/>
-    <p:sldId id="257" r:id="rId3"/>
-    <p:sldId id="258" r:id="rId4"/>
-    <p:sldId id="259" r:id="rId5"/>
-    <p:sldId id="260" r:id="rId6"/>
-    <p:sldId id="261" r:id="rId7"/>
-    <p:sldId id="262" r:id="rId8"/>
-    <p:sldId id="263" r:id="rId9"/>
-    <p:sldId id="264" r:id="rId10"/>
-    <p:sldId id="265" r:id="rId11"/>
-    <p:sldId id="266" r:id="rId12"/>
-    <p:sldId id="267" r:id="rId13"/>
-    <p:sldId id="268" r:id="rId14"/>
-    <p:sldId id="269" r:id="rId15"/>
-    <p:sldId id="270" r:id="rId16"/>
-    <p:sldId id="271" r:id="rId17"/>
-    <p:sldId id="272" r:id="rId18"/>
-    <p:sldId id="273" r:id="rId19"/>
-    <p:sldId id="274" r:id="rId20"/>
-    <p:sldId id="275" r:id="rId21"/>
-    <p:sldId id="276" r:id="rId22"/>
-    <p:sldId id="279" r:id="rId23"/>
-    <p:sldId id="280" r:id="rId24"/>
-    <p:sldId id="281" r:id="rId25"/>
+    <p:sldId id="256" r:id="rId7"/>
+    <p:sldId id="257" r:id="rId8"/>
+    <p:sldId id="258" r:id="rId9"/>
+    <p:sldId id="259" r:id="rId10"/>
+    <p:sldId id="260" r:id="rId11"/>
+    <p:sldId id="261" r:id="rId12"/>
+    <p:sldId id="262" r:id="rId13"/>
+    <p:sldId id="263" r:id="rId14"/>
+    <p:sldId id="264" r:id="rId15"/>
+    <p:sldId id="265" r:id="rId16"/>
+    <p:sldId id="266" r:id="rId17"/>
+    <p:sldId id="267" r:id="rId18"/>
+    <p:sldId id="268" r:id="rId19"/>
+    <p:sldId id="269" r:id="rId20"/>
+    <p:sldId id="270" r:id="rId21"/>
+    <p:sldId id="271" r:id="rId22"/>
+    <p:sldId id="272" r:id="rId23"/>
+    <p:sldId id="273" r:id="rId24"/>
+    <p:sldId id="274" r:id="rId25"/>
+    <p:sldId id="275" r:id="rId26"/>
+    <p:sldId id="276" r:id="rId27"/>
+    <p:sldId id="277" r:id="rId28"/>
+    <p:sldId id="278" r:id="rId29"/>
+    <p:sldId id="279" r:id="rId30"/>
+    <p:sldId id="280" r:id="rId31"/>
+    <p:sldId id="281" r:id="rId32"/>
+    <p:sldId id="282" r:id="rId33"/>
   </p:sldIdLst>
-  <p:sldSz cx="12192000" cy="6858000"/>
+  <p:sldSz cx="12191695" cy="6858000" type="screen4x3"/>
   <p:notesSz cx="6858000" cy="9144000"/>
   <p:defaultTextStyle>
     <a:defPPr>
@@ -127,22 +130,6 @@
       </a:defRPr>
     </a:lvl9pPr>
   </p:defaultTextStyle>
-  <p:extLst>
-    <p:ext uri="{EFAFB233-063F-42B5-8137-9DF3F51BA10A}">
-      <p15:sldGuideLst xmlns:p15="http://schemas.microsoft.com/office/powerpoint/2012/main">
-        <p15:guide id="1" orient="horz" pos="2160">
-          <p15:clr>
-            <a:srgbClr val="A4A3A4"/>
-          </p15:clr>
-        </p15:guide>
-        <p15:guide id="2" pos="2880">
-          <p15:clr>
-            <a:srgbClr val="A4A3A4"/>
-          </p15:clr>
-        </p15:guide>
-      </p15:sldGuideLst>
-    </p:ext>
-  </p:extLst>
 </p:presentation>
 </file>
 
@@ -184,9 +171,10 @@
           <a:lstStyle/>
           <a:p>
             <a:r>
-              <a:rPr lang="en-US"/>
+              <a:rPr lang="en-US" smtClean="0"/>
               <a:t>Click to edit Master title style</a:t>
             </a:r>
+            <a:endParaRPr lang="en-US"/>
           </a:p>
         </p:txBody>
       </p:sp>
@@ -302,9 +290,10 @@
           </a:lstStyle>
           <a:p>
             <a:r>
-              <a:rPr lang="en-US"/>
+              <a:rPr lang="en-US" smtClean="0"/>
               <a:t>Click to edit Master subtitle style</a:t>
             </a:r>
+            <a:endParaRPr lang="en-US"/>
           </a:p>
         </p:txBody>
       </p:sp>
@@ -325,7 +314,7 @@
           <a:p>
             <a:fld id="{5BCAD085-E8A6-8845-BD4E-CB4CCA059FC4}" type="datetimeFigureOut">
               <a:rPr lang="en-US" smtClean="0"/>
-              <a:t>5/14/2026</a:t>
+              <a:t>1/27/13</a:t>
             </a:fld>
             <a:endParaRPr lang="en-US"/>
           </a:p>
@@ -419,9 +408,10 @@
           <a:lstStyle/>
           <a:p>
             <a:r>
-              <a:rPr lang="en-US"/>
+              <a:rPr lang="en-US" smtClean="0"/>
               <a:t>Click to edit Master title style</a:t>
             </a:r>
+            <a:endParaRPr lang="en-US"/>
           </a:p>
         </p:txBody>
       </p:sp>
@@ -442,37 +432,38 @@
           <a:p>
             <a:pPr lvl="0"/>
             <a:r>
-              <a:rPr lang="en-US"/>
+              <a:rPr lang="en-US" smtClean="0"/>
               <a:t>Click to edit Master text styles</a:t>
             </a:r>
           </a:p>
           <a:p>
             <a:pPr lvl="1"/>
             <a:r>
-              <a:rPr lang="en-US"/>
+              <a:rPr lang="en-US" smtClean="0"/>
               <a:t>Second level</a:t>
             </a:r>
           </a:p>
           <a:p>
             <a:pPr lvl="2"/>
             <a:r>
-              <a:rPr lang="en-US"/>
+              <a:rPr lang="en-US" smtClean="0"/>
               <a:t>Third level</a:t>
             </a:r>
           </a:p>
           <a:p>
             <a:pPr lvl="3"/>
             <a:r>
-              <a:rPr lang="en-US"/>
+              <a:rPr lang="en-US" smtClean="0"/>
               <a:t>Fourth level</a:t>
             </a:r>
           </a:p>
           <a:p>
             <a:pPr lvl="4"/>
             <a:r>
-              <a:rPr lang="en-US"/>
+              <a:rPr lang="en-US" smtClean="0"/>
               <a:t>Fifth level</a:t>
             </a:r>
+            <a:endParaRPr lang="en-US"/>
           </a:p>
         </p:txBody>
       </p:sp>
@@ -493,7 +484,7 @@
           <a:p>
             <a:fld id="{5BCAD085-E8A6-8845-BD4E-CB4CCA059FC4}" type="datetimeFigureOut">
               <a:rPr lang="en-US" smtClean="0"/>
-              <a:t>5/14/2026</a:t>
+              <a:t>1/27/13</a:t>
             </a:fld>
             <a:endParaRPr lang="en-US"/>
           </a:p>
@@ -592,9 +583,10 @@
           <a:lstStyle/>
           <a:p>
             <a:r>
-              <a:rPr lang="en-US"/>
+              <a:rPr lang="en-US" smtClean="0"/>
               <a:t>Click to edit Master title style</a:t>
             </a:r>
+            <a:endParaRPr lang="en-US"/>
           </a:p>
         </p:txBody>
       </p:sp>
@@ -620,37 +612,38 @@
           <a:p>
             <a:pPr lvl="0"/>
             <a:r>
-              <a:rPr lang="en-US"/>
+              <a:rPr lang="en-US" smtClean="0"/>
               <a:t>Click to edit Master text styles</a:t>
             </a:r>
           </a:p>
           <a:p>
             <a:pPr lvl="1"/>
             <a:r>
-              <a:rPr lang="en-US"/>
+              <a:rPr lang="en-US" smtClean="0"/>
               <a:t>Second level</a:t>
             </a:r>
           </a:p>
           <a:p>
             <a:pPr lvl="2"/>
             <a:r>
-              <a:rPr lang="en-US"/>
+              <a:rPr lang="en-US" smtClean="0"/>
               <a:t>Third level</a:t>
             </a:r>
           </a:p>
           <a:p>
             <a:pPr lvl="3"/>
             <a:r>
-              <a:rPr lang="en-US"/>
+              <a:rPr lang="en-US" smtClean="0"/>
               <a:t>Fourth level</a:t>
             </a:r>
           </a:p>
           <a:p>
             <a:pPr lvl="4"/>
             <a:r>
-              <a:rPr lang="en-US"/>
+              <a:rPr lang="en-US" smtClean="0"/>
               <a:t>Fifth level</a:t>
             </a:r>
+            <a:endParaRPr lang="en-US"/>
           </a:p>
         </p:txBody>
       </p:sp>
@@ -671,7 +664,7 @@
           <a:p>
             <a:fld id="{5BCAD085-E8A6-8845-BD4E-CB4CCA059FC4}" type="datetimeFigureOut">
               <a:rPr lang="en-US" smtClean="0"/>
-              <a:t>5/14/2026</a:t>
+              <a:t>1/27/13</a:t>
             </a:fld>
             <a:endParaRPr lang="en-US"/>
           </a:p>
@@ -765,9 +758,10 @@
           <a:lstStyle/>
           <a:p>
             <a:r>
-              <a:rPr lang="en-US"/>
+              <a:rPr lang="en-US" smtClean="0"/>
               <a:t>Click to edit Master title style</a:t>
             </a:r>
+            <a:endParaRPr lang="en-US"/>
           </a:p>
         </p:txBody>
       </p:sp>
@@ -788,37 +782,38 @@
           <a:p>
             <a:pPr lvl="0"/>
             <a:r>
-              <a:rPr lang="en-US"/>
+              <a:rPr lang="en-US" smtClean="0"/>
               <a:t>Click to edit Master text styles</a:t>
             </a:r>
           </a:p>
           <a:p>
             <a:pPr lvl="1"/>
             <a:r>
-              <a:rPr lang="en-US"/>
+              <a:rPr lang="en-US" smtClean="0"/>
               <a:t>Second level</a:t>
             </a:r>
           </a:p>
           <a:p>
             <a:pPr lvl="2"/>
             <a:r>
-              <a:rPr lang="en-US"/>
+              <a:rPr lang="en-US" smtClean="0"/>
               <a:t>Third level</a:t>
             </a:r>
           </a:p>
           <a:p>
             <a:pPr lvl="3"/>
             <a:r>
-              <a:rPr lang="en-US"/>
+              <a:rPr lang="en-US" smtClean="0"/>
               <a:t>Fourth level</a:t>
             </a:r>
           </a:p>
           <a:p>
             <a:pPr lvl="4"/>
             <a:r>
-              <a:rPr lang="en-US"/>
+              <a:rPr lang="en-US" smtClean="0"/>
               <a:t>Fifth level</a:t>
             </a:r>
+            <a:endParaRPr lang="en-US"/>
           </a:p>
         </p:txBody>
       </p:sp>
@@ -839,7 +834,7 @@
           <a:p>
             <a:fld id="{5BCAD085-E8A6-8845-BD4E-CB4CCA059FC4}" type="datetimeFigureOut">
               <a:rPr lang="en-US" smtClean="0"/>
-              <a:t>5/14/2026</a:t>
+              <a:t>1/27/13</a:t>
             </a:fld>
             <a:endParaRPr lang="en-US"/>
           </a:p>
@@ -942,9 +937,10 @@
           </a:lstStyle>
           <a:p>
             <a:r>
-              <a:rPr lang="en-US"/>
+              <a:rPr lang="en-US" smtClean="0"/>
               <a:t>Click to edit Master title style</a:t>
             </a:r>
+            <a:endParaRPr lang="en-US"/>
           </a:p>
         </p:txBody>
       </p:sp>
@@ -1061,7 +1057,7 @@
           <a:p>
             <a:pPr lvl="0"/>
             <a:r>
-              <a:rPr lang="en-US"/>
+              <a:rPr lang="en-US" smtClean="0"/>
               <a:t>Click to edit Master text styles</a:t>
             </a:r>
           </a:p>
@@ -1084,7 +1080,7 @@
           <a:p>
             <a:fld id="{5BCAD085-E8A6-8845-BD4E-CB4CCA059FC4}" type="datetimeFigureOut">
               <a:rPr lang="en-US" smtClean="0"/>
-              <a:t>5/14/2026</a:t>
+              <a:t>1/27/13</a:t>
             </a:fld>
             <a:endParaRPr lang="en-US"/>
           </a:p>
@@ -1178,9 +1174,10 @@
           <a:lstStyle/>
           <a:p>
             <a:r>
-              <a:rPr lang="en-US"/>
+              <a:rPr lang="en-US" smtClean="0"/>
               <a:t>Click to edit Master title style</a:t>
             </a:r>
+            <a:endParaRPr lang="en-US"/>
           </a:p>
         </p:txBody>
       </p:sp>
@@ -1234,37 +1231,38 @@
           <a:p>
             <a:pPr lvl="0"/>
             <a:r>
-              <a:rPr lang="en-US"/>
+              <a:rPr lang="en-US" smtClean="0"/>
               <a:t>Click to edit Master text styles</a:t>
             </a:r>
           </a:p>
           <a:p>
             <a:pPr lvl="1"/>
             <a:r>
-              <a:rPr lang="en-US"/>
+              <a:rPr lang="en-US" smtClean="0"/>
               <a:t>Second level</a:t>
             </a:r>
           </a:p>
           <a:p>
             <a:pPr lvl="2"/>
             <a:r>
-              <a:rPr lang="en-US"/>
+              <a:rPr lang="en-US" smtClean="0"/>
               <a:t>Third level</a:t>
             </a:r>
           </a:p>
           <a:p>
             <a:pPr lvl="3"/>
             <a:r>
-              <a:rPr lang="en-US"/>
+              <a:rPr lang="en-US" smtClean="0"/>
               <a:t>Fourth level</a:t>
             </a:r>
           </a:p>
           <a:p>
             <a:pPr lvl="4"/>
             <a:r>
-              <a:rPr lang="en-US"/>
+              <a:rPr lang="en-US" smtClean="0"/>
               <a:t>Fifth level</a:t>
             </a:r>
+            <a:endParaRPr lang="en-US"/>
           </a:p>
         </p:txBody>
       </p:sp>
@@ -1318,37 +1316,38 @@
           <a:p>
             <a:pPr lvl="0"/>
             <a:r>
-              <a:rPr lang="en-US"/>
+              <a:rPr lang="en-US" smtClean="0"/>
               <a:t>Click to edit Master text styles</a:t>
             </a:r>
           </a:p>
           <a:p>
             <a:pPr lvl="1"/>
             <a:r>
-              <a:rPr lang="en-US"/>
+              <a:rPr lang="en-US" smtClean="0"/>
               <a:t>Second level</a:t>
             </a:r>
           </a:p>
           <a:p>
             <a:pPr lvl="2"/>
             <a:r>
-              <a:rPr lang="en-US"/>
+              <a:rPr lang="en-US" smtClean="0"/>
               <a:t>Third level</a:t>
             </a:r>
           </a:p>
           <a:p>
             <a:pPr lvl="3"/>
             <a:r>
-              <a:rPr lang="en-US"/>
+              <a:rPr lang="en-US" smtClean="0"/>
               <a:t>Fourth level</a:t>
             </a:r>
           </a:p>
           <a:p>
             <a:pPr lvl="4"/>
             <a:r>
-              <a:rPr lang="en-US"/>
+              <a:rPr lang="en-US" smtClean="0"/>
               <a:t>Fifth level</a:t>
             </a:r>
+            <a:endParaRPr lang="en-US"/>
           </a:p>
         </p:txBody>
       </p:sp>
@@ -1369,7 +1368,7 @@
           <a:p>
             <a:fld id="{5BCAD085-E8A6-8845-BD4E-CB4CCA059FC4}" type="datetimeFigureOut">
               <a:rPr lang="en-US" smtClean="0"/>
-              <a:t>5/14/2026</a:t>
+              <a:t>1/27/13</a:t>
             </a:fld>
             <a:endParaRPr lang="en-US"/>
           </a:p>
@@ -1467,9 +1466,10 @@
           </a:lstStyle>
           <a:p>
             <a:r>
-              <a:rPr lang="en-US"/>
+              <a:rPr lang="en-US" smtClean="0"/>
               <a:t>Click to edit Master title style</a:t>
             </a:r>
+            <a:endParaRPr lang="en-US"/>
           </a:p>
         </p:txBody>
       </p:sp>
@@ -1532,7 +1532,7 @@
           <a:p>
             <a:pPr lvl="0"/>
             <a:r>
-              <a:rPr lang="en-US"/>
+              <a:rPr lang="en-US" smtClean="0"/>
               <a:t>Click to edit Master text styles</a:t>
             </a:r>
           </a:p>
@@ -1588,37 +1588,38 @@
           <a:p>
             <a:pPr lvl="0"/>
             <a:r>
-              <a:rPr lang="en-US"/>
+              <a:rPr lang="en-US" smtClean="0"/>
               <a:t>Click to edit Master text styles</a:t>
             </a:r>
           </a:p>
           <a:p>
             <a:pPr lvl="1"/>
             <a:r>
-              <a:rPr lang="en-US"/>
+              <a:rPr lang="en-US" smtClean="0"/>
               <a:t>Second level</a:t>
             </a:r>
           </a:p>
           <a:p>
             <a:pPr lvl="2"/>
             <a:r>
-              <a:rPr lang="en-US"/>
+              <a:rPr lang="en-US" smtClean="0"/>
               <a:t>Third level</a:t>
             </a:r>
           </a:p>
           <a:p>
             <a:pPr lvl="3"/>
             <a:r>
-              <a:rPr lang="en-US"/>
+              <a:rPr lang="en-US" smtClean="0"/>
               <a:t>Fourth level</a:t>
             </a:r>
           </a:p>
           <a:p>
             <a:pPr lvl="4"/>
             <a:r>
-              <a:rPr lang="en-US"/>
+              <a:rPr lang="en-US" smtClean="0"/>
               <a:t>Fifth level</a:t>
             </a:r>
+            <a:endParaRPr lang="en-US"/>
           </a:p>
         </p:txBody>
       </p:sp>
@@ -1681,7 +1682,7 @@
           <a:p>
             <a:pPr lvl="0"/>
             <a:r>
-              <a:rPr lang="en-US"/>
+              <a:rPr lang="en-US" smtClean="0"/>
               <a:t>Click to edit Master text styles</a:t>
             </a:r>
           </a:p>
@@ -1737,37 +1738,38 @@
           <a:p>
             <a:pPr lvl="0"/>
             <a:r>
-              <a:rPr lang="en-US"/>
+              <a:rPr lang="en-US" smtClean="0"/>
               <a:t>Click to edit Master text styles</a:t>
             </a:r>
           </a:p>
           <a:p>
             <a:pPr lvl="1"/>
             <a:r>
-              <a:rPr lang="en-US"/>
+              <a:rPr lang="en-US" smtClean="0"/>
               <a:t>Second level</a:t>
             </a:r>
           </a:p>
           <a:p>
             <a:pPr lvl="2"/>
             <a:r>
-              <a:rPr lang="en-US"/>
+              <a:rPr lang="en-US" smtClean="0"/>
               <a:t>Third level</a:t>
             </a:r>
           </a:p>
           <a:p>
             <a:pPr lvl="3"/>
             <a:r>
-              <a:rPr lang="en-US"/>
+              <a:rPr lang="en-US" smtClean="0"/>
               <a:t>Fourth level</a:t>
             </a:r>
           </a:p>
           <a:p>
             <a:pPr lvl="4"/>
             <a:r>
-              <a:rPr lang="en-US"/>
+              <a:rPr lang="en-US" smtClean="0"/>
               <a:t>Fifth level</a:t>
             </a:r>
+            <a:endParaRPr lang="en-US"/>
           </a:p>
         </p:txBody>
       </p:sp>
@@ -1788,7 +1790,7 @@
           <a:p>
             <a:fld id="{5BCAD085-E8A6-8845-BD4E-CB4CCA059FC4}" type="datetimeFigureOut">
               <a:rPr lang="en-US" smtClean="0"/>
-              <a:t>5/14/2026</a:t>
+              <a:t>1/27/13</a:t>
             </a:fld>
             <a:endParaRPr lang="en-US"/>
           </a:p>
@@ -1882,9 +1884,10 @@
           <a:lstStyle/>
           <a:p>
             <a:r>
-              <a:rPr lang="en-US"/>
+              <a:rPr lang="en-US" smtClean="0"/>
               <a:t>Click to edit Master title style</a:t>
             </a:r>
+            <a:endParaRPr lang="en-US"/>
           </a:p>
         </p:txBody>
       </p:sp>
@@ -1905,7 +1908,7 @@
           <a:p>
             <a:fld id="{5BCAD085-E8A6-8845-BD4E-CB4CCA059FC4}" type="datetimeFigureOut">
               <a:rPr lang="en-US" smtClean="0"/>
-              <a:t>5/14/2026</a:t>
+              <a:t>1/27/13</a:t>
             </a:fld>
             <a:endParaRPr lang="en-US"/>
           </a:p>
@@ -2000,7 +2003,7 @@
           <a:p>
             <a:fld id="{5BCAD085-E8A6-8845-BD4E-CB4CCA059FC4}" type="datetimeFigureOut">
               <a:rPr lang="en-US" smtClean="0"/>
-              <a:t>5/14/2026</a:t>
+              <a:t>1/27/13</a:t>
             </a:fld>
             <a:endParaRPr lang="en-US"/>
           </a:p>
@@ -2103,9 +2106,10 @@
           </a:lstStyle>
           <a:p>
             <a:r>
-              <a:rPr lang="en-US"/>
+              <a:rPr lang="en-US" smtClean="0"/>
               <a:t>Click to edit Master title style</a:t>
             </a:r>
+            <a:endParaRPr lang="en-US"/>
           </a:p>
         </p:txBody>
       </p:sp>
@@ -2159,37 +2163,38 @@
           <a:p>
             <a:pPr lvl="0"/>
             <a:r>
-              <a:rPr lang="en-US"/>
+              <a:rPr lang="en-US" smtClean="0"/>
               <a:t>Click to edit Master text styles</a:t>
             </a:r>
           </a:p>
           <a:p>
             <a:pPr lvl="1"/>
             <a:r>
-              <a:rPr lang="en-US"/>
+              <a:rPr lang="en-US" smtClean="0"/>
               <a:t>Second level</a:t>
             </a:r>
           </a:p>
           <a:p>
             <a:pPr lvl="2"/>
             <a:r>
-              <a:rPr lang="en-US"/>
+              <a:rPr lang="en-US" smtClean="0"/>
               <a:t>Third level</a:t>
             </a:r>
           </a:p>
           <a:p>
             <a:pPr lvl="3"/>
             <a:r>
-              <a:rPr lang="en-US"/>
+              <a:rPr lang="en-US" smtClean="0"/>
               <a:t>Fourth level</a:t>
             </a:r>
           </a:p>
           <a:p>
             <a:pPr lvl="4"/>
             <a:r>
-              <a:rPr lang="en-US"/>
+              <a:rPr lang="en-US" smtClean="0"/>
               <a:t>Fifth level</a:t>
             </a:r>
+            <a:endParaRPr lang="en-US"/>
           </a:p>
         </p:txBody>
       </p:sp>
@@ -2252,7 +2257,7 @@
           <a:p>
             <a:pPr lvl="0"/>
             <a:r>
-              <a:rPr lang="en-US"/>
+              <a:rPr lang="en-US" smtClean="0"/>
               <a:t>Click to edit Master text styles</a:t>
             </a:r>
           </a:p>
@@ -2275,7 +2280,7 @@
           <a:p>
             <a:fld id="{5BCAD085-E8A6-8845-BD4E-CB4CCA059FC4}" type="datetimeFigureOut">
               <a:rPr lang="en-US" smtClean="0"/>
-              <a:t>5/14/2026</a:t>
+              <a:t>1/27/13</a:t>
             </a:fld>
             <a:endParaRPr lang="en-US"/>
           </a:p>
@@ -2378,9 +2383,10 @@
           </a:lstStyle>
           <a:p>
             <a:r>
-              <a:rPr lang="en-US"/>
+              <a:rPr lang="en-US" smtClean="0"/>
               <a:t>Click to edit Master title style</a:t>
             </a:r>
+            <a:endParaRPr lang="en-US"/>
           </a:p>
         </p:txBody>
       </p:sp>
@@ -2504,7 +2510,7 @@
           <a:p>
             <a:pPr lvl="0"/>
             <a:r>
-              <a:rPr lang="en-US"/>
+              <a:rPr lang="en-US" smtClean="0"/>
               <a:t>Click to edit Master text styles</a:t>
             </a:r>
           </a:p>
@@ -2527,7 +2533,7 @@
           <a:p>
             <a:fld id="{5BCAD085-E8A6-8845-BD4E-CB4CCA059FC4}" type="datetimeFigureOut">
               <a:rPr lang="en-US" smtClean="0"/>
-              <a:t>5/14/2026</a:t>
+              <a:t>1/27/13</a:t>
             </a:fld>
             <a:endParaRPr lang="en-US"/>
           </a:p>
@@ -2636,9 +2642,10 @@
           <a:lstStyle/>
           <a:p>
             <a:r>
-              <a:rPr lang="en-US"/>
+              <a:rPr lang="en-US" smtClean="0"/>
               <a:t>Click to edit Master title style</a:t>
             </a:r>
+            <a:endParaRPr lang="en-US"/>
           </a:p>
         </p:txBody>
       </p:sp>
@@ -2669,37 +2676,38 @@
           <a:p>
             <a:pPr lvl="0"/>
             <a:r>
-              <a:rPr lang="en-US"/>
+              <a:rPr lang="en-US" smtClean="0"/>
               <a:t>Click to edit Master text styles</a:t>
             </a:r>
           </a:p>
           <a:p>
             <a:pPr lvl="1"/>
             <a:r>
-              <a:rPr lang="en-US"/>
+              <a:rPr lang="en-US" smtClean="0"/>
               <a:t>Second level</a:t>
             </a:r>
           </a:p>
           <a:p>
             <a:pPr lvl="2"/>
             <a:r>
-              <a:rPr lang="en-US"/>
+              <a:rPr lang="en-US" smtClean="0"/>
               <a:t>Third level</a:t>
             </a:r>
           </a:p>
           <a:p>
             <a:pPr lvl="3"/>
             <a:r>
-              <a:rPr lang="en-US"/>
+              <a:rPr lang="en-US" smtClean="0"/>
               <a:t>Fourth level</a:t>
             </a:r>
           </a:p>
           <a:p>
             <a:pPr lvl="4"/>
             <a:r>
-              <a:rPr lang="en-US"/>
+              <a:rPr lang="en-US" smtClean="0"/>
               <a:t>Fifth level</a:t>
             </a:r>
+            <a:endParaRPr lang="en-US"/>
           </a:p>
         </p:txBody>
       </p:sp>
@@ -2738,7 +2746,7 @@
           <a:p>
             <a:fld id="{5BCAD085-E8A6-8845-BD4E-CB4CCA059FC4}" type="datetimeFigureOut">
               <a:rPr lang="en-US" smtClean="0"/>
-              <a:t>5/14/2026</a:t>
+              <a:t>1/27/13</a:t>
             </a:fld>
             <a:endParaRPr lang="en-US"/>
           </a:p>
@@ -3097,7 +3105,7 @@
 </file>
 
 <file path=ppt/slides/slide1.xml><?xml version="1.0" encoding="utf-8"?>
-<p:sld xmlns:a="http://schemas.openxmlformats.org/drawingml/2006/main" xmlns:r="http://schemas.openxmlformats.org/officeDocument/2006/relationships" xmlns:p="http://schemas.openxmlformats.org/presentationml/2006/main">
+<p:sld xmlns:a="http://schemas.openxmlformats.org/drawingml/2006/main" xmlns:p="http://schemas.openxmlformats.org/presentationml/2006/main" xmlns:r="http://schemas.openxmlformats.org/officeDocument/2006/relationships">
   <p:cSld>
     <p:spTree>
       <p:nvGrpSpPr>
@@ -3105,14 +3113,7 @@
         <p:cNvGrpSpPr/>
         <p:nvPr/>
       </p:nvGrpSpPr>
-      <p:grpSpPr>
-        <a:xfrm>
-          <a:off x="0" y="0"/>
-          <a:ext cx="0" cy="0"/>
-          <a:chOff x="0" y="0"/>
-          <a:chExt cx="0" cy="0"/>
-        </a:xfrm>
-      </p:grpSpPr>
+      <p:grpSpPr/>
       <p:sp>
         <p:nvSpPr>
           <p:cNvPr id="2" name="Rectangle 1"/>
@@ -3153,7 +3154,6 @@
           <a:lstStyle/>
           <a:p>
             <a:pPr algn="ctr"/>
-            <a:endParaRPr/>
           </a:p>
         </p:txBody>
       </p:sp>
@@ -3197,7 +3197,6 @@
           <a:lstStyle/>
           <a:p>
             <a:pPr algn="ctr"/>
-            <a:endParaRPr/>
           </a:p>
         </p:txBody>
       </p:sp>
@@ -3241,7 +3240,6 @@
           <a:lstStyle/>
           <a:p>
             <a:pPr algn="ctr"/>
-            <a:endParaRPr/>
           </a:p>
         </p:txBody>
       </p:sp>
@@ -3306,7 +3304,7 @@
                   <a:srgbClr val="E8B54A"/>
                 </a:solidFill>
               </a:rPr>
-              <a:t>A Comparative Study of Four Biomedical Simplification Systems</a:t>
+              <a:t>A Comparative Study of Five Biomedical Simplification Systems</a:t>
             </a:r>
           </a:p>
         </p:txBody>
@@ -3353,7 +3351,7 @@
         <p:spPr>
           <a:xfrm>
             <a:off x="914400" y="5303520"/>
-            <a:ext cx="3785139" cy="830997"/>
+            <a:ext cx="10058400" cy="457200"/>
           </a:xfrm>
           <a:prstGeom prst="rect">
             <a:avLst/>
@@ -3367,72 +3365,12 @@
           <a:lstStyle/>
           <a:p>
             <a:r>
-              <a:rPr sz="1600" dirty="0">
+              <a:rPr sz="1600">
                 <a:solidFill>
                   <a:srgbClr val="F4F6F8"/>
                 </a:solidFill>
               </a:rPr>
-              <a:t>Ibrahim Hanafy</a:t>
-            </a:r>
-            <a:r>
-              <a:rPr lang="ar-EG" sz="1600" dirty="0">
-                <a:solidFill>
-                  <a:srgbClr val="F4F6F8"/>
-                </a:solidFill>
-              </a:rPr>
-              <a:t>  </a:t>
-            </a:r>
-            <a:r>
-              <a:rPr lang="en-US" sz="1600" dirty="0">
-                <a:solidFill>
-                  <a:srgbClr val="F4F6F8"/>
-                </a:solidFill>
-              </a:rPr>
-              <a:t> 202200518</a:t>
-            </a:r>
-          </a:p>
-          <a:p>
-            <a:r>
-              <a:rPr lang="en-US" sz="1600" dirty="0">
-                <a:solidFill>
-                  <a:srgbClr val="F4F6F8"/>
-                </a:solidFill>
-              </a:rPr>
-              <a:t>Khaled Mahmoud 202200282</a:t>
-            </a:r>
-          </a:p>
-          <a:p>
-            <a:r>
-              <a:rPr lang="en-US" sz="1600" dirty="0" err="1">
-                <a:solidFill>
-                  <a:srgbClr val="F4F6F8"/>
-                </a:solidFill>
-              </a:rPr>
-              <a:t>SalahEldin</a:t>
-            </a:r>
-            <a:r>
-              <a:rPr lang="en-US" sz="1600" dirty="0">
-                <a:solidFill>
-                  <a:srgbClr val="F4F6F8"/>
-                </a:solidFill>
-              </a:rPr>
-              <a:t> </a:t>
-            </a:r>
-            <a:r>
-              <a:rPr lang="en-US" sz="1600" dirty="0" err="1">
-                <a:solidFill>
-                  <a:srgbClr val="F4F6F8"/>
-                </a:solidFill>
-              </a:rPr>
-              <a:t>rezk</a:t>
-            </a:r>
-            <a:r>
-              <a:rPr sz="1600" dirty="0">
-                <a:solidFill>
-                  <a:srgbClr val="F4F6F8"/>
-                </a:solidFill>
-              </a:rPr>
-              <a:t>  ·  Spring 2026  ·  Zewail City</a:t>
+              <a:t>Ibrahim Hanafy  ·  Khaled Mahmoud  ·  Salahdin Ahmed  ·  Spring 2026  ·  Zewail City</a:t>
             </a:r>
           </a:p>
         </p:txBody>
@@ -3446,7 +3384,7 @@
 </file>
 
 <file path=ppt/slides/slide10.xml><?xml version="1.0" encoding="utf-8"?>
-<p:sld xmlns:a="http://schemas.openxmlformats.org/drawingml/2006/main" xmlns:r="http://schemas.openxmlformats.org/officeDocument/2006/relationships" xmlns:p="http://schemas.openxmlformats.org/presentationml/2006/main">
+<p:sld xmlns:a="http://schemas.openxmlformats.org/drawingml/2006/main" xmlns:p="http://schemas.openxmlformats.org/presentationml/2006/main" xmlns:r="http://schemas.openxmlformats.org/officeDocument/2006/relationships">
   <p:cSld>
     <p:spTree>
       <p:nvGrpSpPr>
@@ -3454,14 +3392,7 @@
         <p:cNvGrpSpPr/>
         <p:nvPr/>
       </p:nvGrpSpPr>
-      <p:grpSpPr>
-        <a:xfrm>
-          <a:off x="0" y="0"/>
-          <a:ext cx="0" cy="0"/>
-          <a:chOff x="0" y="0"/>
-          <a:chExt cx="0" cy="0"/>
-        </a:xfrm>
-      </p:grpSpPr>
+      <p:grpSpPr/>
       <p:sp>
         <p:nvSpPr>
           <p:cNvPr id="2" name="Rectangle 1"/>
@@ -3502,7 +3433,6 @@
           <a:lstStyle/>
           <a:p>
             <a:pPr algn="ctr"/>
-            <a:endParaRPr/>
           </a:p>
         </p:txBody>
       </p:sp>
@@ -3546,7 +3476,6 @@
           <a:lstStyle/>
           <a:p>
             <a:pPr algn="ctr"/>
-            <a:endParaRPr/>
           </a:p>
         </p:txBody>
       </p:sp>
@@ -3623,7 +3552,6 @@
           <a:lstStyle/>
           <a:p>
             <a:pPr algn="ctr"/>
-            <a:endParaRPr/>
           </a:p>
         </p:txBody>
       </p:sp>
@@ -3733,7 +3661,7 @@
           </a:fontRef>
         </p:style>
         <p:txBody>
-          <a:bodyPr wrap="square" lIns="137160" tIns="91440" rIns="137160" bIns="91440" rtlCol="0" anchor="ctr"/>
+          <a:bodyPr rtlCol="0" anchor="ctr" lIns="137160" rIns="137160" tIns="91440" bIns="91440" wrap="square"/>
           <a:lstStyle/>
           <a:p>
             <a:pPr algn="ctr"/>
@@ -3770,12 +3698,15 @@
             </a:r>
           </a:p>
           <a:p>
-            <a:endParaRPr sz="1200">
-              <a:solidFill>
-                <a:srgbClr val="0B1F3A"/>
-              </a:solidFill>
-              <a:latin typeface="Consolas"/>
-            </a:endParaRPr>
+            <a:r>
+              <a:rPr sz="1200">
+                <a:solidFill>
+                  <a:srgbClr val="0B1F3A"/>
+                </a:solidFill>
+                <a:latin typeface="Consolas"/>
+              </a:rPr>
+              <a:t/>
+            </a:r>
           </a:p>
           <a:p>
             <a:r>
@@ -3884,7 +3815,7 @@
           </a:fontRef>
         </p:style>
         <p:txBody>
-          <a:bodyPr wrap="square" lIns="137160" tIns="91440" rIns="137160" bIns="91440" rtlCol="0" anchor="ctr"/>
+          <a:bodyPr rtlCol="0" anchor="ctr" lIns="137160" rIns="137160" tIns="91440" bIns="91440" wrap="square"/>
           <a:lstStyle/>
           <a:p>
             <a:pPr algn="ctr"/>
@@ -3921,12 +3852,15 @@
             </a:r>
           </a:p>
           <a:p>
-            <a:endParaRPr sz="1200">
-              <a:solidFill>
-                <a:srgbClr val="0B1F3A"/>
-              </a:solidFill>
-              <a:latin typeface="Consolas"/>
-            </a:endParaRPr>
+            <a:r>
+              <a:rPr sz="1200">
+                <a:solidFill>
+                  <a:srgbClr val="0B1F3A"/>
+                </a:solidFill>
+                <a:latin typeface="Consolas"/>
+              </a:rPr>
+              <a:t/>
+            </a:r>
           </a:p>
           <a:p>
             <a:r>
@@ -4001,7 +3935,7 @@
           </a:fontRef>
         </p:style>
         <p:txBody>
-          <a:bodyPr wrap="square" lIns="182880" tIns="137160" rIns="182880" rtlCol="0" anchor="ctr"/>
+          <a:bodyPr rtlCol="0" anchor="ctr" lIns="182880" tIns="137160" rIns="182880" wrap="square"/>
           <a:lstStyle/>
           <a:p>
             <a:pPr algn="ctr"/>
@@ -4128,7 +4062,7 @@
                   <a:srgbClr val="4A4A4A"/>
                 </a:solidFill>
               </a:rPr>
-              <a:t>10 / 26</a:t>
+              <a:t>10 / 27</a:t>
             </a:r>
           </a:p>
         </p:txBody>
@@ -4142,7 +4076,7 @@
 </file>
 
 <file path=ppt/slides/slide11.xml><?xml version="1.0" encoding="utf-8"?>
-<p:sld xmlns:a="http://schemas.openxmlformats.org/drawingml/2006/main" xmlns:r="http://schemas.openxmlformats.org/officeDocument/2006/relationships" xmlns:p="http://schemas.openxmlformats.org/presentationml/2006/main">
+<p:sld xmlns:a="http://schemas.openxmlformats.org/drawingml/2006/main" xmlns:p="http://schemas.openxmlformats.org/presentationml/2006/main" xmlns:r="http://schemas.openxmlformats.org/officeDocument/2006/relationships">
   <p:cSld>
     <p:spTree>
       <p:nvGrpSpPr>
@@ -4150,14 +4084,7 @@
         <p:cNvGrpSpPr/>
         <p:nvPr/>
       </p:nvGrpSpPr>
-      <p:grpSpPr>
-        <a:xfrm>
-          <a:off x="0" y="0"/>
-          <a:ext cx="0" cy="0"/>
-          <a:chOff x="0" y="0"/>
-          <a:chExt cx="0" cy="0"/>
-        </a:xfrm>
-      </p:grpSpPr>
+      <p:grpSpPr/>
       <p:sp>
         <p:nvSpPr>
           <p:cNvPr id="2" name="Rectangle 1"/>
@@ -4198,7 +4125,6 @@
           <a:lstStyle/>
           <a:p>
             <a:pPr algn="ctr"/>
-            <a:endParaRPr/>
           </a:p>
         </p:txBody>
       </p:sp>
@@ -4242,7 +4168,6 @@
           <a:lstStyle/>
           <a:p>
             <a:pPr algn="ctr"/>
-            <a:endParaRPr/>
           </a:p>
         </p:txBody>
       </p:sp>
@@ -4319,7 +4244,6 @@
           <a:lstStyle/>
           <a:p>
             <a:pPr algn="ctr"/>
-            <a:endParaRPr/>
           </a:p>
         </p:txBody>
       </p:sp>
@@ -4492,7 +4416,7 @@
           </a:fontRef>
         </p:style>
         <p:txBody>
-          <a:bodyPr wrap="square" lIns="182880" tIns="137160" rIns="182880" rtlCol="0" anchor="ctr"/>
+          <a:bodyPr rtlCol="0" anchor="ctr" lIns="182880" tIns="137160" rIns="182880" wrap="square"/>
           <a:lstStyle/>
           <a:p>
             <a:pPr algn="ctr"/>
@@ -4619,7 +4543,7 @@
                   <a:srgbClr val="4A4A4A"/>
                 </a:solidFill>
               </a:rPr>
-              <a:t>11 / 26</a:t>
+              <a:t>11 / 27</a:t>
             </a:r>
           </a:p>
         </p:txBody>
@@ -4633,7 +4557,7 @@
 </file>
 
 <file path=ppt/slides/slide12.xml><?xml version="1.0" encoding="utf-8"?>
-<p:sld xmlns:a="http://schemas.openxmlformats.org/drawingml/2006/main" xmlns:r="http://schemas.openxmlformats.org/officeDocument/2006/relationships" xmlns:p="http://schemas.openxmlformats.org/presentationml/2006/main">
+<p:sld xmlns:a="http://schemas.openxmlformats.org/drawingml/2006/main" xmlns:p="http://schemas.openxmlformats.org/presentationml/2006/main" xmlns:r="http://schemas.openxmlformats.org/officeDocument/2006/relationships">
   <p:cSld>
     <p:spTree>
       <p:nvGrpSpPr>
@@ -4641,14 +4565,7 @@
         <p:cNvGrpSpPr/>
         <p:nvPr/>
       </p:nvGrpSpPr>
-      <p:grpSpPr>
-        <a:xfrm>
-          <a:off x="0" y="0"/>
-          <a:ext cx="0" cy="0"/>
-          <a:chOff x="0" y="0"/>
-          <a:chExt cx="0" cy="0"/>
-        </a:xfrm>
-      </p:grpSpPr>
+      <p:grpSpPr/>
       <p:sp>
         <p:nvSpPr>
           <p:cNvPr id="2" name="Rectangle 1"/>
@@ -4689,7 +4606,6 @@
           <a:lstStyle/>
           <a:p>
             <a:pPr algn="ctr"/>
-            <a:endParaRPr/>
           </a:p>
         </p:txBody>
       </p:sp>
@@ -4733,7 +4649,6 @@
           <a:lstStyle/>
           <a:p>
             <a:pPr algn="ctr"/>
-            <a:endParaRPr/>
           </a:p>
         </p:txBody>
       </p:sp>
@@ -4810,7 +4725,6 @@
           <a:lstStyle/>
           <a:p>
             <a:pPr algn="ctr"/>
-            <a:endParaRPr/>
           </a:p>
         </p:txBody>
       </p:sp>
@@ -4885,7 +4799,7 @@
           </a:fontRef>
         </p:style>
         <p:txBody>
-          <a:bodyPr wrap="square" lIns="137160" tIns="91440" rIns="137160" bIns="91440" rtlCol="0" anchor="ctr"/>
+          <a:bodyPr rtlCol="0" anchor="ctr" lIns="137160" rIns="137160" tIns="91440" bIns="91440" wrap="square"/>
           <a:lstStyle/>
           <a:p>
             <a:pPr algn="ctr"/>
@@ -5115,7 +5029,7 @@
                   <a:srgbClr val="4A4A4A"/>
                 </a:solidFill>
               </a:rPr>
-              <a:t>12 / 26</a:t>
+              <a:t>12 / 27</a:t>
             </a:r>
           </a:p>
         </p:txBody>
@@ -5129,7 +5043,7 @@
 </file>
 
 <file path=ppt/slides/slide13.xml><?xml version="1.0" encoding="utf-8"?>
-<p:sld xmlns:a="http://schemas.openxmlformats.org/drawingml/2006/main" xmlns:r="http://schemas.openxmlformats.org/officeDocument/2006/relationships" xmlns:p="http://schemas.openxmlformats.org/presentationml/2006/main">
+<p:sld xmlns:a="http://schemas.openxmlformats.org/drawingml/2006/main" xmlns:p="http://schemas.openxmlformats.org/presentationml/2006/main" xmlns:r="http://schemas.openxmlformats.org/officeDocument/2006/relationships">
   <p:cSld>
     <p:spTree>
       <p:nvGrpSpPr>
@@ -5137,14 +5051,7 @@
         <p:cNvGrpSpPr/>
         <p:nvPr/>
       </p:nvGrpSpPr>
-      <p:grpSpPr>
-        <a:xfrm>
-          <a:off x="0" y="0"/>
-          <a:ext cx="0" cy="0"/>
-          <a:chOff x="0" y="0"/>
-          <a:chExt cx="0" cy="0"/>
-        </a:xfrm>
-      </p:grpSpPr>
+      <p:grpSpPr/>
       <p:sp>
         <p:nvSpPr>
           <p:cNvPr id="2" name="Rectangle 1"/>
@@ -5185,7 +5092,6 @@
           <a:lstStyle/>
           <a:p>
             <a:pPr algn="ctr"/>
-            <a:endParaRPr/>
           </a:p>
         </p:txBody>
       </p:sp>
@@ -5229,7 +5135,6 @@
           <a:lstStyle/>
           <a:p>
             <a:pPr algn="ctr"/>
-            <a:endParaRPr/>
           </a:p>
         </p:txBody>
       </p:sp>
@@ -5306,7 +5211,6 @@
           <a:lstStyle/>
           <a:p>
             <a:pPr algn="ctr"/>
-            <a:endParaRPr/>
           </a:p>
         </p:txBody>
       </p:sp>
@@ -5362,27 +5266,9 @@
                 <a:tableStyleId>{5C22544A-7EE6-4342-B048-85BDC9FD1C3A}</a:tableStyleId>
               </a:tblPr>
               <a:tblGrid>
-                <a:gridCol w="3657600">
-                  <a:extLst>
-                    <a:ext uri="{9D8B030D-6E8A-4147-A177-3AD203B41FA5}">
-                      <a16:colId xmlns:a16="http://schemas.microsoft.com/office/drawing/2014/main" val="20000"/>
-                    </a:ext>
-                  </a:extLst>
-                </a:gridCol>
-                <a:gridCol w="3657600">
-                  <a:extLst>
-                    <a:ext uri="{9D8B030D-6E8A-4147-A177-3AD203B41FA5}">
-                      <a16:colId xmlns:a16="http://schemas.microsoft.com/office/drawing/2014/main" val="20001"/>
-                    </a:ext>
-                  </a:extLst>
-                </a:gridCol>
-                <a:gridCol w="3657600">
-                  <a:extLst>
-                    <a:ext uri="{9D8B030D-6E8A-4147-A177-3AD203B41FA5}">
-                      <a16:colId xmlns:a16="http://schemas.microsoft.com/office/drawing/2014/main" val="20002"/>
-                    </a:ext>
-                  </a:extLst>
-                </a:gridCol>
+                <a:gridCol w="3657600"/>
+                <a:gridCol w="3657600"/>
+                <a:gridCol w="3657600"/>
               </a:tblGrid>
               <a:tr h="571500">
                 <a:tc>
@@ -5451,11 +5337,6 @@
                     </a:solidFill>
                   </a:tcPr>
                 </a:tc>
-                <a:extLst>
-                  <a:ext uri="{0D108BD9-81ED-4DB2-BD59-A6C34878D82A}">
-                    <a16:rowId xmlns:a16="http://schemas.microsoft.com/office/drawing/2014/main" val="10000"/>
-                  </a:ext>
-                </a:extLst>
               </a:tr>
               <a:tr h="571500">
                 <a:tc>
@@ -5524,11 +5405,6 @@
                     </a:solidFill>
                   </a:tcPr>
                 </a:tc>
-                <a:extLst>
-                  <a:ext uri="{0D108BD9-81ED-4DB2-BD59-A6C34878D82A}">
-                    <a16:rowId xmlns:a16="http://schemas.microsoft.com/office/drawing/2014/main" val="10001"/>
-                  </a:ext>
-                </a:extLst>
               </a:tr>
               <a:tr h="571500">
                 <a:tc>
@@ -5597,11 +5473,6 @@
                     </a:solidFill>
                   </a:tcPr>
                 </a:tc>
-                <a:extLst>
-                  <a:ext uri="{0D108BD9-81ED-4DB2-BD59-A6C34878D82A}">
-                    <a16:rowId xmlns:a16="http://schemas.microsoft.com/office/drawing/2014/main" val="10002"/>
-                  </a:ext>
-                </a:extLst>
               </a:tr>
               <a:tr h="571500">
                 <a:tc>
@@ -5670,11 +5541,6 @@
                     </a:solidFill>
                   </a:tcPr>
                 </a:tc>
-                <a:extLst>
-                  <a:ext uri="{0D108BD9-81ED-4DB2-BD59-A6C34878D82A}">
-                    <a16:rowId xmlns:a16="http://schemas.microsoft.com/office/drawing/2014/main" val="10003"/>
-                  </a:ext>
-                </a:extLst>
               </a:tr>
             </a:tbl>
           </a:graphicData>
@@ -5913,7 +5779,7 @@
                   <a:srgbClr val="4A4A4A"/>
                 </a:solidFill>
               </a:rPr>
-              <a:t>13 / 26</a:t>
+              <a:t>13 / 27</a:t>
             </a:r>
           </a:p>
         </p:txBody>
@@ -5927,7 +5793,7 @@
 </file>
 
 <file path=ppt/slides/slide14.xml><?xml version="1.0" encoding="utf-8"?>
-<p:sld xmlns:a="http://schemas.openxmlformats.org/drawingml/2006/main" xmlns:r="http://schemas.openxmlformats.org/officeDocument/2006/relationships" xmlns:p="http://schemas.openxmlformats.org/presentationml/2006/main">
+<p:sld xmlns:a="http://schemas.openxmlformats.org/drawingml/2006/main" xmlns:p="http://schemas.openxmlformats.org/presentationml/2006/main" xmlns:r="http://schemas.openxmlformats.org/officeDocument/2006/relationships">
   <p:cSld>
     <p:spTree>
       <p:nvGrpSpPr>
@@ -5935,14 +5801,7 @@
         <p:cNvGrpSpPr/>
         <p:nvPr/>
       </p:nvGrpSpPr>
-      <p:grpSpPr>
-        <a:xfrm>
-          <a:off x="0" y="0"/>
-          <a:ext cx="0" cy="0"/>
-          <a:chOff x="0" y="0"/>
-          <a:chExt cx="0" cy="0"/>
-        </a:xfrm>
-      </p:grpSpPr>
+      <p:grpSpPr/>
       <p:sp>
         <p:nvSpPr>
           <p:cNvPr id="2" name="Rectangle 1"/>
@@ -5983,7 +5842,6 @@
           <a:lstStyle/>
           <a:p>
             <a:pPr algn="ctr"/>
-            <a:endParaRPr/>
           </a:p>
         </p:txBody>
       </p:sp>
@@ -6027,7 +5885,6 @@
           <a:lstStyle/>
           <a:p>
             <a:pPr algn="ctr"/>
-            <a:endParaRPr/>
           </a:p>
         </p:txBody>
       </p:sp>
@@ -6104,7 +5961,6 @@
           <a:lstStyle/>
           <a:p>
             <a:pPr algn="ctr"/>
-            <a:endParaRPr/>
           </a:p>
         </p:txBody>
       </p:sp>
@@ -6213,7 +6069,7 @@
           </a:fontRef>
         </p:style>
         <p:txBody>
-          <a:bodyPr wrap="square" lIns="137160" tIns="91440" rIns="137160" bIns="91440" rtlCol="0" anchor="ctr"/>
+          <a:bodyPr rtlCol="0" anchor="ctr" lIns="137160" rIns="137160" tIns="91440" bIns="91440" wrap="square"/>
           <a:lstStyle/>
           <a:p>
             <a:pPr algn="ctr"/>
@@ -6300,7 +6156,7 @@
           </a:fontRef>
         </p:style>
         <p:txBody>
-          <a:bodyPr wrap="square" lIns="182880" tIns="137160" rIns="182880" rtlCol="0" anchor="ctr"/>
+          <a:bodyPr rtlCol="0" anchor="ctr" lIns="182880" tIns="137160" rIns="182880" wrap="square"/>
           <a:lstStyle/>
           <a:p>
             <a:pPr algn="ctr"/>
@@ -6368,7 +6224,7 @@
           </a:fontRef>
         </p:style>
         <p:txBody>
-          <a:bodyPr wrap="square" lIns="182880" tIns="137160" rIns="182880" rtlCol="0" anchor="ctr"/>
+          <a:bodyPr rtlCol="0" anchor="ctr" lIns="182880" tIns="137160" rIns="182880" wrap="square"/>
           <a:lstStyle/>
           <a:p>
             <a:pPr algn="ctr"/>
@@ -6495,7 +6351,7 @@
                   <a:srgbClr val="4A4A4A"/>
                 </a:solidFill>
               </a:rPr>
-              <a:t>14 / 26</a:t>
+              <a:t>14 / 27</a:t>
             </a:r>
           </a:p>
         </p:txBody>
@@ -6509,7 +6365,7 @@
 </file>
 
 <file path=ppt/slides/slide15.xml><?xml version="1.0" encoding="utf-8"?>
-<p:sld xmlns:a="http://schemas.openxmlformats.org/drawingml/2006/main" xmlns:r="http://schemas.openxmlformats.org/officeDocument/2006/relationships" xmlns:p="http://schemas.openxmlformats.org/presentationml/2006/main">
+<p:sld xmlns:a="http://schemas.openxmlformats.org/drawingml/2006/main" xmlns:p="http://schemas.openxmlformats.org/presentationml/2006/main" xmlns:r="http://schemas.openxmlformats.org/officeDocument/2006/relationships">
   <p:cSld>
     <p:spTree>
       <p:nvGrpSpPr>
@@ -6517,14 +6373,7 @@
         <p:cNvGrpSpPr/>
         <p:nvPr/>
       </p:nvGrpSpPr>
-      <p:grpSpPr>
-        <a:xfrm>
-          <a:off x="0" y="0"/>
-          <a:ext cx="0" cy="0"/>
-          <a:chOff x="0" y="0"/>
-          <a:chExt cx="0" cy="0"/>
-        </a:xfrm>
-      </p:grpSpPr>
+      <p:grpSpPr/>
       <p:sp>
         <p:nvSpPr>
           <p:cNvPr id="2" name="Rectangle 1"/>
@@ -6565,7 +6414,6 @@
           <a:lstStyle/>
           <a:p>
             <a:pPr algn="ctr"/>
-            <a:endParaRPr/>
           </a:p>
         </p:txBody>
       </p:sp>
@@ -6609,7 +6457,6 @@
           <a:lstStyle/>
           <a:p>
             <a:pPr algn="ctr"/>
-            <a:endParaRPr/>
           </a:p>
         </p:txBody>
       </p:sp>
@@ -6686,7 +6533,6 @@
           <a:lstStyle/>
           <a:p>
             <a:pPr algn="ctr"/>
-            <a:endParaRPr/>
           </a:p>
         </p:txBody>
       </p:sp>
@@ -6795,7 +6641,7 @@
           </a:fontRef>
         </p:style>
         <p:txBody>
-          <a:bodyPr wrap="square" lIns="137160" tIns="91440" rIns="137160" bIns="91440" rtlCol="0" anchor="ctr"/>
+          <a:bodyPr rtlCol="0" anchor="ctr" lIns="137160" rIns="137160" tIns="91440" bIns="91440" wrap="square"/>
           <a:lstStyle/>
           <a:p>
             <a:pPr algn="ctr"/>
@@ -6810,12 +6656,15 @@
             </a:r>
           </a:p>
           <a:p>
-            <a:endParaRPr sz="1300">
-              <a:solidFill>
-                <a:srgbClr val="0B1F3A"/>
-              </a:solidFill>
-              <a:latin typeface="Consolas"/>
-            </a:endParaRPr>
+            <a:r>
+              <a:rPr sz="1300">
+                <a:solidFill>
+                  <a:srgbClr val="0B1F3A"/>
+                </a:solidFill>
+                <a:latin typeface="Consolas"/>
+              </a:rPr>
+              <a:t/>
+            </a:r>
           </a:p>
           <a:p>
             <a:r>
@@ -6890,7 +6739,7 @@
           </a:fontRef>
         </p:style>
         <p:txBody>
-          <a:bodyPr wrap="square" lIns="182880" tIns="137160" rIns="182880" rtlCol="0" anchor="ctr"/>
+          <a:bodyPr rtlCol="0" anchor="ctr" lIns="182880" tIns="137160" rIns="182880" wrap="square"/>
           <a:lstStyle/>
           <a:p>
             <a:pPr algn="ctr"/>
@@ -6958,7 +6807,7 @@
           </a:fontRef>
         </p:style>
         <p:txBody>
-          <a:bodyPr wrap="square" lIns="182880" tIns="137160" rIns="182880" rtlCol="0" anchor="ctr"/>
+          <a:bodyPr rtlCol="0" anchor="ctr" lIns="182880" tIns="137160" rIns="182880" wrap="square"/>
           <a:lstStyle/>
           <a:p>
             <a:pPr algn="ctr"/>
@@ -7085,7 +6934,7 @@
                   <a:srgbClr val="4A4A4A"/>
                 </a:solidFill>
               </a:rPr>
-              <a:t>15 / 26</a:t>
+              <a:t>15 / 27</a:t>
             </a:r>
           </a:p>
         </p:txBody>
@@ -7099,7 +6948,7 @@
 </file>
 
 <file path=ppt/slides/slide16.xml><?xml version="1.0" encoding="utf-8"?>
-<p:sld xmlns:a="http://schemas.openxmlformats.org/drawingml/2006/main" xmlns:r="http://schemas.openxmlformats.org/officeDocument/2006/relationships" xmlns:p="http://schemas.openxmlformats.org/presentationml/2006/main">
+<p:sld xmlns:a="http://schemas.openxmlformats.org/drawingml/2006/main" xmlns:p="http://schemas.openxmlformats.org/presentationml/2006/main" xmlns:r="http://schemas.openxmlformats.org/officeDocument/2006/relationships">
   <p:cSld>
     <p:spTree>
       <p:nvGrpSpPr>
@@ -7107,14 +6956,7 @@
         <p:cNvGrpSpPr/>
         <p:nvPr/>
       </p:nvGrpSpPr>
-      <p:grpSpPr>
-        <a:xfrm>
-          <a:off x="0" y="0"/>
-          <a:ext cx="0" cy="0"/>
-          <a:chOff x="0" y="0"/>
-          <a:chExt cx="0" cy="0"/>
-        </a:xfrm>
-      </p:grpSpPr>
+      <p:grpSpPr/>
       <p:sp>
         <p:nvSpPr>
           <p:cNvPr id="2" name="Rectangle 1"/>
@@ -7155,7 +6997,6 @@
           <a:lstStyle/>
           <a:p>
             <a:pPr algn="ctr"/>
-            <a:endParaRPr/>
           </a:p>
         </p:txBody>
       </p:sp>
@@ -7199,7 +7040,6 @@
           <a:lstStyle/>
           <a:p>
             <a:pPr algn="ctr"/>
-            <a:endParaRPr/>
           </a:p>
         </p:txBody>
       </p:sp>
@@ -7276,7 +7116,6 @@
           <a:lstStyle/>
           <a:p>
             <a:pPr algn="ctr"/>
-            <a:endParaRPr/>
           </a:p>
         </p:txBody>
       </p:sp>
@@ -7385,7 +7224,7 @@
           </a:fontRef>
         </p:style>
         <p:txBody>
-          <a:bodyPr wrap="square" lIns="137160" tIns="91440" rIns="137160" bIns="91440" rtlCol="0" anchor="ctr"/>
+          <a:bodyPr rtlCol="0" anchor="ctr" lIns="137160" rIns="137160" tIns="91440" bIns="91440" wrap="square"/>
           <a:lstStyle/>
           <a:p>
             <a:pPr algn="ctr"/>
@@ -7422,12 +7261,15 @@
             </a:r>
           </a:p>
           <a:p>
-            <a:endParaRPr sz="1300">
-              <a:solidFill>
-                <a:srgbClr val="0B1F3A"/>
-              </a:solidFill>
-              <a:latin typeface="Consolas"/>
-            </a:endParaRPr>
+            <a:r>
+              <a:rPr sz="1300">
+                <a:solidFill>
+                  <a:srgbClr val="0B1F3A"/>
+                </a:solidFill>
+                <a:latin typeface="Consolas"/>
+              </a:rPr>
+              <a:t/>
+            </a:r>
           </a:p>
           <a:p>
             <a:r>
@@ -7480,7 +7322,7 @@
           </a:fontRef>
         </p:style>
         <p:txBody>
-          <a:bodyPr wrap="square" lIns="182880" tIns="137160" rIns="182880" rtlCol="0" anchor="ctr"/>
+          <a:bodyPr rtlCol="0" anchor="ctr" lIns="182880" tIns="137160" rIns="182880" wrap="square"/>
           <a:lstStyle/>
           <a:p>
             <a:pPr algn="ctr"/>
@@ -7548,7 +7390,7 @@
           </a:fontRef>
         </p:style>
         <p:txBody>
-          <a:bodyPr wrap="square" lIns="182880" tIns="137160" rIns="182880" rtlCol="0" anchor="ctr"/>
+          <a:bodyPr rtlCol="0" anchor="ctr" lIns="182880" tIns="137160" rIns="182880" wrap="square"/>
           <a:lstStyle/>
           <a:p>
             <a:pPr algn="ctr"/>
@@ -7675,7 +7517,7 @@
                   <a:srgbClr val="4A4A4A"/>
                 </a:solidFill>
               </a:rPr>
-              <a:t>16 / 26</a:t>
+              <a:t>16 / 27</a:t>
             </a:r>
           </a:p>
         </p:txBody>
@@ -7689,7 +7531,7 @@
 </file>
 
 <file path=ppt/slides/slide17.xml><?xml version="1.0" encoding="utf-8"?>
-<p:sld xmlns:a="http://schemas.openxmlformats.org/drawingml/2006/main" xmlns:r="http://schemas.openxmlformats.org/officeDocument/2006/relationships" xmlns:p="http://schemas.openxmlformats.org/presentationml/2006/main">
+<p:sld xmlns:a="http://schemas.openxmlformats.org/drawingml/2006/main" xmlns:p="http://schemas.openxmlformats.org/presentationml/2006/main" xmlns:r="http://schemas.openxmlformats.org/officeDocument/2006/relationships">
   <p:cSld>
     <p:spTree>
       <p:nvGrpSpPr>
@@ -7697,14 +7539,7 @@
         <p:cNvGrpSpPr/>
         <p:nvPr/>
       </p:nvGrpSpPr>
-      <p:grpSpPr>
-        <a:xfrm>
-          <a:off x="0" y="0"/>
-          <a:ext cx="0" cy="0"/>
-          <a:chOff x="0" y="0"/>
-          <a:chExt cx="0" cy="0"/>
-        </a:xfrm>
-      </p:grpSpPr>
+      <p:grpSpPr/>
       <p:sp>
         <p:nvSpPr>
           <p:cNvPr id="2" name="Rectangle 1"/>
@@ -7745,7 +7580,6 @@
           <a:lstStyle/>
           <a:p>
             <a:pPr algn="ctr"/>
-            <a:endParaRPr/>
           </a:p>
         </p:txBody>
       </p:sp>
@@ -7789,7 +7623,6 @@
           <a:lstStyle/>
           <a:p>
             <a:pPr algn="ctr"/>
-            <a:endParaRPr/>
           </a:p>
         </p:txBody>
       </p:sp>
@@ -7866,7 +7699,6 @@
           <a:lstStyle/>
           <a:p>
             <a:pPr algn="ctr"/>
-            <a:endParaRPr/>
           </a:p>
         </p:txBody>
       </p:sp>
@@ -7956,20 +7788,8 @@
                 <a:tableStyleId>{5C22544A-7EE6-4342-B048-85BDC9FD1C3A}</a:tableStyleId>
               </a:tblPr>
               <a:tblGrid>
-                <a:gridCol w="5486400">
-                  <a:extLst>
-                    <a:ext uri="{9D8B030D-6E8A-4147-A177-3AD203B41FA5}">
-                      <a16:colId xmlns:a16="http://schemas.microsoft.com/office/drawing/2014/main" val="20000"/>
-                    </a:ext>
-                  </a:extLst>
-                </a:gridCol>
-                <a:gridCol w="5486400">
-                  <a:extLst>
-                    <a:ext uri="{9D8B030D-6E8A-4147-A177-3AD203B41FA5}">
-                      <a16:colId xmlns:a16="http://schemas.microsoft.com/office/drawing/2014/main" val="20001"/>
-                    </a:ext>
-                  </a:extLst>
-                </a:gridCol>
+                <a:gridCol w="5486400"/>
+                <a:gridCol w="5486400"/>
               </a:tblGrid>
               <a:tr h="685800">
                 <a:tc>
@@ -8016,11 +7836,6 @@
                     </a:solidFill>
                   </a:tcPr>
                 </a:tc>
-                <a:extLst>
-                  <a:ext uri="{0D108BD9-81ED-4DB2-BD59-A6C34878D82A}">
-                    <a16:rowId xmlns:a16="http://schemas.microsoft.com/office/drawing/2014/main" val="10000"/>
-                  </a:ext>
-                </a:extLst>
               </a:tr>
               <a:tr h="685800">
                 <a:tc>
@@ -8067,11 +7882,6 @@
                     </a:solidFill>
                   </a:tcPr>
                 </a:tc>
-                <a:extLst>
-                  <a:ext uri="{0D108BD9-81ED-4DB2-BD59-A6C34878D82A}">
-                    <a16:rowId xmlns:a16="http://schemas.microsoft.com/office/drawing/2014/main" val="10001"/>
-                  </a:ext>
-                </a:extLst>
               </a:tr>
               <a:tr h="685800">
                 <a:tc>
@@ -8118,11 +7928,6 @@
                     </a:solidFill>
                   </a:tcPr>
                 </a:tc>
-                <a:extLst>
-                  <a:ext uri="{0D108BD9-81ED-4DB2-BD59-A6C34878D82A}">
-                    <a16:rowId xmlns:a16="http://schemas.microsoft.com/office/drawing/2014/main" val="10002"/>
-                  </a:ext>
-                </a:extLst>
               </a:tr>
               <a:tr h="685800">
                 <a:tc>
@@ -8169,11 +7974,6 @@
                     </a:solidFill>
                   </a:tcPr>
                 </a:tc>
-                <a:extLst>
-                  <a:ext uri="{0D108BD9-81ED-4DB2-BD59-A6C34878D82A}">
-                    <a16:rowId xmlns:a16="http://schemas.microsoft.com/office/drawing/2014/main" val="10003"/>
-                  </a:ext>
-                </a:extLst>
               </a:tr>
             </a:tbl>
           </a:graphicData>
@@ -8217,7 +8017,7 @@
           </a:fontRef>
         </p:style>
         <p:txBody>
-          <a:bodyPr wrap="square" lIns="182880" tIns="137160" rIns="182880" rtlCol="0" anchor="ctr"/>
+          <a:bodyPr rtlCol="0" anchor="ctr" lIns="182880" tIns="137160" rIns="182880" wrap="square"/>
           <a:lstStyle/>
           <a:p>
             <a:pPr algn="ctr"/>
@@ -8344,7 +8144,7 @@
                   <a:srgbClr val="4A4A4A"/>
                 </a:solidFill>
               </a:rPr>
-              <a:t>17 / 26</a:t>
+              <a:t>17 / 27</a:t>
             </a:r>
           </a:p>
         </p:txBody>
@@ -8358,7 +8158,7 @@
 </file>
 
 <file path=ppt/slides/slide18.xml><?xml version="1.0" encoding="utf-8"?>
-<p:sld xmlns:a="http://schemas.openxmlformats.org/drawingml/2006/main" xmlns:r="http://schemas.openxmlformats.org/officeDocument/2006/relationships" xmlns:p="http://schemas.openxmlformats.org/presentationml/2006/main">
+<p:sld xmlns:a="http://schemas.openxmlformats.org/drawingml/2006/main" xmlns:p="http://schemas.openxmlformats.org/presentationml/2006/main" xmlns:r="http://schemas.openxmlformats.org/officeDocument/2006/relationships">
   <p:cSld>
     <p:spTree>
       <p:nvGrpSpPr>
@@ -8366,14 +8166,7 @@
         <p:cNvGrpSpPr/>
         <p:nvPr/>
       </p:nvGrpSpPr>
-      <p:grpSpPr>
-        <a:xfrm>
-          <a:off x="0" y="0"/>
-          <a:ext cx="0" cy="0"/>
-          <a:chOff x="0" y="0"/>
-          <a:chExt cx="0" cy="0"/>
-        </a:xfrm>
-      </p:grpSpPr>
+      <p:grpSpPr/>
       <p:sp>
         <p:nvSpPr>
           <p:cNvPr id="2" name="Rectangle 1"/>
@@ -8414,7 +8207,6 @@
           <a:lstStyle/>
           <a:p>
             <a:pPr algn="ctr"/>
-            <a:endParaRPr/>
           </a:p>
         </p:txBody>
       </p:sp>
@@ -8458,7 +8250,6 @@
           <a:lstStyle/>
           <a:p>
             <a:pPr algn="ctr"/>
-            <a:endParaRPr/>
           </a:p>
         </p:txBody>
       </p:sp>
@@ -8535,7 +8326,6 @@
           <a:lstStyle/>
           <a:p>
             <a:pPr algn="ctr"/>
-            <a:endParaRPr/>
           </a:p>
         </p:txBody>
       </p:sp>
@@ -8567,7 +8357,7 @@
                   <a:srgbClr val="4A4A4A"/>
                 </a:solidFill>
               </a:rPr>
-              <a:t>All four systems on the same test split</a:t>
+              <a:t>All five systems on the same test split</a:t>
             </a:r>
           </a:p>
         </p:txBody>
@@ -8591,36 +8381,12 @@
                 <a:tableStyleId>{5C22544A-7EE6-4342-B048-85BDC9FD1C3A}</a:tableStyleId>
               </a:tblPr>
               <a:tblGrid>
-                <a:gridCol w="1485900">
-                  <a:extLst>
-                    <a:ext uri="{9D8B030D-6E8A-4147-A177-3AD203B41FA5}">
-                      <a16:colId xmlns:a16="http://schemas.microsoft.com/office/drawing/2014/main" val="20000"/>
-                    </a:ext>
-                  </a:extLst>
-                </a:gridCol>
-                <a:gridCol w="1485900">
-                  <a:extLst>
-                    <a:ext uri="{9D8B030D-6E8A-4147-A177-3AD203B41FA5}">
-                      <a16:colId xmlns:a16="http://schemas.microsoft.com/office/drawing/2014/main" val="20001"/>
-                    </a:ext>
-                  </a:extLst>
-                </a:gridCol>
-                <a:gridCol w="1485900">
-                  <a:extLst>
-                    <a:ext uri="{9D8B030D-6E8A-4147-A177-3AD203B41FA5}">
-                      <a16:colId xmlns:a16="http://schemas.microsoft.com/office/drawing/2014/main" val="20002"/>
-                    </a:ext>
-                  </a:extLst>
-                </a:gridCol>
-                <a:gridCol w="1485900">
-                  <a:extLst>
-                    <a:ext uri="{9D8B030D-6E8A-4147-A177-3AD203B41FA5}">
-                      <a16:colId xmlns:a16="http://schemas.microsoft.com/office/drawing/2014/main" val="20003"/>
-                    </a:ext>
-                  </a:extLst>
-                </a:gridCol>
+                <a:gridCol w="1485900"/>
+                <a:gridCol w="1485900"/>
+                <a:gridCol w="1485900"/>
+                <a:gridCol w="1485900"/>
               </a:tblGrid>
-              <a:tr h="548640">
+              <a:tr h="457200">
                 <a:tc>
                   <a:txBody>
                     <a:bodyPr/>
@@ -8709,13 +8475,8 @@
                     </a:solidFill>
                   </a:tcPr>
                 </a:tc>
-                <a:extLst>
-                  <a:ext uri="{0D108BD9-81ED-4DB2-BD59-A6C34878D82A}">
-                    <a16:rowId xmlns:a16="http://schemas.microsoft.com/office/drawing/2014/main" val="10000"/>
-                  </a:ext>
-                </a:extLst>
               </a:tr>
-              <a:tr h="548640">
+              <a:tr h="457200">
                 <a:tc>
                   <a:txBody>
                     <a:bodyPr/>
@@ -8804,13 +8565,8 @@
                     </a:solidFill>
                   </a:tcPr>
                 </a:tc>
-                <a:extLst>
-                  <a:ext uri="{0D108BD9-81ED-4DB2-BD59-A6C34878D82A}">
-                    <a16:rowId xmlns:a16="http://schemas.microsoft.com/office/drawing/2014/main" val="10001"/>
-                  </a:ext>
-                </a:extLst>
               </a:tr>
-              <a:tr h="548640">
+              <a:tr h="457200">
                 <a:tc>
                   <a:txBody>
                     <a:bodyPr/>
@@ -8899,13 +8655,8 @@
                     </a:solidFill>
                   </a:tcPr>
                 </a:tc>
-                <a:extLst>
-                  <a:ext uri="{0D108BD9-81ED-4DB2-BD59-A6C34878D82A}">
-                    <a16:rowId xmlns:a16="http://schemas.microsoft.com/office/drawing/2014/main" val="10002"/>
-                  </a:ext>
-                </a:extLst>
               </a:tr>
-              <a:tr h="548640">
+              <a:tr h="457200">
                 <a:tc>
                   <a:txBody>
                     <a:bodyPr/>
@@ -8994,13 +8745,8 @@
                     </a:solidFill>
                   </a:tcPr>
                 </a:tc>
-                <a:extLst>
-                  <a:ext uri="{0D108BD9-81ED-4DB2-BD59-A6C34878D82A}">
-                    <a16:rowId xmlns:a16="http://schemas.microsoft.com/office/drawing/2014/main" val="10003"/>
-                  </a:ext>
-                </a:extLst>
               </a:tr>
-              <a:tr h="548640">
+              <a:tr h="457200">
                 <a:tc>
                   <a:txBody>
                     <a:bodyPr/>
@@ -9013,7 +8759,7 @@
                             <a:srgbClr val="4A4A4A"/>
                           </a:solidFill>
                         </a:rPr>
-                        <a:t>Hybrid</a:t>
+                        <a:t>Hybrid (naive)</a:t>
                       </a:r>
                     </a:p>
                   </a:txBody>
@@ -9089,11 +8835,96 @@
                     </a:solidFill>
                   </a:tcPr>
                 </a:tc>
-                <a:extLst>
-                  <a:ext uri="{0D108BD9-81ED-4DB2-BD59-A6C34878D82A}">
-                    <a16:rowId xmlns:a16="http://schemas.microsoft.com/office/drawing/2014/main" val="10004"/>
-                  </a:ext>
-                </a:extLst>
+              </a:tr>
+              <a:tr h="457200">
+                <a:tc>
+                  <a:txBody>
+                    <a:bodyPr/>
+                    <a:lstStyle/>
+                    <a:p>
+                      <a:pPr algn="ctr"/>
+                      <a:r>
+                        <a:rPr sz="1300" b="0">
+                          <a:solidFill>
+                            <a:srgbClr val="4A4A4A"/>
+                          </a:solidFill>
+                        </a:rPr>
+                        <a:t>Hybrid-Aware</a:t>
+                      </a:r>
+                    </a:p>
+                  </a:txBody>
+                  <a:tcPr>
+                    <a:solidFill>
+                      <a:srgbClr val="F4F6F8"/>
+                    </a:solidFill>
+                  </a:tcPr>
+                </a:tc>
+                <a:tc>
+                  <a:txBody>
+                    <a:bodyPr/>
+                    <a:lstStyle/>
+                    <a:p>
+                      <a:pPr algn="ctr"/>
+                      <a:r>
+                        <a:rPr sz="1300" b="0">
+                          <a:solidFill>
+                            <a:srgbClr val="4A4A4A"/>
+                          </a:solidFill>
+                        </a:rPr>
+                        <a:t>30.46</a:t>
+                      </a:r>
+                    </a:p>
+                  </a:txBody>
+                  <a:tcPr>
+                    <a:solidFill>
+                      <a:srgbClr val="F4F6F8"/>
+                    </a:solidFill>
+                  </a:tcPr>
+                </a:tc>
+                <a:tc>
+                  <a:txBody>
+                    <a:bodyPr/>
+                    <a:lstStyle/>
+                    <a:p>
+                      <a:pPr algn="ctr"/>
+                      <a:r>
+                        <a:rPr sz="1300" b="0">
+                          <a:solidFill>
+                            <a:srgbClr val="4A4A4A"/>
+                          </a:solidFill>
+                        </a:rPr>
+                        <a:t>6.83</a:t>
+                      </a:r>
+                    </a:p>
+                  </a:txBody>
+                  <a:tcPr>
+                    <a:solidFill>
+                      <a:srgbClr val="F4F6F8"/>
+                    </a:solidFill>
+                  </a:tcPr>
+                </a:tc>
+                <a:tc>
+                  <a:txBody>
+                    <a:bodyPr/>
+                    <a:lstStyle/>
+                    <a:p>
+                      <a:pPr algn="ctr"/>
+                      <a:r>
+                        <a:rPr sz="1300" b="0">
+                          <a:solidFill>
+                            <a:srgbClr val="4A4A4A"/>
+                          </a:solidFill>
+                        </a:rPr>
+                        <a:t>−4.67</a:t>
+                      </a:r>
+                    </a:p>
+                  </a:txBody>
+                  <a:tcPr>
+                    <a:solidFill>
+                      <a:srgbClr val="F4F6F8"/>
+                    </a:solidFill>
+                  </a:tcPr>
+                </a:tc>
               </a:tr>
             </a:tbl>
           </a:graphicData>
@@ -9116,7 +8947,7 @@
         <p:spPr>
           <a:xfrm>
             <a:off x="6675120" y="1463040"/>
-            <a:ext cx="5020765" cy="2468880"/>
+            <a:ext cx="4447753" cy="2468880"/>
           </a:xfrm>
           <a:prstGeom prst="rect">
             <a:avLst/>
@@ -9140,7 +8971,7 @@
         <p:spPr>
           <a:xfrm>
             <a:off x="6675120" y="4023360"/>
-            <a:ext cx="4650828" cy="2286000"/>
+            <a:ext cx="4118290" cy="2286000"/>
           </a:xfrm>
           <a:prstGeom prst="rect">
             <a:avLst/>
@@ -9278,7 +9109,7 @@
                   <a:srgbClr val="4A4A4A"/>
                 </a:solidFill>
               </a:rPr>
-              <a:t>18 / 26</a:t>
+              <a:t>18 / 27</a:t>
             </a:r>
           </a:p>
         </p:txBody>
@@ -9292,7 +9123,7 @@
 </file>
 
 <file path=ppt/slides/slide19.xml><?xml version="1.0" encoding="utf-8"?>
-<p:sld xmlns:a="http://schemas.openxmlformats.org/drawingml/2006/main" xmlns:r="http://schemas.openxmlformats.org/officeDocument/2006/relationships" xmlns:p="http://schemas.openxmlformats.org/presentationml/2006/main">
+<p:sld xmlns:a="http://schemas.openxmlformats.org/drawingml/2006/main" xmlns:p="http://schemas.openxmlformats.org/presentationml/2006/main" xmlns:r="http://schemas.openxmlformats.org/officeDocument/2006/relationships">
   <p:cSld>
     <p:spTree>
       <p:nvGrpSpPr>
@@ -9300,14 +9131,7 @@
         <p:cNvGrpSpPr/>
         <p:nvPr/>
       </p:nvGrpSpPr>
-      <p:grpSpPr>
-        <a:xfrm>
-          <a:off x="0" y="0"/>
-          <a:ext cx="0" cy="0"/>
-          <a:chOff x="0" y="0"/>
-          <a:chExt cx="0" cy="0"/>
-        </a:xfrm>
-      </p:grpSpPr>
+      <p:grpSpPr/>
       <p:sp>
         <p:nvSpPr>
           <p:cNvPr id="2" name="Rectangle 1"/>
@@ -9348,7 +9172,6 @@
           <a:lstStyle/>
           <a:p>
             <a:pPr algn="ctr"/>
-            <a:endParaRPr/>
           </a:p>
         </p:txBody>
       </p:sp>
@@ -9392,7 +9215,6 @@
           <a:lstStyle/>
           <a:p>
             <a:pPr algn="ctr"/>
-            <a:endParaRPr/>
           </a:p>
         </p:txBody>
       </p:sp>
@@ -9469,7 +9291,6 @@
           <a:lstStyle/>
           <a:p>
             <a:pPr algn="ctr"/>
-            <a:endParaRPr/>
           </a:p>
         </p:txBody>
       </p:sp>
@@ -9481,8 +9302,8 @@
         </p:nvSpPr>
         <p:spPr>
           <a:xfrm>
-            <a:off x="640080" y="1463040"/>
-            <a:ext cx="548640" cy="548640"/>
+            <a:off x="640080" y="1280160"/>
+            <a:ext cx="502920" cy="502920"/>
           </a:xfrm>
           <a:prstGeom prst="ellipse">
             <a:avLst/>
@@ -9509,12 +9330,12 @@
           </a:fontRef>
         </p:style>
         <p:txBody>
-          <a:bodyPr lIns="0" tIns="0" rtlCol="0" anchor="ctr"/>
+          <a:bodyPr rtlCol="0" anchor="ctr" lIns="0" tIns="0"/>
           <a:lstStyle/>
           <a:p>
             <a:pPr algn="ctr"/>
             <a:r>
-              <a:rPr sz="2000" b="1">
+              <a:rPr sz="1800" b="1">
                 <a:solidFill>
                   <a:srgbClr val="FFFFFF"/>
                 </a:solidFill>
@@ -9532,8 +9353,8 @@
         </p:nvSpPr>
         <p:spPr>
           <a:xfrm>
-            <a:off x="1371600" y="1417320"/>
-            <a:ext cx="10332720" cy="457200"/>
+            <a:off x="1325880" y="1234440"/>
+            <a:ext cx="10332720" cy="411480"/>
           </a:xfrm>
           <a:prstGeom prst="rect">
             <a:avLst/>
@@ -9547,7 +9368,7 @@
           <a:lstStyle/>
           <a:p>
             <a:r>
-              <a:rPr sz="2000" b="1">
+              <a:rPr sz="1800" b="1">
                 <a:solidFill>
                   <a:srgbClr val="0B1F3A"/>
                 </a:solidFill>
@@ -9565,7 +9386,7 @@
         </p:nvSpPr>
         <p:spPr>
           <a:xfrm>
-            <a:off x="1371600" y="1828800"/>
+            <a:off x="1325880" y="1600200"/>
             <a:ext cx="10332720" cy="457200"/>
           </a:xfrm>
           <a:prstGeom prst="rect">
@@ -9580,7 +9401,7 @@
           <a:lstStyle/>
           <a:p>
             <a:r>
-              <a:rPr sz="1400">
+              <a:rPr sz="1300">
                 <a:solidFill>
                   <a:srgbClr val="4A4A4A"/>
                 </a:solidFill>
@@ -9598,8 +9419,8 @@
         </p:nvSpPr>
         <p:spPr>
           <a:xfrm>
-            <a:off x="640080" y="2651760"/>
-            <a:ext cx="548640" cy="548640"/>
+            <a:off x="640080" y="2240280"/>
+            <a:ext cx="502920" cy="502920"/>
           </a:xfrm>
           <a:prstGeom prst="ellipse">
             <a:avLst/>
@@ -9626,12 +9447,12 @@
           </a:fontRef>
         </p:style>
         <p:txBody>
-          <a:bodyPr lIns="0" tIns="0" rtlCol="0" anchor="ctr"/>
+          <a:bodyPr rtlCol="0" anchor="ctr" lIns="0" tIns="0"/>
           <a:lstStyle/>
           <a:p>
             <a:pPr algn="ctr"/>
             <a:r>
-              <a:rPr sz="2000" b="1">
+              <a:rPr sz="1800" b="1">
                 <a:solidFill>
                   <a:srgbClr val="FFFFFF"/>
                 </a:solidFill>
@@ -9649,8 +9470,8 @@
         </p:nvSpPr>
         <p:spPr>
           <a:xfrm>
-            <a:off x="1371600" y="2606040"/>
-            <a:ext cx="10332720" cy="457200"/>
+            <a:off x="1325880" y="2194560"/>
+            <a:ext cx="10332720" cy="411480"/>
           </a:xfrm>
           <a:prstGeom prst="rect">
             <a:avLst/>
@@ -9664,7 +9485,7 @@
           <a:lstStyle/>
           <a:p>
             <a:r>
-              <a:rPr sz="2000" b="1">
+              <a:rPr sz="1800" b="1">
                 <a:solidFill>
                   <a:srgbClr val="0B1F3A"/>
                 </a:solidFill>
@@ -9682,7 +9503,7 @@
         </p:nvSpPr>
         <p:spPr>
           <a:xfrm>
-            <a:off x="1371600" y="3017520"/>
+            <a:off x="1325880" y="2560320"/>
             <a:ext cx="10332720" cy="457200"/>
           </a:xfrm>
           <a:prstGeom prst="rect">
@@ -9697,7 +9518,7 @@
           <a:lstStyle/>
           <a:p>
             <a:r>
-              <a:rPr sz="1400">
+              <a:rPr sz="1300">
                 <a:solidFill>
                   <a:srgbClr val="4A4A4A"/>
                 </a:solidFill>
@@ -9715,8 +9536,8 @@
         </p:nvSpPr>
         <p:spPr>
           <a:xfrm>
-            <a:off x="640080" y="3840480"/>
-            <a:ext cx="548640" cy="548640"/>
+            <a:off x="640080" y="3200400"/>
+            <a:ext cx="502920" cy="502920"/>
           </a:xfrm>
           <a:prstGeom prst="ellipse">
             <a:avLst/>
@@ -9743,12 +9564,12 @@
           </a:fontRef>
         </p:style>
         <p:txBody>
-          <a:bodyPr lIns="0" tIns="0" rtlCol="0" anchor="ctr"/>
+          <a:bodyPr rtlCol="0" anchor="ctr" lIns="0" tIns="0"/>
           <a:lstStyle/>
           <a:p>
             <a:pPr algn="ctr"/>
             <a:r>
-              <a:rPr sz="2000" b="1">
+              <a:rPr sz="1800" b="1">
                 <a:solidFill>
                   <a:srgbClr val="FFFFFF"/>
                 </a:solidFill>
@@ -9766,8 +9587,8 @@
         </p:nvSpPr>
         <p:spPr>
           <a:xfrm>
-            <a:off x="1371600" y="3794760"/>
-            <a:ext cx="10332720" cy="457200"/>
+            <a:off x="1325880" y="3154680"/>
+            <a:ext cx="10332720" cy="411480"/>
           </a:xfrm>
           <a:prstGeom prst="rect">
             <a:avLst/>
@@ -9781,12 +9602,12 @@
           <a:lstStyle/>
           <a:p>
             <a:r>
-              <a:rPr sz="2000" b="1">
+              <a:rPr sz="1800" b="1">
                 <a:solidFill>
                   <a:srgbClr val="0B1F3A"/>
                 </a:solidFill>
               </a:rPr>
-              <a:t>Hybrid underperforms pure T5</a:t>
+              <a:t>Naive hybrid underperforms T5</a:t>
             </a:r>
           </a:p>
         </p:txBody>
@@ -9799,7 +9620,7 @@
         </p:nvSpPr>
         <p:spPr>
           <a:xfrm>
-            <a:off x="1371600" y="4206240"/>
+            <a:off x="1325880" y="3520440"/>
             <a:ext cx="10332720" cy="457200"/>
           </a:xfrm>
           <a:prstGeom prst="rect">
@@ -9814,12 +9635,12 @@
           <a:lstStyle/>
           <a:p>
             <a:r>
-              <a:rPr sz="1400">
+              <a:rPr sz="1300">
                 <a:solidFill>
                   <a:srgbClr val="4A4A4A"/>
                 </a:solidFill>
               </a:rPr>
-              <a:t>Pre-substitution removes context T5 uses.</a:t>
+              <a:t>Pre-substitution at inference removes context T5 was trained on.</a:t>
             </a:r>
           </a:p>
         </p:txBody>
@@ -9832,8 +9653,8 @@
         </p:nvSpPr>
         <p:spPr>
           <a:xfrm>
-            <a:off x="640080" y="5029200"/>
-            <a:ext cx="548640" cy="548640"/>
+            <a:off x="640080" y="4160520"/>
+            <a:ext cx="502920" cy="502920"/>
           </a:xfrm>
           <a:prstGeom prst="ellipse">
             <a:avLst/>
@@ -9860,12 +9681,12 @@
           </a:fontRef>
         </p:style>
         <p:txBody>
-          <a:bodyPr lIns="0" tIns="0" rtlCol="0" anchor="ctr"/>
+          <a:bodyPr rtlCol="0" anchor="ctr" lIns="0" tIns="0"/>
           <a:lstStyle/>
           <a:p>
             <a:pPr algn="ctr"/>
             <a:r>
-              <a:rPr sz="2000" b="1">
+              <a:rPr sz="1800" b="1">
                 <a:solidFill>
                   <a:srgbClr val="FFFFFF"/>
                 </a:solidFill>
@@ -9883,8 +9704,8 @@
         </p:nvSpPr>
         <p:spPr>
           <a:xfrm>
-            <a:off x="1371600" y="4983480"/>
-            <a:ext cx="10332720" cy="457200"/>
+            <a:off x="1325880" y="4114800"/>
+            <a:ext cx="10332720" cy="411480"/>
           </a:xfrm>
           <a:prstGeom prst="rect">
             <a:avLst/>
@@ -9898,12 +9719,12 @@
           <a:lstStyle/>
           <a:p>
             <a:r>
-              <a:rPr sz="2000" b="1">
+              <a:rPr sz="1800" b="1">
                 <a:solidFill>
                   <a:srgbClr val="0B1F3A"/>
                 </a:solidFill>
               </a:rPr>
-              <a:t>Rule-based loses on SARI / BLEU</a:t>
+              <a:t>Aware hybrid recovers ~25% of gap</a:t>
             </a:r>
           </a:p>
         </p:txBody>
@@ -9916,7 +9737,7 @@
         </p:nvSpPr>
         <p:spPr>
           <a:xfrm>
-            <a:off x="1371600" y="5394960"/>
+            <a:off x="1325880" y="4480560"/>
             <a:ext cx="10332720" cy="457200"/>
           </a:xfrm>
           <a:prstGeom prst="rect">
@@ -9931,7 +9752,124 @@
           <a:lstStyle/>
           <a:p>
             <a:r>
-              <a:rPr sz="1400">
+              <a:rPr sz="1300">
+                <a:solidFill>
+                  <a:srgbClr val="4A4A4A"/>
+                </a:solidFill>
+              </a:rPr>
+              <a:t>29.48 → 30.46 SARI. Still below T5 (33.41) — residual cost of preprocessing.</a:t>
+            </a:r>
+          </a:p>
+        </p:txBody>
+      </p:sp>
+      <p:sp>
+        <p:nvSpPr>
+          <p:cNvPr id="18" name="Oval 17"/>
+          <p:cNvSpPr/>
+          <p:nvPr/>
+        </p:nvSpPr>
+        <p:spPr>
+          <a:xfrm>
+            <a:off x="640080" y="5120640"/>
+            <a:ext cx="502920" cy="502920"/>
+          </a:xfrm>
+          <a:prstGeom prst="ellipse">
+            <a:avLst/>
+          </a:prstGeom>
+          <a:solidFill>
+            <a:srgbClr val="148F96"/>
+          </a:solidFill>
+          <a:ln>
+            <a:noFill/>
+          </a:ln>
+        </p:spPr>
+        <p:style>
+          <a:lnRef idx="1">
+            <a:schemeClr val="accent1"/>
+          </a:lnRef>
+          <a:fillRef idx="3">
+            <a:schemeClr val="accent1"/>
+          </a:fillRef>
+          <a:effectRef idx="2">
+            <a:schemeClr val="accent1"/>
+          </a:effectRef>
+          <a:fontRef idx="minor">
+            <a:schemeClr val="lt1"/>
+          </a:fontRef>
+        </p:style>
+        <p:txBody>
+          <a:bodyPr rtlCol="0" anchor="ctr" lIns="0" tIns="0"/>
+          <a:lstStyle/>
+          <a:p>
+            <a:pPr algn="ctr"/>
+            <a:r>
+              <a:rPr sz="1800" b="1">
+                <a:solidFill>
+                  <a:srgbClr val="FFFFFF"/>
+                </a:solidFill>
+              </a:rPr>
+              <a:t>5</a:t>
+            </a:r>
+          </a:p>
+        </p:txBody>
+      </p:sp>
+      <p:sp>
+        <p:nvSpPr>
+          <p:cNvPr id="19" name="TextBox 18"/>
+          <p:cNvSpPr txBox="1"/>
+          <p:nvPr/>
+        </p:nvSpPr>
+        <p:spPr>
+          <a:xfrm>
+            <a:off x="1325880" y="5074920"/>
+            <a:ext cx="10332720" cy="411480"/>
+          </a:xfrm>
+          <a:prstGeom prst="rect">
+            <a:avLst/>
+          </a:prstGeom>
+          <a:noFill/>
+        </p:spPr>
+        <p:txBody>
+          <a:bodyPr wrap="none">
+            <a:spAutoFit/>
+          </a:bodyPr>
+          <a:lstStyle/>
+          <a:p>
+            <a:r>
+              <a:rPr sz="1800" b="1">
+                <a:solidFill>
+                  <a:srgbClr val="0B1F3A"/>
+                </a:solidFill>
+              </a:rPr>
+              <a:t>Rule-based loses on SARI / BLEU</a:t>
+            </a:r>
+          </a:p>
+        </p:txBody>
+      </p:sp>
+      <p:sp>
+        <p:nvSpPr>
+          <p:cNvPr id="20" name="TextBox 19"/>
+          <p:cNvSpPr txBox="1"/>
+          <p:nvPr/>
+        </p:nvSpPr>
+        <p:spPr>
+          <a:xfrm>
+            <a:off x="1325880" y="5440680"/>
+            <a:ext cx="10332720" cy="457200"/>
+          </a:xfrm>
+          <a:prstGeom prst="rect">
+            <a:avLst/>
+          </a:prstGeom>
+          <a:noFill/>
+        </p:spPr>
+        <p:txBody>
+          <a:bodyPr wrap="none">
+            <a:spAutoFit/>
+          </a:bodyPr>
+          <a:lstStyle/>
+          <a:p>
+            <a:r>
+              <a:rPr sz="1300">
                 <a:solidFill>
                   <a:srgbClr val="4A4A4A"/>
                 </a:solidFill>
@@ -9943,7 +9881,7 @@
       </p:sp>
       <p:cxnSp>
         <p:nvCxnSpPr>
-          <p:cNvPr id="18" name="Connector 17"/>
+          <p:cNvPr id="21" name="Connector 20"/>
           <p:cNvCxnSpPr/>
           <p:nvPr/>
         </p:nvCxnSpPr>
@@ -9978,7 +9916,7 @@
       </p:cxnSp>
       <p:sp>
         <p:nvSpPr>
-          <p:cNvPr id="19" name="TextBox 18"/>
+          <p:cNvPr id="22" name="TextBox 21"/>
           <p:cNvSpPr txBox="1"/>
           <p:nvPr/>
         </p:nvSpPr>
@@ -10011,7 +9949,7 @@
       </p:sp>
       <p:sp>
         <p:nvSpPr>
-          <p:cNvPr id="20" name="TextBox 19"/>
+          <p:cNvPr id="23" name="TextBox 22"/>
           <p:cNvSpPr txBox="1"/>
           <p:nvPr/>
         </p:nvSpPr>
@@ -10038,7 +9976,7 @@
                   <a:srgbClr val="4A4A4A"/>
                 </a:solidFill>
               </a:rPr>
-              <a:t>19 / 26</a:t>
+              <a:t>19 / 27</a:t>
             </a:r>
           </a:p>
         </p:txBody>
@@ -10052,7 +9990,7 @@
 </file>
 
 <file path=ppt/slides/slide2.xml><?xml version="1.0" encoding="utf-8"?>
-<p:sld xmlns:a="http://schemas.openxmlformats.org/drawingml/2006/main" xmlns:r="http://schemas.openxmlformats.org/officeDocument/2006/relationships" xmlns:p="http://schemas.openxmlformats.org/presentationml/2006/main">
+<p:sld xmlns:a="http://schemas.openxmlformats.org/drawingml/2006/main" xmlns:p="http://schemas.openxmlformats.org/presentationml/2006/main" xmlns:r="http://schemas.openxmlformats.org/officeDocument/2006/relationships">
   <p:cSld>
     <p:spTree>
       <p:nvGrpSpPr>
@@ -10060,14 +9998,7 @@
         <p:cNvGrpSpPr/>
         <p:nvPr/>
       </p:nvGrpSpPr>
-      <p:grpSpPr>
-        <a:xfrm>
-          <a:off x="0" y="0"/>
-          <a:ext cx="0" cy="0"/>
-          <a:chOff x="0" y="0"/>
-          <a:chExt cx="0" cy="0"/>
-        </a:xfrm>
-      </p:grpSpPr>
+      <p:grpSpPr/>
       <p:sp>
         <p:nvSpPr>
           <p:cNvPr id="2" name="Rectangle 1"/>
@@ -10108,7 +10039,6 @@
           <a:lstStyle/>
           <a:p>
             <a:pPr algn="ctr"/>
-            <a:endParaRPr/>
           </a:p>
         </p:txBody>
       </p:sp>
@@ -10152,7 +10082,6 @@
           <a:lstStyle/>
           <a:p>
             <a:pPr algn="ctr"/>
-            <a:endParaRPr/>
           </a:p>
         </p:txBody>
       </p:sp>
@@ -10229,7 +10158,6 @@
           <a:lstStyle/>
           <a:p>
             <a:pPr algn="ctr"/>
-            <a:endParaRPr/>
           </a:p>
         </p:txBody>
       </p:sp>
@@ -10436,7 +10364,7 @@
           </a:fontRef>
         </p:style>
         <p:txBody>
-          <a:bodyPr wrap="square" lIns="182880" tIns="137160" rIns="182880" rtlCol="0" anchor="ctr"/>
+          <a:bodyPr rtlCol="0" anchor="ctr" lIns="182880" tIns="137160" rIns="182880" wrap="square"/>
           <a:lstStyle/>
           <a:p>
             <a:pPr algn="ctr"/>
@@ -10504,7 +10432,7 @@
           </a:fontRef>
         </p:style>
         <p:txBody>
-          <a:bodyPr wrap="square" lIns="182880" tIns="137160" rIns="182880" rtlCol="0" anchor="ctr"/>
+          <a:bodyPr rtlCol="0" anchor="ctr" lIns="182880" tIns="137160" rIns="182880" wrap="square"/>
           <a:lstStyle/>
           <a:p>
             <a:pPr algn="ctr"/>
@@ -10631,7 +10559,7 @@
                   <a:srgbClr val="4A4A4A"/>
                 </a:solidFill>
               </a:rPr>
-              <a:t>2 / 26</a:t>
+              <a:t>2 / 27</a:t>
             </a:r>
           </a:p>
         </p:txBody>
@@ -10645,7 +10573,7 @@
 </file>
 
 <file path=ppt/slides/slide20.xml><?xml version="1.0" encoding="utf-8"?>
-<p:sld xmlns:a="http://schemas.openxmlformats.org/drawingml/2006/main" xmlns:r="http://schemas.openxmlformats.org/officeDocument/2006/relationships" xmlns:p="http://schemas.openxmlformats.org/presentationml/2006/main">
+<p:sld xmlns:a="http://schemas.openxmlformats.org/drawingml/2006/main" xmlns:p="http://schemas.openxmlformats.org/presentationml/2006/main" xmlns:r="http://schemas.openxmlformats.org/officeDocument/2006/relationships">
   <p:cSld>
     <p:spTree>
       <p:nvGrpSpPr>
@@ -10653,14 +10581,7 @@
         <p:cNvGrpSpPr/>
         <p:nvPr/>
       </p:nvGrpSpPr>
-      <p:grpSpPr>
-        <a:xfrm>
-          <a:off x="0" y="0"/>
-          <a:ext cx="0" cy="0"/>
-          <a:chOff x="0" y="0"/>
-          <a:chExt cx="0" cy="0"/>
-        </a:xfrm>
-      </p:grpSpPr>
+      <p:grpSpPr/>
       <p:sp>
         <p:nvSpPr>
           <p:cNvPr id="2" name="Rectangle 1"/>
@@ -10701,7 +10622,6 @@
           <a:lstStyle/>
           <a:p>
             <a:pPr algn="ctr"/>
-            <a:endParaRPr/>
           </a:p>
         </p:txBody>
       </p:sp>
@@ -10745,7 +10665,6 @@
           <a:lstStyle/>
           <a:p>
             <a:pPr algn="ctr"/>
-            <a:endParaRPr/>
           </a:p>
         </p:txBody>
       </p:sp>
@@ -10822,7 +10741,6 @@
           <a:lstStyle/>
           <a:p>
             <a:pPr algn="ctr"/>
-            <a:endParaRPr/>
           </a:p>
         </p:txBody>
       </p:sp>
@@ -10897,7 +10815,7 @@
           </a:fontRef>
         </p:style>
         <p:txBody>
-          <a:bodyPr wrap="square" lIns="137160" tIns="91440" rIns="137160" bIns="91440" rtlCol="0" anchor="ctr"/>
+          <a:bodyPr rtlCol="0" anchor="ctr" lIns="137160" rIns="137160" tIns="91440" bIns="91440" wrap="square"/>
           <a:lstStyle/>
           <a:p>
             <a:pPr algn="ctr"/>
@@ -10973,7 +10891,7 @@
           </a:fontRef>
         </p:style>
         <p:txBody>
-          <a:bodyPr wrap="square" lIns="182880" tIns="137160" rIns="182880" rtlCol="0" anchor="ctr"/>
+          <a:bodyPr rtlCol="0" anchor="ctr" lIns="182880" tIns="137160" rIns="182880" wrap="square"/>
           <a:lstStyle/>
           <a:p>
             <a:pPr algn="ctr"/>
@@ -11100,7 +11018,7 @@
                   <a:srgbClr val="4A4A4A"/>
                 </a:solidFill>
               </a:rPr>
-              <a:t>20 / 26</a:t>
+              <a:t>20 / 27</a:t>
             </a:r>
           </a:p>
         </p:txBody>
@@ -11114,7 +11032,7 @@
 </file>
 
 <file path=ppt/slides/slide21.xml><?xml version="1.0" encoding="utf-8"?>
-<p:sld xmlns:a="http://schemas.openxmlformats.org/drawingml/2006/main" xmlns:r="http://schemas.openxmlformats.org/officeDocument/2006/relationships" xmlns:p="http://schemas.openxmlformats.org/presentationml/2006/main">
+<p:sld xmlns:a="http://schemas.openxmlformats.org/drawingml/2006/main" xmlns:p="http://schemas.openxmlformats.org/presentationml/2006/main" xmlns:r="http://schemas.openxmlformats.org/officeDocument/2006/relationships">
   <p:cSld>
     <p:spTree>
       <p:nvGrpSpPr>
@@ -11122,14 +11040,7 @@
         <p:cNvGrpSpPr/>
         <p:nvPr/>
       </p:nvGrpSpPr>
-      <p:grpSpPr>
-        <a:xfrm>
-          <a:off x="0" y="0"/>
-          <a:ext cx="0" cy="0"/>
-          <a:chOff x="0" y="0"/>
-          <a:chExt cx="0" cy="0"/>
-        </a:xfrm>
-      </p:grpSpPr>
+      <p:grpSpPr/>
       <p:sp>
         <p:nvSpPr>
           <p:cNvPr id="2" name="Rectangle 1"/>
@@ -11170,7 +11081,6 @@
           <a:lstStyle/>
           <a:p>
             <a:pPr algn="ctr"/>
-            <a:endParaRPr/>
           </a:p>
         </p:txBody>
       </p:sp>
@@ -11214,7 +11124,6 @@
           <a:lstStyle/>
           <a:p>
             <a:pPr algn="ctr"/>
-            <a:endParaRPr/>
           </a:p>
         </p:txBody>
       </p:sp>
@@ -11246,7 +11155,7 @@
                   <a:srgbClr val="FFFFFF"/>
                 </a:solidFill>
               </a:rPr>
-              <a:t>Qualitative Sample</a:t>
+              <a:t>Distribution-Aware Hybrid</a:t>
             </a:r>
           </a:p>
         </p:txBody>
@@ -11291,7 +11200,6 @@
           <a:lstStyle/>
           <a:p>
             <a:pPr algn="ctr"/>
-            <a:endParaRPr/>
           </a:p>
         </p:txBody>
       </p:sp>
@@ -11323,7 +11231,7 @@
                   <a:srgbClr val="4A4A4A"/>
                 </a:solidFill>
               </a:rPr>
-              <a:t>Hybrid output vs reference</a:t>
+              <a:t>Testing the shift hypothesis</a:t>
             </a:r>
           </a:p>
         </p:txBody>
@@ -11337,16 +11245,18 @@
         <p:spPr>
           <a:xfrm>
             <a:off x="640080" y="1463040"/>
-            <a:ext cx="1463040" cy="365760"/>
+            <a:ext cx="10972800" cy="1737360"/>
           </a:xfrm>
           <a:prstGeom prst="rect">
             <a:avLst/>
           </a:prstGeom>
           <a:solidFill>
-            <a:srgbClr val="0B1F3A"/>
+            <a:srgbClr val="F4F6F8"/>
           </a:solidFill>
-          <a:ln>
-            <a:noFill/>
+          <a:ln w="9525">
+            <a:solidFill>
+              <a:srgbClr val="148F96"/>
+            </a:solidFill>
           </a:ln>
         </p:spPr>
         <p:style>
@@ -11364,73 +11274,353 @@
           </a:fontRef>
         </p:style>
         <p:txBody>
-          <a:bodyPr rtlCol="0" anchor="ctr"/>
+          <a:bodyPr rtlCol="0" anchor="ctr" lIns="137160" rIns="137160" tIns="91440" bIns="91440" wrap="square"/>
           <a:lstStyle/>
           <a:p>
             <a:pPr algn="ctr"/>
             <a:r>
-              <a:rPr sz="1300" b="1">
-                <a:solidFill>
-                  <a:srgbClr val="FFFFFF"/>
-                </a:solidFill>
-              </a:rPr>
-              <a:t>SOURCE</a:t>
-            </a:r>
-          </a:p>
-        </p:txBody>
-      </p:sp>
-      <p:sp>
-        <p:nvSpPr>
-          <p:cNvPr id="8" name="TextBox 7"/>
-          <p:cNvSpPr txBox="1"/>
-          <p:nvPr/>
-        </p:nvSpPr>
-        <p:spPr>
-          <a:xfrm>
-            <a:off x="2194560" y="1417320"/>
-            <a:ext cx="9418320" cy="1188720"/>
-          </a:xfrm>
-          <a:prstGeom prst="rect">
-            <a:avLst/>
-          </a:prstGeom>
-          <a:noFill/>
-        </p:spPr>
-        <p:txBody>
-          <a:bodyPr wrap="square">
-            <a:spAutoFit/>
-          </a:bodyPr>
-          <a:lstStyle/>
-          <a:p>
-            <a:r>
-              <a:rPr sz="1300" i="1">
-                <a:solidFill>
-                  <a:srgbClr val="4A4A4A"/>
-                </a:solidFill>
-              </a:rPr>
-              <a:t>The psychosocial interventions considered in the studies were: cognitive-behavioural coping skills training, twelve-step programme, brief intervention, motivational interviewing, and brief motivational interviewing.</a:t>
-            </a:r>
-          </a:p>
-        </p:txBody>
-      </p:sp>
-      <p:sp>
-        <p:nvSpPr>
-          <p:cNvPr id="9" name="Rectangle 8"/>
+              <a:rPr sz="1300">
+                <a:solidFill>
+                  <a:srgbClr val="0B1F3A"/>
+                </a:solidFill>
+                <a:latin typeface="Consolas"/>
+              </a:rPr>
+              <a:t>Naive hybrid:  T5 trained on ORIGINAL src   →   inference fed SUBSTITUTED src  (mismatch)</a:t>
+            </a:r>
+          </a:p>
+          <a:p>
+            <a:r>
+              <a:rPr sz="1300">
+                <a:solidFill>
+                  <a:srgbClr val="0B1F3A"/>
+                </a:solidFill>
+                <a:latin typeface="Consolas"/>
+              </a:rPr>
+              <a:t>Aware hybrid:  T5 trained on SUBSTITUTED    →   inference fed SUBSTITUTED      (matched)</a:t>
+            </a:r>
+          </a:p>
+        </p:txBody>
+      </p:sp>
+      <p:graphicFrame>
+        <p:nvGraphicFramePr>
+          <p:cNvPr id="8" name="Table 7"/>
+          <p:cNvGraphicFramePr>
+            <a:graphicFrameLocks noGrp="1"/>
+          </p:cNvGraphicFramePr>
+          <p:nvPr/>
+        </p:nvGraphicFramePr>
+        <p:xfrm>
+          <a:off x="640080" y="3474720"/>
+          <a:ext cx="6400800" cy="1828800"/>
+        </p:xfrm>
+        <a:graphic>
+          <a:graphicData uri="http://schemas.openxmlformats.org/drawingml/2006/table">
+            <a:tbl>
+              <a:tblPr firstRow="1" bandRow="1">
+                <a:tableStyleId>{5C22544A-7EE6-4342-B048-85BDC9FD1C3A}</a:tableStyleId>
+              </a:tblPr>
+              <a:tblGrid>
+                <a:gridCol w="2133600"/>
+                <a:gridCol w="2133600"/>
+                <a:gridCol w="2133600"/>
+              </a:tblGrid>
+              <a:tr h="457200">
+                <a:tc>
+                  <a:txBody>
+                    <a:bodyPr/>
+                    <a:lstStyle/>
+                    <a:p>
+                      <a:pPr algn="ctr"/>
+                      <a:r>
+                        <a:rPr sz="1400" b="1">
+                          <a:solidFill>
+                            <a:srgbClr val="FFFFFF"/>
+                          </a:solidFill>
+                        </a:rPr>
+                        <a:t>System</a:t>
+                      </a:r>
+                    </a:p>
+                  </a:txBody>
+                  <a:tcPr>
+                    <a:solidFill>
+                      <a:srgbClr val="0B1F3A"/>
+                    </a:solidFill>
+                  </a:tcPr>
+                </a:tc>
+                <a:tc>
+                  <a:txBody>
+                    <a:bodyPr/>
+                    <a:lstStyle/>
+                    <a:p>
+                      <a:pPr algn="ctr"/>
+                      <a:r>
+                        <a:rPr sz="1400" b="1">
+                          <a:solidFill>
+                            <a:srgbClr val="FFFFFF"/>
+                          </a:solidFill>
+                        </a:rPr>
+                        <a:t>SARI</a:t>
+                      </a:r>
+                    </a:p>
+                  </a:txBody>
+                  <a:tcPr>
+                    <a:solidFill>
+                      <a:srgbClr val="0B1F3A"/>
+                    </a:solidFill>
+                  </a:tcPr>
+                </a:tc>
+                <a:tc>
+                  <a:txBody>
+                    <a:bodyPr/>
+                    <a:lstStyle/>
+                    <a:p>
+                      <a:pPr algn="ctr"/>
+                      <a:r>
+                        <a:rPr sz="1400" b="1">
+                          <a:solidFill>
+                            <a:srgbClr val="FFFFFF"/>
+                          </a:solidFill>
+                        </a:rPr>
+                        <a:t>Δ vs T5</a:t>
+                      </a:r>
+                    </a:p>
+                  </a:txBody>
+                  <a:tcPr>
+                    <a:solidFill>
+                      <a:srgbClr val="0B1F3A"/>
+                    </a:solidFill>
+                  </a:tcPr>
+                </a:tc>
+              </a:tr>
+              <a:tr h="457200">
+                <a:tc>
+                  <a:txBody>
+                    <a:bodyPr/>
+                    <a:lstStyle/>
+                    <a:p>
+                      <a:pPr algn="ctr"/>
+                      <a:r>
+                        <a:rPr sz="1300" b="0">
+                          <a:solidFill>
+                            <a:srgbClr val="4A4A4A"/>
+                          </a:solidFill>
+                        </a:rPr>
+                        <a:t>T5-Small</a:t>
+                      </a:r>
+                    </a:p>
+                  </a:txBody>
+                  <a:tcPr>
+                    <a:solidFill>
+                      <a:srgbClr val="F4F6F8"/>
+                    </a:solidFill>
+                  </a:tcPr>
+                </a:tc>
+                <a:tc>
+                  <a:txBody>
+                    <a:bodyPr/>
+                    <a:lstStyle/>
+                    <a:p>
+                      <a:pPr algn="ctr"/>
+                      <a:r>
+                        <a:rPr sz="1300" b="0">
+                          <a:solidFill>
+                            <a:srgbClr val="4A4A4A"/>
+                          </a:solidFill>
+                        </a:rPr>
+                        <a:t>33.41</a:t>
+                      </a:r>
+                    </a:p>
+                  </a:txBody>
+                  <a:tcPr>
+                    <a:solidFill>
+                      <a:srgbClr val="F4F6F8"/>
+                    </a:solidFill>
+                  </a:tcPr>
+                </a:tc>
+                <a:tc>
+                  <a:txBody>
+                    <a:bodyPr/>
+                    <a:lstStyle/>
+                    <a:p>
+                      <a:pPr algn="ctr"/>
+                      <a:r>
+                        <a:rPr sz="1300" b="0">
+                          <a:solidFill>
+                            <a:srgbClr val="4A4A4A"/>
+                          </a:solidFill>
+                        </a:rPr>
+                        <a:t>—</a:t>
+                      </a:r>
+                    </a:p>
+                  </a:txBody>
+                  <a:tcPr>
+                    <a:solidFill>
+                      <a:srgbClr val="F4F6F8"/>
+                    </a:solidFill>
+                  </a:tcPr>
+                </a:tc>
+              </a:tr>
+              <a:tr h="457200">
+                <a:tc>
+                  <a:txBody>
+                    <a:bodyPr/>
+                    <a:lstStyle/>
+                    <a:p>
+                      <a:pPr algn="ctr"/>
+                      <a:r>
+                        <a:rPr sz="1300" b="0">
+                          <a:solidFill>
+                            <a:srgbClr val="4A4A4A"/>
+                          </a:solidFill>
+                        </a:rPr>
+                        <a:t>Hybrid (naive)</a:t>
+                      </a:r>
+                    </a:p>
+                  </a:txBody>
+                  <a:tcPr>
+                    <a:solidFill>
+                      <a:srgbClr val="FFFFFF"/>
+                    </a:solidFill>
+                  </a:tcPr>
+                </a:tc>
+                <a:tc>
+                  <a:txBody>
+                    <a:bodyPr/>
+                    <a:lstStyle/>
+                    <a:p>
+                      <a:pPr algn="ctr"/>
+                      <a:r>
+                        <a:rPr sz="1300" b="0">
+                          <a:solidFill>
+                            <a:srgbClr val="4A4A4A"/>
+                          </a:solidFill>
+                        </a:rPr>
+                        <a:t>29.48</a:t>
+                      </a:r>
+                    </a:p>
+                  </a:txBody>
+                  <a:tcPr>
+                    <a:solidFill>
+                      <a:srgbClr val="FFFFFF"/>
+                    </a:solidFill>
+                  </a:tcPr>
+                </a:tc>
+                <a:tc>
+                  <a:txBody>
+                    <a:bodyPr/>
+                    <a:lstStyle/>
+                    <a:p>
+                      <a:pPr algn="ctr"/>
+                      <a:r>
+                        <a:rPr sz="1300" b="0">
+                          <a:solidFill>
+                            <a:srgbClr val="4A4A4A"/>
+                          </a:solidFill>
+                        </a:rPr>
+                        <a:t>−3.93</a:t>
+                      </a:r>
+                    </a:p>
+                  </a:txBody>
+                  <a:tcPr>
+                    <a:solidFill>
+                      <a:srgbClr val="FFFFFF"/>
+                    </a:solidFill>
+                  </a:tcPr>
+                </a:tc>
+              </a:tr>
+              <a:tr h="457200">
+                <a:tc>
+                  <a:txBody>
+                    <a:bodyPr/>
+                    <a:lstStyle/>
+                    <a:p>
+                      <a:pPr algn="ctr"/>
+                      <a:r>
+                        <a:rPr sz="1300" b="1">
+                          <a:solidFill>
+                            <a:srgbClr val="0B1F3A"/>
+                          </a:solidFill>
+                        </a:rPr>
+                        <a:t>Hybrid-Aware</a:t>
+                      </a:r>
+                    </a:p>
+                  </a:txBody>
+                  <a:tcPr>
+                    <a:solidFill>
+                      <a:srgbClr val="E8B54A"/>
+                    </a:solidFill>
+                  </a:tcPr>
+                </a:tc>
+                <a:tc>
+                  <a:txBody>
+                    <a:bodyPr/>
+                    <a:lstStyle/>
+                    <a:p>
+                      <a:pPr algn="ctr"/>
+                      <a:r>
+                        <a:rPr sz="1300" b="1">
+                          <a:solidFill>
+                            <a:srgbClr val="0B1F3A"/>
+                          </a:solidFill>
+                        </a:rPr>
+                        <a:t>30.46</a:t>
+                      </a:r>
+                    </a:p>
+                  </a:txBody>
+                  <a:tcPr>
+                    <a:solidFill>
+                      <a:srgbClr val="E8B54A"/>
+                    </a:solidFill>
+                  </a:tcPr>
+                </a:tc>
+                <a:tc>
+                  <a:txBody>
+                    <a:bodyPr/>
+                    <a:lstStyle/>
+                    <a:p>
+                      <a:pPr algn="ctr"/>
+                      <a:r>
+                        <a:rPr sz="1300" b="1">
+                          <a:solidFill>
+                            <a:srgbClr val="0B1F3A"/>
+                          </a:solidFill>
+                        </a:rPr>
+                        <a:t>−2.95</a:t>
+                      </a:r>
+                    </a:p>
+                  </a:txBody>
+                  <a:tcPr>
+                    <a:solidFill>
+                      <a:srgbClr val="E8B54A"/>
+                    </a:solidFill>
+                  </a:tcPr>
+                </a:tc>
+              </a:tr>
+            </a:tbl>
+          </a:graphicData>
+        </a:graphic>
+      </p:graphicFrame>
+      <p:sp>
+        <p:nvSpPr>
+          <p:cNvPr id="9" name="Rounded Rectangle 8"/>
           <p:cNvSpPr/>
           <p:nvPr/>
         </p:nvSpPr>
         <p:spPr>
           <a:xfrm>
-            <a:off x="640080" y="2926080"/>
-            <a:ext cx="1463040" cy="365760"/>
-          </a:xfrm>
-          <a:prstGeom prst="rect">
+            <a:off x="7315200" y="3474720"/>
+            <a:ext cx="4297680" cy="2468880"/>
+          </a:xfrm>
+          <a:prstGeom prst="roundRect">
             <a:avLst/>
           </a:prstGeom>
           <a:solidFill>
-            <a:srgbClr val="148F96"/>
+            <a:srgbClr val="F4F6F8"/>
           </a:solidFill>
           <a:ln>
-            <a:noFill/>
+            <a:solidFill>
+              <a:srgbClr val="E8B54A"/>
+            </a:solidFill>
           </a:ln>
         </p:spPr>
         <p:style>
@@ -11448,202 +11638,39 @@
           </a:fontRef>
         </p:style>
         <p:txBody>
-          <a:bodyPr rtlCol="0" anchor="ctr"/>
+          <a:bodyPr rtlCol="0" anchor="ctr" lIns="182880" tIns="137160" rIns="182880" wrap="square"/>
           <a:lstStyle/>
           <a:p>
             <a:pPr algn="ctr"/>
             <a:r>
-              <a:rPr sz="1300" b="1">
-                <a:solidFill>
-                  <a:srgbClr val="FFFFFF"/>
-                </a:solidFill>
-              </a:rPr>
-              <a:t>HYBRID</a:t>
-            </a:r>
-          </a:p>
-        </p:txBody>
-      </p:sp>
-      <p:sp>
-        <p:nvSpPr>
-          <p:cNvPr id="10" name="TextBox 9"/>
-          <p:cNvSpPr txBox="1"/>
-          <p:nvPr/>
-        </p:nvSpPr>
-        <p:spPr>
-          <a:xfrm>
-            <a:off x="2194560" y="2880360"/>
-            <a:ext cx="9418320" cy="1188720"/>
-          </a:xfrm>
-          <a:prstGeom prst="rect">
-            <a:avLst/>
-          </a:prstGeom>
-          <a:noFill/>
-        </p:spPr>
-        <p:txBody>
-          <a:bodyPr wrap="square">
-            <a:spAutoFit/>
-          </a:bodyPr>
-          <a:lstStyle/>
-          <a:p>
-            <a:r>
-              <a:rPr sz="1300" i="1">
+              <a:rPr sz="1500" b="1">
+                <a:solidFill>
+                  <a:srgbClr val="E8B54A"/>
+                </a:solidFill>
+              </a:rPr>
+              <a:t>Verdict</a:t>
+            </a:r>
+          </a:p>
+          <a:p>
+            <a:pPr>
+              <a:spcBef>
+                <a:spcPts val="600"/>
+              </a:spcBef>
+            </a:pPr>
+            <a:r>
+              <a:rPr sz="1300">
                 <a:solidFill>
                   <a:srgbClr val="4A4A4A"/>
                 </a:solidFill>
               </a:rPr>
-              <a:t>The studies included: cognitive-behavioural coping skills training, twelve-step programme, brief intervention, motivational interviewing, and brief motivational interviewing.</a:t>
-            </a:r>
-          </a:p>
-        </p:txBody>
-      </p:sp>
-      <p:sp>
-        <p:nvSpPr>
-          <p:cNvPr id="11" name="Rectangle 10"/>
-          <p:cNvSpPr/>
-          <p:nvPr/>
-        </p:nvSpPr>
-        <p:spPr>
-          <a:xfrm>
-            <a:off x="640080" y="4389120"/>
-            <a:ext cx="1463040" cy="365760"/>
-          </a:xfrm>
-          <a:prstGeom prst="rect">
-            <a:avLst/>
-          </a:prstGeom>
-          <a:solidFill>
-            <a:srgbClr val="E8B54A"/>
-          </a:solidFill>
-          <a:ln>
-            <a:noFill/>
-          </a:ln>
-        </p:spPr>
-        <p:style>
-          <a:lnRef idx="1">
-            <a:schemeClr val="accent1"/>
-          </a:lnRef>
-          <a:fillRef idx="3">
-            <a:schemeClr val="accent1"/>
-          </a:fillRef>
-          <a:effectRef idx="2">
-            <a:schemeClr val="accent1"/>
-          </a:effectRef>
-          <a:fontRef idx="minor">
-            <a:schemeClr val="lt1"/>
-          </a:fontRef>
-        </p:style>
-        <p:txBody>
-          <a:bodyPr rtlCol="0" anchor="ctr"/>
-          <a:lstStyle/>
-          <a:p>
-            <a:pPr algn="ctr"/>
-            <a:r>
-              <a:rPr sz="1300" b="1">
-                <a:solidFill>
-                  <a:srgbClr val="FFFFFF"/>
-                </a:solidFill>
-              </a:rPr>
-              <a:t>REFERENCE</a:t>
-            </a:r>
-          </a:p>
-        </p:txBody>
-      </p:sp>
-      <p:sp>
-        <p:nvSpPr>
-          <p:cNvPr id="12" name="TextBox 11"/>
-          <p:cNvSpPr txBox="1"/>
-          <p:nvPr/>
-        </p:nvSpPr>
-        <p:spPr>
-          <a:xfrm>
-            <a:off x="2194560" y="4343400"/>
-            <a:ext cx="9418320" cy="1188720"/>
-          </a:xfrm>
-          <a:prstGeom prst="rect">
-            <a:avLst/>
-          </a:prstGeom>
-          <a:noFill/>
-        </p:spPr>
-        <p:txBody>
-          <a:bodyPr wrap="square">
-            <a:spAutoFit/>
-          </a:bodyPr>
-          <a:lstStyle/>
-          <a:p>
-            <a:r>
-              <a:rPr sz="1300" i="1">
-                <a:solidFill>
-                  <a:srgbClr val="4A4A4A"/>
-                </a:solidFill>
-              </a:rPr>
-              <a:t>The twelve-step programme is based on theories from Alcoholics Anonymous and aims to motivate the person to develop a desire to stop using drugs or alcohol.</a:t>
-            </a:r>
-          </a:p>
-        </p:txBody>
-      </p:sp>
-      <p:sp>
-        <p:nvSpPr>
-          <p:cNvPr id="13" name="Rounded Rectangle 12"/>
-          <p:cNvSpPr/>
-          <p:nvPr/>
-        </p:nvSpPr>
-        <p:spPr>
-          <a:xfrm>
-            <a:off x="640080" y="5577840"/>
-            <a:ext cx="10972800" cy="822960"/>
-          </a:xfrm>
-          <a:prstGeom prst="roundRect">
-            <a:avLst/>
-          </a:prstGeom>
-          <a:solidFill>
-            <a:srgbClr val="F4F6F8"/>
-          </a:solidFill>
-          <a:ln>
-            <a:solidFill>
-              <a:srgbClr val="C0392B"/>
-            </a:solidFill>
-          </a:ln>
-        </p:spPr>
-        <p:style>
-          <a:lnRef idx="1">
-            <a:schemeClr val="accent1"/>
-          </a:lnRef>
-          <a:fillRef idx="3">
-            <a:schemeClr val="accent1"/>
-          </a:fillRef>
-          <a:effectRef idx="2">
-            <a:schemeClr val="accent1"/>
-          </a:effectRef>
-          <a:fontRef idx="minor">
-            <a:schemeClr val="lt1"/>
-          </a:fontRef>
-        </p:style>
-        <p:txBody>
-          <a:bodyPr wrap="square" lIns="182880" tIns="137160" rtlCol="0" anchor="ctr"/>
-          <a:lstStyle/>
-          <a:p>
-            <a:pPr algn="ctr"/>
-            <a:r>
-              <a:rPr sz="1300" b="1">
-                <a:solidFill>
-                  <a:srgbClr val="C0392B"/>
-                </a:solidFill>
-              </a:rPr>
-              <a:t>Caveat: </a:t>
-            </a:r>
-            <a:r>
-              <a:rPr sz="1300">
-                <a:solidFill>
-                  <a:srgbClr val="4A4A4A"/>
-                </a:solidFill>
-              </a:rPr>
-              <a:t>References are document-level, not sentence-aligned. This caps BLEU ceiling regardless of system quality.</a:t>
+              <a:t>Distribution alignment recovers +0.98 SARI (~25% of the gap). Remaining 2.95 SARI is residual cost of lexical substitution itself — not just shift.</a:t>
             </a:r>
           </a:p>
         </p:txBody>
       </p:sp>
       <p:cxnSp>
         <p:nvCxnSpPr>
-          <p:cNvPr id="14" name="Connector 13"/>
+          <p:cNvPr id="10" name="Connector 9"/>
           <p:cNvCxnSpPr/>
           <p:nvPr/>
         </p:nvCxnSpPr>
@@ -11678,7 +11705,7 @@
       </p:cxnSp>
       <p:sp>
         <p:nvSpPr>
-          <p:cNvPr id="15" name="TextBox 14"/>
+          <p:cNvPr id="11" name="TextBox 10"/>
           <p:cNvSpPr txBox="1"/>
           <p:nvPr/>
         </p:nvSpPr>
@@ -11711,7 +11738,7 @@
       </p:sp>
       <p:sp>
         <p:nvSpPr>
-          <p:cNvPr id="16" name="TextBox 15"/>
+          <p:cNvPr id="12" name="TextBox 11"/>
           <p:cNvSpPr txBox="1"/>
           <p:nvPr/>
         </p:nvSpPr>
@@ -11738,7 +11765,7 @@
                   <a:srgbClr val="4A4A4A"/>
                 </a:solidFill>
               </a:rPr>
-              <a:t>21 / 26</a:t>
+              <a:t>21 / 27</a:t>
             </a:r>
           </a:p>
         </p:txBody>
@@ -11752,7 +11779,7 @@
 </file>
 
 <file path=ppt/slides/slide22.xml><?xml version="1.0" encoding="utf-8"?>
-<p:sld xmlns:a="http://schemas.openxmlformats.org/drawingml/2006/main" xmlns:r="http://schemas.openxmlformats.org/officeDocument/2006/relationships" xmlns:p="http://schemas.openxmlformats.org/presentationml/2006/main">
+<p:sld xmlns:a="http://schemas.openxmlformats.org/drawingml/2006/main" xmlns:p="http://schemas.openxmlformats.org/presentationml/2006/main" xmlns:r="http://schemas.openxmlformats.org/officeDocument/2006/relationships">
   <p:cSld>
     <p:spTree>
       <p:nvGrpSpPr>
@@ -11760,14 +11787,7 @@
         <p:cNvGrpSpPr/>
         <p:nvPr/>
       </p:nvGrpSpPr>
-      <p:grpSpPr>
-        <a:xfrm>
-          <a:off x="0" y="0"/>
-          <a:ext cx="0" cy="0"/>
-          <a:chOff x="0" y="0"/>
-          <a:chExt cx="0" cy="0"/>
-        </a:xfrm>
-      </p:grpSpPr>
+      <p:grpSpPr/>
       <p:sp>
         <p:nvSpPr>
           <p:cNvPr id="2" name="Rectangle 1"/>
@@ -11808,7 +11828,6 @@
           <a:lstStyle/>
           <a:p>
             <a:pPr algn="ctr"/>
-            <a:endParaRPr/>
           </a:p>
         </p:txBody>
       </p:sp>
@@ -11852,7 +11871,6 @@
           <a:lstStyle/>
           <a:p>
             <a:pPr algn="ctr"/>
-            <a:endParaRPr/>
           </a:p>
         </p:txBody>
       </p:sp>
@@ -11884,7 +11902,7 @@
                   <a:srgbClr val="FFFFFF"/>
                 </a:solidFill>
               </a:rPr>
-              <a:t>Limitations &amp; Future Work</a:t>
+              <a:t>Qualitative Sample</a:t>
             </a:r>
           </a:p>
         </p:txBody>
@@ -11929,7 +11947,6 @@
           <a:lstStyle/>
           <a:p>
             <a:pPr algn="ctr"/>
-            <a:endParaRPr/>
           </a:p>
         </p:txBody>
       </p:sp>
@@ -11941,8 +11958,92 @@
         </p:nvSpPr>
         <p:spPr>
           <a:xfrm>
+            <a:off x="457200" y="777240"/>
+            <a:ext cx="10972800" cy="365760"/>
+          </a:xfrm>
+          <a:prstGeom prst="rect">
+            <a:avLst/>
+          </a:prstGeom>
+          <a:noFill/>
+        </p:spPr>
+        <p:txBody>
+          <a:bodyPr wrap="none">
+            <a:spAutoFit/>
+          </a:bodyPr>
+          <a:lstStyle/>
+          <a:p>
+            <a:r>
+              <a:rPr sz="1400" i="1">
+                <a:solidFill>
+                  <a:srgbClr val="4A4A4A"/>
+                </a:solidFill>
+              </a:rPr>
+              <a:t>Hybrid output vs reference</a:t>
+            </a:r>
+          </a:p>
+        </p:txBody>
+      </p:sp>
+      <p:sp>
+        <p:nvSpPr>
+          <p:cNvPr id="7" name="Rectangle 6"/>
+          <p:cNvSpPr/>
+          <p:nvPr/>
+        </p:nvSpPr>
+        <p:spPr>
+          <a:xfrm>
             <a:off x="640080" y="1463040"/>
-            <a:ext cx="5303520" cy="457200"/>
+            <a:ext cx="1463040" cy="365760"/>
+          </a:xfrm>
+          <a:prstGeom prst="rect">
+            <a:avLst/>
+          </a:prstGeom>
+          <a:solidFill>
+            <a:srgbClr val="0B1F3A"/>
+          </a:solidFill>
+          <a:ln>
+            <a:noFill/>
+          </a:ln>
+        </p:spPr>
+        <p:style>
+          <a:lnRef idx="1">
+            <a:schemeClr val="accent1"/>
+          </a:lnRef>
+          <a:fillRef idx="3">
+            <a:schemeClr val="accent1"/>
+          </a:fillRef>
+          <a:effectRef idx="2">
+            <a:schemeClr val="accent1"/>
+          </a:effectRef>
+          <a:fontRef idx="minor">
+            <a:schemeClr val="lt1"/>
+          </a:fontRef>
+        </p:style>
+        <p:txBody>
+          <a:bodyPr rtlCol="0" anchor="ctr"/>
+          <a:lstStyle/>
+          <a:p>
+            <a:pPr algn="ctr"/>
+            <a:r>
+              <a:rPr sz="1300" b="1">
+                <a:solidFill>
+                  <a:srgbClr val="FFFFFF"/>
+                </a:solidFill>
+              </a:rPr>
+              <a:t>SOURCE</a:t>
+            </a:r>
+          </a:p>
+        </p:txBody>
+      </p:sp>
+      <p:sp>
+        <p:nvSpPr>
+          <p:cNvPr id="8" name="TextBox 7"/>
+          <p:cNvSpPr txBox="1"/>
+          <p:nvPr/>
+        </p:nvSpPr>
+        <p:spPr>
+          <a:xfrm>
+            <a:off x="2194560" y="1417320"/>
+            <a:ext cx="9418320" cy="1188720"/>
           </a:xfrm>
           <a:prstGeom prst="rect">
             <a:avLst/>
@@ -11955,28 +12056,78 @@
           </a:bodyPr>
           <a:lstStyle/>
           <a:p>
-            <a:pPr algn="l"/>
-            <a:r>
-              <a:rPr sz="2000" b="1" i="0">
-                <a:solidFill>
-                  <a:srgbClr val="C0392B"/>
-                </a:solidFill>
-              </a:rPr>
-              <a:t>Limitations</a:t>
-            </a:r>
-          </a:p>
-        </p:txBody>
-      </p:sp>
-      <p:sp>
-        <p:nvSpPr>
-          <p:cNvPr id="7" name="TextBox 6"/>
+            <a:r>
+              <a:rPr sz="1300" i="1">
+                <a:solidFill>
+                  <a:srgbClr val="4A4A4A"/>
+                </a:solidFill>
+              </a:rPr>
+              <a:t>The psychosocial interventions considered in the studies were: cognitive-behavioural coping skills training, twelve-step programme, brief intervention, motivational interviewing, and brief motivational interviewing.</a:t>
+            </a:r>
+          </a:p>
+        </p:txBody>
+      </p:sp>
+      <p:sp>
+        <p:nvSpPr>
+          <p:cNvPr id="9" name="Rectangle 8"/>
+          <p:cNvSpPr/>
+          <p:nvPr/>
+        </p:nvSpPr>
+        <p:spPr>
+          <a:xfrm>
+            <a:off x="640080" y="2926080"/>
+            <a:ext cx="1463040" cy="365760"/>
+          </a:xfrm>
+          <a:prstGeom prst="rect">
+            <a:avLst/>
+          </a:prstGeom>
+          <a:solidFill>
+            <a:srgbClr val="148F96"/>
+          </a:solidFill>
+          <a:ln>
+            <a:noFill/>
+          </a:ln>
+        </p:spPr>
+        <p:style>
+          <a:lnRef idx="1">
+            <a:schemeClr val="accent1"/>
+          </a:lnRef>
+          <a:fillRef idx="3">
+            <a:schemeClr val="accent1"/>
+          </a:fillRef>
+          <a:effectRef idx="2">
+            <a:schemeClr val="accent1"/>
+          </a:effectRef>
+          <a:fontRef idx="minor">
+            <a:schemeClr val="lt1"/>
+          </a:fontRef>
+        </p:style>
+        <p:txBody>
+          <a:bodyPr rtlCol="0" anchor="ctr"/>
+          <a:lstStyle/>
+          <a:p>
+            <a:pPr algn="ctr"/>
+            <a:r>
+              <a:rPr sz="1300" b="1">
+                <a:solidFill>
+                  <a:srgbClr val="FFFFFF"/>
+                </a:solidFill>
+              </a:rPr>
+              <a:t>HYBRID</a:t>
+            </a:r>
+          </a:p>
+        </p:txBody>
+      </p:sp>
+      <p:sp>
+        <p:nvSpPr>
+          <p:cNvPr id="10" name="TextBox 9"/>
           <p:cNvSpPr txBox="1"/>
           <p:nvPr/>
         </p:nvSpPr>
         <p:spPr>
           <a:xfrm>
-            <a:off x="640080" y="2011680"/>
-            <a:ext cx="5303520" cy="4114800"/>
+            <a:off x="2194560" y="2880360"/>
+            <a:ext cx="9418320" cy="1188720"/>
           </a:xfrm>
           <a:prstGeom prst="rect">
             <a:avLst/>
@@ -11989,77 +12140,78 @@
           </a:bodyPr>
           <a:lstStyle/>
           <a:p>
-            <a:pPr>
-              <a:spcAft>
-                <a:spcPts val="600"/>
-              </a:spcAft>
-            </a:pPr>
-            <a:r>
-              <a:rPr sz="1500">
+            <a:r>
+              <a:rPr sz="1300" i="1">
                 <a:solidFill>
                   <a:srgbClr val="4A4A4A"/>
                 </a:solidFill>
               </a:rPr>
-              <a:t>  •  Reference misalignment in Cochrane caps BLEU</a:t>
-            </a:r>
-          </a:p>
-          <a:p>
-            <a:pPr>
-              <a:spcAft>
-                <a:spcPts val="600"/>
-              </a:spcAft>
-            </a:pPr>
-            <a:r>
-              <a:rPr sz="1500">
-                <a:solidFill>
-                  <a:srgbClr val="4A4A4A"/>
-                </a:solidFill>
-              </a:rPr>
-              <a:t>  •  60M-parameter model — larger models likely improve fluency</a:t>
-            </a:r>
-          </a:p>
-          <a:p>
-            <a:pPr>
-              <a:spcAft>
-                <a:spcPts val="600"/>
-              </a:spcAft>
-            </a:pPr>
-            <a:r>
-              <a:rPr sz="1500">
-                <a:solidFill>
-                  <a:srgbClr val="4A4A4A"/>
-                </a:solidFill>
-              </a:rPr>
-              <a:t>  •  No human evaluation (automatic metrics only)</a:t>
-            </a:r>
-          </a:p>
-          <a:p>
-            <a:pPr>
-              <a:spcAft>
-                <a:spcPts val="600"/>
-              </a:spcAft>
-            </a:pPr>
-            <a:r>
-              <a:rPr sz="1500">
-                <a:solidFill>
-                  <a:srgbClr val="4A4A4A"/>
-                </a:solidFill>
-              </a:rPr>
-              <a:t>  •  English only</a:t>
-            </a:r>
-          </a:p>
-        </p:txBody>
-      </p:sp>
-      <p:sp>
-        <p:nvSpPr>
-          <p:cNvPr id="8" name="TextBox 7"/>
+              <a:t>The studies included: cognitive-behavioural coping skills training, twelve-step programme, brief intervention, motivational interviewing, and brief motivational interviewing.</a:t>
+            </a:r>
+          </a:p>
+        </p:txBody>
+      </p:sp>
+      <p:sp>
+        <p:nvSpPr>
+          <p:cNvPr id="11" name="Rectangle 10"/>
+          <p:cNvSpPr/>
+          <p:nvPr/>
+        </p:nvSpPr>
+        <p:spPr>
+          <a:xfrm>
+            <a:off x="640080" y="4389120"/>
+            <a:ext cx="1463040" cy="365760"/>
+          </a:xfrm>
+          <a:prstGeom prst="rect">
+            <a:avLst/>
+          </a:prstGeom>
+          <a:solidFill>
+            <a:srgbClr val="E8B54A"/>
+          </a:solidFill>
+          <a:ln>
+            <a:noFill/>
+          </a:ln>
+        </p:spPr>
+        <p:style>
+          <a:lnRef idx="1">
+            <a:schemeClr val="accent1"/>
+          </a:lnRef>
+          <a:fillRef idx="3">
+            <a:schemeClr val="accent1"/>
+          </a:fillRef>
+          <a:effectRef idx="2">
+            <a:schemeClr val="accent1"/>
+          </a:effectRef>
+          <a:fontRef idx="minor">
+            <a:schemeClr val="lt1"/>
+          </a:fontRef>
+        </p:style>
+        <p:txBody>
+          <a:bodyPr rtlCol="0" anchor="ctr"/>
+          <a:lstStyle/>
+          <a:p>
+            <a:pPr algn="ctr"/>
+            <a:r>
+              <a:rPr sz="1300" b="1">
+                <a:solidFill>
+                  <a:srgbClr val="FFFFFF"/>
+                </a:solidFill>
+              </a:rPr>
+              <a:t>REFERENCE</a:t>
+            </a:r>
+          </a:p>
+        </p:txBody>
+      </p:sp>
+      <p:sp>
+        <p:nvSpPr>
+          <p:cNvPr id="12" name="TextBox 11"/>
           <p:cNvSpPr txBox="1"/>
           <p:nvPr/>
         </p:nvSpPr>
         <p:spPr>
           <a:xfrm>
-            <a:off x="6400800" y="1463040"/>
-            <a:ext cx="5303520" cy="457200"/>
+            <a:off x="2194560" y="4343400"/>
+            <a:ext cx="9418320" cy="1188720"/>
           </a:xfrm>
           <a:prstGeom prst="rect">
             <a:avLst/>
@@ -12072,104 +12224,81 @@
           </a:bodyPr>
           <a:lstStyle/>
           <a:p>
-            <a:pPr algn="l"/>
-            <a:r>
-              <a:rPr sz="2000" b="1" i="0">
-                <a:solidFill>
-                  <a:srgbClr val="148F96"/>
-                </a:solidFill>
-              </a:rPr>
-              <a:t>Future Work</a:t>
-            </a:r>
-          </a:p>
-        </p:txBody>
-      </p:sp>
-      <p:sp>
-        <p:nvSpPr>
-          <p:cNvPr id="9" name="TextBox 8"/>
-          <p:cNvSpPr txBox="1"/>
-          <p:nvPr/>
-        </p:nvSpPr>
-        <p:spPr>
-          <a:xfrm>
-            <a:off x="6400800" y="2011680"/>
-            <a:ext cx="5303520" cy="4114800"/>
-          </a:xfrm>
-          <a:prstGeom prst="rect">
-            <a:avLst/>
-          </a:prstGeom>
-          <a:noFill/>
-        </p:spPr>
-        <p:txBody>
-          <a:bodyPr wrap="square">
-            <a:spAutoFit/>
-          </a:bodyPr>
-          <a:lstStyle/>
-          <a:p>
-            <a:pPr>
-              <a:spcAft>
-                <a:spcPts val="600"/>
-              </a:spcAft>
-            </a:pPr>
-            <a:r>
-              <a:rPr sz="1500">
+            <a:r>
+              <a:rPr sz="1300" i="1">
                 <a:solidFill>
                   <a:srgbClr val="4A4A4A"/>
                 </a:solidFill>
               </a:rPr>
-              <a:t>  •  Try LLaMA-3 / Flan-T5-large</a:t>
-            </a:r>
-          </a:p>
-          <a:p>
-            <a:pPr>
-              <a:spcAft>
-                <a:spcPts val="600"/>
-              </a:spcAft>
-            </a:pPr>
-            <a:r>
-              <a:rPr sz="1500">
+              <a:t>The twelve-step programme is based on theories from Alcoholics Anonymous and aims to motivate the person to develop a desire to stop using drugs or alcohol.</a:t>
+            </a:r>
+          </a:p>
+        </p:txBody>
+      </p:sp>
+      <p:sp>
+        <p:nvSpPr>
+          <p:cNvPr id="13" name="Rounded Rectangle 12"/>
+          <p:cNvSpPr/>
+          <p:nvPr/>
+        </p:nvSpPr>
+        <p:spPr>
+          <a:xfrm>
+            <a:off x="640080" y="5577840"/>
+            <a:ext cx="10972800" cy="822960"/>
+          </a:xfrm>
+          <a:prstGeom prst="roundRect">
+            <a:avLst/>
+          </a:prstGeom>
+          <a:solidFill>
+            <a:srgbClr val="F4F6F8"/>
+          </a:solidFill>
+          <a:ln>
+            <a:solidFill>
+              <a:srgbClr val="C0392B"/>
+            </a:solidFill>
+          </a:ln>
+        </p:spPr>
+        <p:style>
+          <a:lnRef idx="1">
+            <a:schemeClr val="accent1"/>
+          </a:lnRef>
+          <a:fillRef idx="3">
+            <a:schemeClr val="accent1"/>
+          </a:fillRef>
+          <a:effectRef idx="2">
+            <a:schemeClr val="accent1"/>
+          </a:effectRef>
+          <a:fontRef idx="minor">
+            <a:schemeClr val="lt1"/>
+          </a:fontRef>
+        </p:style>
+        <p:txBody>
+          <a:bodyPr rtlCol="0" anchor="ctr" lIns="182880" tIns="137160" wrap="square"/>
+          <a:lstStyle/>
+          <a:p>
+            <a:pPr algn="ctr"/>
+            <a:r>
+              <a:rPr sz="1300" b="1">
+                <a:solidFill>
+                  <a:srgbClr val="C0392B"/>
+                </a:solidFill>
+              </a:rPr>
+              <a:t>Caveat: </a:t>
+            </a:r>
+            <a:r>
+              <a:rPr sz="1300">
                 <a:solidFill>
                   <a:srgbClr val="4A4A4A"/>
                 </a:solidFill>
               </a:rPr>
-              <a:t>  •  Human readability study with patients</a:t>
-            </a:r>
-          </a:p>
-          <a:p>
-            <a:pPr>
-              <a:spcAft>
-                <a:spcPts val="600"/>
-              </a:spcAft>
-            </a:pPr>
-            <a:r>
-              <a:rPr sz="1500">
-                <a:solidFill>
-                  <a:srgbClr val="4A4A4A"/>
-                </a:solidFill>
-              </a:rPr>
-              <a:t>  •  Smarter hybrid: rule pass AFTER T5, not before</a:t>
-            </a:r>
-          </a:p>
-          <a:p>
-            <a:pPr>
-              <a:spcAft>
-                <a:spcPts val="600"/>
-              </a:spcAft>
-            </a:pPr>
-            <a:r>
-              <a:rPr sz="1500">
-                <a:solidFill>
-                  <a:srgbClr val="4A4A4A"/>
-                </a:solidFill>
-              </a:rPr>
-              <a:t>  •  Multi-reference evaluation</a:t>
+              <a:t>References are document-level, not sentence-aligned. This caps BLEU ceiling regardless of system quality.</a:t>
             </a:r>
           </a:p>
         </p:txBody>
       </p:sp>
       <p:cxnSp>
         <p:nvCxnSpPr>
-          <p:cNvPr id="10" name="Connector 9"/>
+          <p:cNvPr id="14" name="Connector 13"/>
           <p:cNvCxnSpPr/>
           <p:nvPr/>
         </p:nvCxnSpPr>
@@ -12204,7 +12333,7 @@
       </p:cxnSp>
       <p:sp>
         <p:nvSpPr>
-          <p:cNvPr id="11" name="TextBox 10"/>
+          <p:cNvPr id="15" name="TextBox 14"/>
           <p:cNvSpPr txBox="1"/>
           <p:nvPr/>
         </p:nvSpPr>
@@ -12237,7 +12366,7 @@
       </p:sp>
       <p:sp>
         <p:nvSpPr>
-          <p:cNvPr id="12" name="TextBox 11"/>
+          <p:cNvPr id="16" name="TextBox 15"/>
           <p:cNvSpPr txBox="1"/>
           <p:nvPr/>
         </p:nvSpPr>
@@ -12264,7 +12393,7 @@
                   <a:srgbClr val="4A4A4A"/>
                 </a:solidFill>
               </a:rPr>
-              <a:t>24 / 26</a:t>
+              <a:t>22 / 27</a:t>
             </a:r>
           </a:p>
         </p:txBody>
@@ -12278,7 +12407,7 @@
 </file>
 
 <file path=ppt/slides/slide23.xml><?xml version="1.0" encoding="utf-8"?>
-<p:sld xmlns:a="http://schemas.openxmlformats.org/drawingml/2006/main" xmlns:r="http://schemas.openxmlformats.org/officeDocument/2006/relationships" xmlns:p="http://schemas.openxmlformats.org/presentationml/2006/main">
+<p:sld xmlns:a="http://schemas.openxmlformats.org/drawingml/2006/main" xmlns:p="http://schemas.openxmlformats.org/presentationml/2006/main" xmlns:r="http://schemas.openxmlformats.org/officeDocument/2006/relationships">
   <p:cSld>
     <p:spTree>
       <p:nvGrpSpPr>
@@ -12286,14 +12415,7 @@
         <p:cNvGrpSpPr/>
         <p:nvPr/>
       </p:nvGrpSpPr>
-      <p:grpSpPr>
-        <a:xfrm>
-          <a:off x="0" y="0"/>
-          <a:ext cx="0" cy="0"/>
-          <a:chOff x="0" y="0"/>
-          <a:chExt cx="0" cy="0"/>
-        </a:xfrm>
-      </p:grpSpPr>
+      <p:grpSpPr/>
       <p:sp>
         <p:nvSpPr>
           <p:cNvPr id="2" name="Rectangle 1"/>
@@ -12334,7 +12456,6 @@
           <a:lstStyle/>
           <a:p>
             <a:pPr algn="ctr"/>
-            <a:endParaRPr/>
           </a:p>
         </p:txBody>
       </p:sp>
@@ -12378,7 +12499,6 @@
           <a:lstStyle/>
           <a:p>
             <a:pPr algn="ctr"/>
-            <a:endParaRPr/>
           </a:p>
         </p:txBody>
       </p:sp>
@@ -12410,7 +12530,7 @@
                   <a:srgbClr val="FFFFFF"/>
                 </a:solidFill>
               </a:rPr>
-              <a:t>Conclusion</a:t>
+              <a:t>Repository Structure</a:t>
             </a:r>
           </a:p>
         </p:txBody>
@@ -12455,30 +12575,29 @@
           <a:lstStyle/>
           <a:p>
             <a:pPr algn="ctr"/>
-            <a:endParaRPr/>
-          </a:p>
-        </p:txBody>
-      </p:sp>
-      <p:sp>
-        <p:nvSpPr>
-          <p:cNvPr id="6" name="Rounded Rectangle 5"/>
+          </a:p>
+        </p:txBody>
+      </p:sp>
+      <p:sp>
+        <p:nvSpPr>
+          <p:cNvPr id="6" name="Rectangle 5"/>
           <p:cNvSpPr/>
           <p:nvPr/>
         </p:nvSpPr>
         <p:spPr>
           <a:xfrm>
-            <a:off x="914400" y="1554480"/>
-            <a:ext cx="10332720" cy="1828800"/>
-          </a:xfrm>
-          <a:prstGeom prst="roundRect">
+            <a:off x="640080" y="1463040"/>
+            <a:ext cx="10972800" cy="4572000"/>
+          </a:xfrm>
+          <a:prstGeom prst="rect">
             <a:avLst/>
           </a:prstGeom>
           <a:solidFill>
             <a:srgbClr val="F4F6F8"/>
           </a:solidFill>
-          <a:ln w="25400">
+          <a:ln w="9525">
             <a:solidFill>
-              <a:srgbClr val="E8B54A"/>
+              <a:srgbClr val="148F96"/>
             </a:solidFill>
           </a:ln>
         </p:spPr>
@@ -12497,142 +12616,146 @@
           </a:fontRef>
         </p:style>
         <p:txBody>
-          <a:bodyPr wrap="square" lIns="365760" tIns="274320" rtlCol="0" anchor="ctr"/>
+          <a:bodyPr rtlCol="0" anchor="ctr" lIns="137160" rIns="137160" tIns="91440" bIns="91440" wrap="square"/>
           <a:lstStyle/>
           <a:p>
             <a:pPr algn="ctr"/>
             <a:r>
-              <a:rPr sz="2000" i="1">
+              <a:rPr sz="1300">
                 <a:solidFill>
                   <a:srgbClr val="0B1F3A"/>
                 </a:solidFill>
-              </a:rPr>
-              <a:t>Fine-tuned T5-Small (60M) beats both biomedical pretraining (SciFive)
-and rule-augmented hybrid at biomedical text simplification.</a:t>
-            </a:r>
-          </a:p>
-        </p:txBody>
-      </p:sp>
-      <p:sp>
-        <p:nvSpPr>
-          <p:cNvPr id="7" name="TextBox 6"/>
-          <p:cNvSpPr txBox="1"/>
-          <p:nvPr/>
-        </p:nvSpPr>
-        <p:spPr>
-          <a:xfrm>
-            <a:off x="914400" y="3657600"/>
-            <a:ext cx="10058400" cy="457200"/>
-          </a:xfrm>
-          <a:prstGeom prst="rect">
-            <a:avLst/>
-          </a:prstGeom>
-          <a:noFill/>
-        </p:spPr>
-        <p:txBody>
-          <a:bodyPr wrap="square">
-            <a:spAutoFit/>
-          </a:bodyPr>
-          <a:lstStyle/>
-          <a:p>
-            <a:pPr algn="l"/>
-            <a:r>
-              <a:rPr sz="2000" b="1" i="0">
-                <a:solidFill>
-                  <a:srgbClr val="148F96"/>
-                </a:solidFill>
-              </a:rPr>
-              <a:t>Takeaways</a:t>
-            </a:r>
-          </a:p>
-        </p:txBody>
-      </p:sp>
-      <p:sp>
-        <p:nvSpPr>
-          <p:cNvPr id="8" name="TextBox 7"/>
-          <p:cNvSpPr txBox="1"/>
-          <p:nvPr/>
-        </p:nvSpPr>
-        <p:spPr>
-          <a:xfrm>
-            <a:off x="914400" y="4114800"/>
-            <a:ext cx="10058400" cy="2286000"/>
-          </a:xfrm>
-          <a:prstGeom prst="rect">
-            <a:avLst/>
-          </a:prstGeom>
-          <a:noFill/>
-        </p:spPr>
-        <p:txBody>
-          <a:bodyPr wrap="square">
-            <a:spAutoFit/>
-          </a:bodyPr>
-          <a:lstStyle/>
-          <a:p>
-            <a:pPr>
-              <a:spcAft>
-                <a:spcPts val="600"/>
-              </a:spcAft>
-            </a:pPr>
-            <a:r>
-              <a:rPr sz="1500">
-                <a:solidFill>
-                  <a:srgbClr val="4A4A4A"/>
-                </a:solidFill>
-              </a:rPr>
-              <a:t>  •  Task-specific fine-tuning &gt; generic domain pretraining at small scale</a:t>
-            </a:r>
-          </a:p>
-          <a:p>
-            <a:pPr>
-              <a:spcAft>
-                <a:spcPts val="600"/>
-              </a:spcAft>
-            </a:pPr>
-            <a:r>
-              <a:rPr sz="1500">
-                <a:solidFill>
-                  <a:srgbClr val="4A4A4A"/>
-                </a:solidFill>
-              </a:rPr>
-              <a:t>  •  Symbolic preprocessing can hurt strong neural models</a:t>
-            </a:r>
-          </a:p>
-          <a:p>
-            <a:pPr>
-              <a:spcAft>
-                <a:spcPts val="600"/>
-              </a:spcAft>
-            </a:pPr>
-            <a:r>
-              <a:rPr sz="1500">
-                <a:solidFill>
-                  <a:srgbClr val="4A4A4A"/>
-                </a:solidFill>
-              </a:rPr>
-              <a:t>  •  Three complementary metrics (SARI + BLEU + FKGL) prevent gaming</a:t>
-            </a:r>
-          </a:p>
-          <a:p>
-            <a:pPr>
-              <a:spcAft>
-                <a:spcPts val="600"/>
-              </a:spcAft>
-            </a:pPr>
-            <a:r>
-              <a:rPr sz="1500">
-                <a:solidFill>
-                  <a:srgbClr val="4A4A4A"/>
-                </a:solidFill>
-              </a:rPr>
-              <a:t>  •  Reproducible, GPU-free demo pipeline shipped</a:t>
+                <a:latin typeface="Consolas"/>
+              </a:rPr>
+              <a:t>src/                  shared Python modules</a:t>
+            </a:r>
+          </a:p>
+          <a:p>
+            <a:r>
+              <a:rPr sz="1300">
+                <a:solidFill>
+                  <a:srgbClr val="0B1F3A"/>
+                </a:solidFill>
+                <a:latin typeface="Consolas"/>
+              </a:rPr>
+              <a:t>  rule_based.py       RuleBasedSimplifier class</a:t>
+            </a:r>
+          </a:p>
+          <a:p>
+            <a:r>
+              <a:rPr sz="1300">
+                <a:solidFill>
+                  <a:srgbClr val="0B1F3A"/>
+                </a:solidFill>
+                <a:latin typeface="Consolas"/>
+              </a:rPr>
+              <a:t>  hybrid.py           HybridPipeline class</a:t>
+            </a:r>
+          </a:p>
+          <a:p>
+            <a:r>
+              <a:rPr sz="1300">
+                <a:solidFill>
+                  <a:srgbClr val="0B1F3A"/>
+                </a:solidFill>
+                <a:latin typeface="Consolas"/>
+              </a:rPr>
+              <a:t>  metrics.py          SARI / BLEU / FKGL wrappers</a:t>
+            </a:r>
+          </a:p>
+          <a:p>
+            <a:r>
+              <a:rPr sz="1300">
+                <a:solidFill>
+                  <a:srgbClr val="0B1F3A"/>
+                </a:solidFill>
+                <a:latin typeface="Consolas"/>
+              </a:rPr>
+              <a:t>  data_utils.py       preprocessing filters</a:t>
+            </a:r>
+          </a:p>
+          <a:p>
+            <a:r>
+              <a:rPr sz="1300">
+                <a:solidFill>
+                  <a:srgbClr val="0B1F3A"/>
+                </a:solidFill>
+                <a:latin typeface="Consolas"/>
+              </a:rPr>
+              <a:t/>
+            </a:r>
+          </a:p>
+          <a:p>
+            <a:r>
+              <a:rPr sz="1300">
+                <a:solidFill>
+                  <a:srgbClr val="0B1F3A"/>
+                </a:solidFill>
+                <a:latin typeface="Consolas"/>
+              </a:rPr>
+              <a:t>notebooks/            5 sequential experiment notebooks</a:t>
+            </a:r>
+          </a:p>
+          <a:p>
+            <a:r>
+              <a:rPr sz="1300">
+                <a:solidFill>
+                  <a:srgbClr val="0B1F3A"/>
+                </a:solidFill>
+                <a:latin typeface="Consolas"/>
+              </a:rPr>
+              <a:t>results/</a:t>
+            </a:r>
+          </a:p>
+          <a:p>
+            <a:r>
+              <a:rPr sz="1300">
+                <a:solidFill>
+                  <a:srgbClr val="0B1F3A"/>
+                </a:solidFill>
+                <a:latin typeface="Consolas"/>
+              </a:rPr>
+              <a:t>  metrics.csv         canonical results table</a:t>
+            </a:r>
+          </a:p>
+          <a:p>
+            <a:r>
+              <a:rPr sz="1300">
+                <a:solidFill>
+                  <a:srgbClr val="0B1F3A"/>
+                </a:solidFill>
+                <a:latin typeface="Consolas"/>
+              </a:rPr>
+              <a:t>  figures/            SARI + FKGL bar charts</a:t>
+            </a:r>
+          </a:p>
+          <a:p>
+            <a:r>
+              <a:rPr sz="1300">
+                <a:solidFill>
+                  <a:srgbClr val="0B1F3A"/>
+                </a:solidFill>
+                <a:latin typeface="Consolas"/>
+              </a:rPr>
+              <a:t>predictions/samples/  10 records / system for demo</a:t>
+            </a:r>
+          </a:p>
+          <a:p>
+            <a:r>
+              <a:rPr sz="1300">
+                <a:solidFill>
+                  <a:srgbClr val="0B1F3A"/>
+                </a:solidFill>
+                <a:latin typeface="Consolas"/>
+              </a:rPr>
+              <a:t>paper/                IEEE conference paper (LaTeX + PDF)</a:t>
             </a:r>
           </a:p>
         </p:txBody>
       </p:sp>
       <p:cxnSp>
         <p:nvCxnSpPr>
-          <p:cNvPr id="9" name="Connector 8"/>
+          <p:cNvPr id="7" name="Connector 6"/>
           <p:cNvCxnSpPr/>
           <p:nvPr/>
         </p:nvCxnSpPr>
@@ -12667,7 +12790,7 @@
       </p:cxnSp>
       <p:sp>
         <p:nvSpPr>
-          <p:cNvPr id="10" name="TextBox 9"/>
+          <p:cNvPr id="8" name="TextBox 7"/>
           <p:cNvSpPr txBox="1"/>
           <p:nvPr/>
         </p:nvSpPr>
@@ -12700,7 +12823,7 @@
       </p:sp>
       <p:sp>
         <p:nvSpPr>
-          <p:cNvPr id="11" name="TextBox 10"/>
+          <p:cNvPr id="9" name="TextBox 8"/>
           <p:cNvSpPr txBox="1"/>
           <p:nvPr/>
         </p:nvSpPr>
@@ -12727,7 +12850,7 @@
                   <a:srgbClr val="4A4A4A"/>
                 </a:solidFill>
               </a:rPr>
-              <a:t>25 / 26</a:t>
+              <a:t>23 / 27</a:t>
             </a:r>
           </a:p>
         </p:txBody>
@@ -12741,7 +12864,7 @@
 </file>
 
 <file path=ppt/slides/slide24.xml><?xml version="1.0" encoding="utf-8"?>
-<p:sld xmlns:a="http://schemas.openxmlformats.org/drawingml/2006/main" xmlns:r="http://schemas.openxmlformats.org/officeDocument/2006/relationships" xmlns:p="http://schemas.openxmlformats.org/presentationml/2006/main">
+<p:sld xmlns:a="http://schemas.openxmlformats.org/drawingml/2006/main" xmlns:p="http://schemas.openxmlformats.org/presentationml/2006/main" xmlns:r="http://schemas.openxmlformats.org/officeDocument/2006/relationships">
   <p:cSld>
     <p:spTree>
       <p:nvGrpSpPr>
@@ -12749,14 +12872,7 @@
         <p:cNvGrpSpPr/>
         <p:nvPr/>
       </p:nvGrpSpPr>
-      <p:grpSpPr>
-        <a:xfrm>
-          <a:off x="0" y="0"/>
-          <a:ext cx="0" cy="0"/>
-          <a:chOff x="0" y="0"/>
-          <a:chExt cx="0" cy="0"/>
-        </a:xfrm>
-      </p:grpSpPr>
+      <p:grpSpPr/>
       <p:sp>
         <p:nvSpPr>
           <p:cNvPr id="2" name="Rectangle 1"/>
@@ -12797,7 +12913,6 @@
           <a:lstStyle/>
           <a:p>
             <a:pPr algn="ctr"/>
-            <a:endParaRPr/>
           </a:p>
         </p:txBody>
       </p:sp>
@@ -12810,7 +12925,7 @@
         <p:spPr>
           <a:xfrm>
             <a:off x="0" y="0"/>
-            <a:ext cx="12191695" cy="6858000"/>
+            <a:ext cx="12191695" cy="502920"/>
           </a:xfrm>
           <a:prstGeom prst="rect">
             <a:avLst/>
@@ -12841,7 +12956,6 @@
           <a:lstStyle/>
           <a:p>
             <a:pPr algn="ctr"/>
-            <a:endParaRPr/>
           </a:p>
         </p:txBody>
       </p:sp>
@@ -12853,8 +12967,8 @@
         </p:nvSpPr>
         <p:spPr>
           <a:xfrm>
-            <a:off x="914400" y="2286000"/>
-            <a:ext cx="10058400" cy="1371600"/>
+            <a:off x="457200" y="45720"/>
+            <a:ext cx="11430000" cy="457200"/>
           </a:xfrm>
           <a:prstGeom prst="rect">
             <a:avLst/>
@@ -12867,14 +12981,13 @@
           </a:bodyPr>
           <a:lstStyle/>
           <a:p>
-            <a:pPr algn="ctr"/>
-            <a:r>
-              <a:rPr sz="7200" b="1">
+            <a:r>
+              <a:rPr sz="2400" b="1">
                 <a:solidFill>
                   <a:srgbClr val="FFFFFF"/>
                 </a:solidFill>
               </a:rPr>
-              <a:t>Q &amp; A</a:t>
+              <a:t>Reproducibility</a:t>
             </a:r>
           </a:p>
         </p:txBody>
@@ -12887,8 +13000,8 @@
         </p:nvSpPr>
         <p:spPr>
           <a:xfrm>
-            <a:off x="5394960" y="3931920"/>
-            <a:ext cx="1371600" cy="91440"/>
+            <a:off x="457200" y="685800"/>
+            <a:ext cx="548640" cy="73152"/>
           </a:xfrm>
           <a:prstGeom prst="rect">
             <a:avLst/>
@@ -12919,7 +13032,1491 @@
           <a:lstStyle/>
           <a:p>
             <a:pPr algn="ctr"/>
-            <a:endParaRPr/>
+          </a:p>
+        </p:txBody>
+      </p:sp>
+      <p:sp>
+        <p:nvSpPr>
+          <p:cNvPr id="6" name="TextBox 5"/>
+          <p:cNvSpPr txBox="1"/>
+          <p:nvPr/>
+        </p:nvSpPr>
+        <p:spPr>
+          <a:xfrm>
+            <a:off x="457200" y="777240"/>
+            <a:ext cx="10972800" cy="365760"/>
+          </a:xfrm>
+          <a:prstGeom prst="rect">
+            <a:avLst/>
+          </a:prstGeom>
+          <a:noFill/>
+        </p:spPr>
+        <p:txBody>
+          <a:bodyPr wrap="none">
+            <a:spAutoFit/>
+          </a:bodyPr>
+          <a:lstStyle/>
+          <a:p>
+            <a:r>
+              <a:rPr sz="1400" i="1">
+                <a:solidFill>
+                  <a:srgbClr val="4A4A4A"/>
+                </a:solidFill>
+              </a:rPr>
+              <a:t>Demo runs in minutes, no GPU</a:t>
+            </a:r>
+          </a:p>
+        </p:txBody>
+      </p:sp>
+      <p:sp>
+        <p:nvSpPr>
+          <p:cNvPr id="7" name="TextBox 6"/>
+          <p:cNvSpPr txBox="1"/>
+          <p:nvPr/>
+        </p:nvSpPr>
+        <p:spPr>
+          <a:xfrm>
+            <a:off x="640080" y="1554480"/>
+            <a:ext cx="10972800" cy="2743200"/>
+          </a:xfrm>
+          <a:prstGeom prst="rect">
+            <a:avLst/>
+          </a:prstGeom>
+          <a:noFill/>
+        </p:spPr>
+        <p:txBody>
+          <a:bodyPr wrap="square">
+            <a:spAutoFit/>
+          </a:bodyPr>
+          <a:lstStyle/>
+          <a:p>
+            <a:pPr>
+              <a:spcAft>
+                <a:spcPts val="600"/>
+              </a:spcAft>
+            </a:pPr>
+            <a:r>
+              <a:rPr sz="1700">
+                <a:solidFill>
+                  <a:srgbClr val="4A4A4A"/>
+                </a:solidFill>
+              </a:rPr>
+              <a:t>  •  Open notebooks/05_evaluation.ipynb  →  Run All</a:t>
+            </a:r>
+          </a:p>
+          <a:p>
+            <a:pPr>
+              <a:spcAft>
+                <a:spcPts val="600"/>
+              </a:spcAft>
+            </a:pPr>
+            <a:r>
+              <a:rPr sz="1700">
+                <a:solidFill>
+                  <a:srgbClr val="4A4A4A"/>
+                </a:solidFill>
+              </a:rPr>
+              <a:t>  •  No GPU required — all predictions pre-committed</a:t>
+            </a:r>
+          </a:p>
+          <a:p>
+            <a:pPr>
+              <a:spcAft>
+                <a:spcPts val="600"/>
+              </a:spcAft>
+            </a:pPr>
+            <a:r>
+              <a:rPr sz="1700">
+                <a:solidFill>
+                  <a:srgbClr val="4A4A4A"/>
+                </a:solidFill>
+              </a:rPr>
+              <a:t>  •  Figures regenerate from results/metrics.csv</a:t>
+            </a:r>
+          </a:p>
+          <a:p>
+            <a:pPr>
+              <a:spcAft>
+                <a:spcPts val="600"/>
+              </a:spcAft>
+            </a:pPr>
+            <a:r>
+              <a:rPr sz="1700">
+                <a:solidFill>
+                  <a:srgbClr val="4A4A4A"/>
+                </a:solidFill>
+              </a:rPr>
+              <a:t>  •  Local Jupyter + Google Colab both supported</a:t>
+            </a:r>
+          </a:p>
+          <a:p>
+            <a:pPr>
+              <a:spcAft>
+                <a:spcPts val="600"/>
+              </a:spcAft>
+            </a:pPr>
+            <a:r>
+              <a:rPr sz="1700">
+                <a:solidFill>
+                  <a:srgbClr val="4A4A4A"/>
+                </a:solidFill>
+              </a:rPr>
+              <a:t>  •  All dependencies pinned in requirements.txt</a:t>
+            </a:r>
+          </a:p>
+        </p:txBody>
+      </p:sp>
+      <p:sp>
+        <p:nvSpPr>
+          <p:cNvPr id="8" name="Rectangle 7"/>
+          <p:cNvSpPr/>
+          <p:nvPr/>
+        </p:nvSpPr>
+        <p:spPr>
+          <a:xfrm>
+            <a:off x="640080" y="4754880"/>
+            <a:ext cx="10972800" cy="1463040"/>
+          </a:xfrm>
+          <a:prstGeom prst="rect">
+            <a:avLst/>
+          </a:prstGeom>
+          <a:solidFill>
+            <a:srgbClr val="F4F6F8"/>
+          </a:solidFill>
+          <a:ln w="9525">
+            <a:solidFill>
+              <a:srgbClr val="148F96"/>
+            </a:solidFill>
+          </a:ln>
+        </p:spPr>
+        <p:style>
+          <a:lnRef idx="1">
+            <a:schemeClr val="accent1"/>
+          </a:lnRef>
+          <a:fillRef idx="3">
+            <a:schemeClr val="accent1"/>
+          </a:fillRef>
+          <a:effectRef idx="2">
+            <a:schemeClr val="accent1"/>
+          </a:effectRef>
+          <a:fontRef idx="minor">
+            <a:schemeClr val="lt1"/>
+          </a:fontRef>
+        </p:style>
+        <p:txBody>
+          <a:bodyPr rtlCol="0" anchor="ctr" lIns="137160" rIns="137160" tIns="91440" bIns="91440" wrap="square"/>
+          <a:lstStyle/>
+          <a:p>
+            <a:pPr algn="ctr"/>
+            <a:r>
+              <a:rPr sz="1300">
+                <a:solidFill>
+                  <a:srgbClr val="0B1F3A"/>
+                </a:solidFill>
+                <a:latin typeface="Consolas"/>
+              </a:rPr>
+              <a:t>git clone https://github.com/IbrahimHanafy2222/NLP-Project-Submission</a:t>
+            </a:r>
+          </a:p>
+          <a:p>
+            <a:r>
+              <a:rPr sz="1300">
+                <a:solidFill>
+                  <a:srgbClr val="0B1F3A"/>
+                </a:solidFill>
+                <a:latin typeface="Consolas"/>
+              </a:rPr>
+              <a:t>cd NLP-Project-Submission</a:t>
+            </a:r>
+          </a:p>
+          <a:p>
+            <a:r>
+              <a:rPr sz="1300">
+                <a:solidFill>
+                  <a:srgbClr val="0B1F3A"/>
+                </a:solidFill>
+                <a:latin typeface="Consolas"/>
+              </a:rPr>
+              <a:t>pip install -r requirements.txt</a:t>
+            </a:r>
+          </a:p>
+          <a:p>
+            <a:r>
+              <a:rPr sz="1300">
+                <a:solidFill>
+                  <a:srgbClr val="0B1F3A"/>
+                </a:solidFill>
+                <a:latin typeface="Consolas"/>
+              </a:rPr>
+              <a:t>jupyter notebook notebooks/05_evaluation.ipynb</a:t>
+            </a:r>
+          </a:p>
+        </p:txBody>
+      </p:sp>
+      <p:cxnSp>
+        <p:nvCxnSpPr>
+          <p:cNvPr id="9" name="Connector 8"/>
+          <p:cNvCxnSpPr/>
+          <p:nvPr/>
+        </p:nvCxnSpPr>
+        <p:spPr>
+          <a:xfrm>
+            <a:off x="457200" y="6446520"/>
+            <a:ext cx="11247120" cy="0"/>
+          </a:xfrm>
+          <a:prstGeom prst="line">
+            <a:avLst/>
+          </a:prstGeom>
+          <a:ln w="12700">
+            <a:solidFill>
+              <a:srgbClr val="148F96"/>
+            </a:solidFill>
+          </a:ln>
+        </p:spPr>
+        <p:style>
+          <a:lnRef idx="2">
+            <a:schemeClr val="accent1"/>
+          </a:lnRef>
+          <a:fillRef idx="0">
+            <a:schemeClr val="accent1"/>
+          </a:fillRef>
+          <a:effectRef idx="1">
+            <a:schemeClr val="accent1"/>
+          </a:effectRef>
+          <a:fontRef idx="minor">
+            <a:schemeClr val="tx1"/>
+          </a:fontRef>
+        </p:style>
+      </p:cxnSp>
+      <p:sp>
+        <p:nvSpPr>
+          <p:cNvPr id="10" name="TextBox 9"/>
+          <p:cNvSpPr txBox="1"/>
+          <p:nvPr/>
+        </p:nvSpPr>
+        <p:spPr>
+          <a:xfrm>
+            <a:off x="457200" y="6492240"/>
+            <a:ext cx="7315200" cy="320040"/>
+          </a:xfrm>
+          <a:prstGeom prst="rect">
+            <a:avLst/>
+          </a:prstGeom>
+          <a:noFill/>
+        </p:spPr>
+        <p:txBody>
+          <a:bodyPr wrap="none">
+            <a:spAutoFit/>
+          </a:bodyPr>
+          <a:lstStyle/>
+          <a:p>
+            <a:r>
+              <a:rPr sz="1000">
+                <a:solidFill>
+                  <a:srgbClr val="4A4A4A"/>
+                </a:solidFill>
+              </a:rPr>
+              <a:t>Medical Text Simplification · CIE 553 NLP · Ibrahim Hanafy</a:t>
+            </a:r>
+          </a:p>
+        </p:txBody>
+      </p:sp>
+      <p:sp>
+        <p:nvSpPr>
+          <p:cNvPr id="11" name="TextBox 10"/>
+          <p:cNvSpPr txBox="1"/>
+          <p:nvPr/>
+        </p:nvSpPr>
+        <p:spPr>
+          <a:xfrm>
+            <a:off x="10789920" y="6492240"/>
+            <a:ext cx="1188720" cy="320040"/>
+          </a:xfrm>
+          <a:prstGeom prst="rect">
+            <a:avLst/>
+          </a:prstGeom>
+          <a:noFill/>
+        </p:spPr>
+        <p:txBody>
+          <a:bodyPr wrap="none">
+            <a:spAutoFit/>
+          </a:bodyPr>
+          <a:lstStyle/>
+          <a:p>
+            <a:pPr algn="r"/>
+            <a:r>
+              <a:rPr sz="1000">
+                <a:solidFill>
+                  <a:srgbClr val="4A4A4A"/>
+                </a:solidFill>
+              </a:rPr>
+              <a:t>24 / 27</a:t>
+            </a:r>
+          </a:p>
+        </p:txBody>
+      </p:sp>
+    </p:spTree>
+  </p:cSld>
+  <p:clrMapOvr>
+    <a:masterClrMapping/>
+  </p:clrMapOvr>
+</p:sld>
+</file>
+
+<file path=ppt/slides/slide25.xml><?xml version="1.0" encoding="utf-8"?>
+<p:sld xmlns:a="http://schemas.openxmlformats.org/drawingml/2006/main" xmlns:p="http://schemas.openxmlformats.org/presentationml/2006/main" xmlns:r="http://schemas.openxmlformats.org/officeDocument/2006/relationships">
+  <p:cSld>
+    <p:spTree>
+      <p:nvGrpSpPr>
+        <p:cNvPr id="1" name=""/>
+        <p:cNvGrpSpPr/>
+        <p:nvPr/>
+      </p:nvGrpSpPr>
+      <p:grpSpPr/>
+      <p:sp>
+        <p:nvSpPr>
+          <p:cNvPr id="2" name="Rectangle 1"/>
+          <p:cNvSpPr/>
+          <p:nvPr/>
+        </p:nvSpPr>
+        <p:spPr>
+          <a:xfrm>
+            <a:off x="0" y="0"/>
+            <a:ext cx="12191695" cy="6858000"/>
+          </a:xfrm>
+          <a:prstGeom prst="rect">
+            <a:avLst/>
+          </a:prstGeom>
+          <a:solidFill>
+            <a:srgbClr val="FFFFFF"/>
+          </a:solidFill>
+          <a:ln>
+            <a:noFill/>
+          </a:ln>
+        </p:spPr>
+        <p:style>
+          <a:lnRef idx="1">
+            <a:schemeClr val="accent1"/>
+          </a:lnRef>
+          <a:fillRef idx="3">
+            <a:schemeClr val="accent1"/>
+          </a:fillRef>
+          <a:effectRef idx="2">
+            <a:schemeClr val="accent1"/>
+          </a:effectRef>
+          <a:fontRef idx="minor">
+            <a:schemeClr val="lt1"/>
+          </a:fontRef>
+        </p:style>
+        <p:txBody>
+          <a:bodyPr rtlCol="0" anchor="ctr"/>
+          <a:lstStyle/>
+          <a:p>
+            <a:pPr algn="ctr"/>
+          </a:p>
+        </p:txBody>
+      </p:sp>
+      <p:sp>
+        <p:nvSpPr>
+          <p:cNvPr id="3" name="Rectangle 2"/>
+          <p:cNvSpPr/>
+          <p:nvPr/>
+        </p:nvSpPr>
+        <p:spPr>
+          <a:xfrm>
+            <a:off x="0" y="0"/>
+            <a:ext cx="12191695" cy="502920"/>
+          </a:xfrm>
+          <a:prstGeom prst="rect">
+            <a:avLst/>
+          </a:prstGeom>
+          <a:solidFill>
+            <a:srgbClr val="0B1F3A"/>
+          </a:solidFill>
+          <a:ln>
+            <a:noFill/>
+          </a:ln>
+        </p:spPr>
+        <p:style>
+          <a:lnRef idx="1">
+            <a:schemeClr val="accent1"/>
+          </a:lnRef>
+          <a:fillRef idx="3">
+            <a:schemeClr val="accent1"/>
+          </a:fillRef>
+          <a:effectRef idx="2">
+            <a:schemeClr val="accent1"/>
+          </a:effectRef>
+          <a:fontRef idx="minor">
+            <a:schemeClr val="lt1"/>
+          </a:fontRef>
+        </p:style>
+        <p:txBody>
+          <a:bodyPr rtlCol="0" anchor="ctr"/>
+          <a:lstStyle/>
+          <a:p>
+            <a:pPr algn="ctr"/>
+          </a:p>
+        </p:txBody>
+      </p:sp>
+      <p:sp>
+        <p:nvSpPr>
+          <p:cNvPr id="4" name="TextBox 3"/>
+          <p:cNvSpPr txBox="1"/>
+          <p:nvPr/>
+        </p:nvSpPr>
+        <p:spPr>
+          <a:xfrm>
+            <a:off x="457200" y="45720"/>
+            <a:ext cx="11430000" cy="457200"/>
+          </a:xfrm>
+          <a:prstGeom prst="rect">
+            <a:avLst/>
+          </a:prstGeom>
+          <a:noFill/>
+        </p:spPr>
+        <p:txBody>
+          <a:bodyPr wrap="none">
+            <a:spAutoFit/>
+          </a:bodyPr>
+          <a:lstStyle/>
+          <a:p>
+            <a:r>
+              <a:rPr sz="2400" b="1">
+                <a:solidFill>
+                  <a:srgbClr val="FFFFFF"/>
+                </a:solidFill>
+              </a:rPr>
+              <a:t>Limitations &amp; Future Work</a:t>
+            </a:r>
+          </a:p>
+        </p:txBody>
+      </p:sp>
+      <p:sp>
+        <p:nvSpPr>
+          <p:cNvPr id="5" name="Rectangle 4"/>
+          <p:cNvSpPr/>
+          <p:nvPr/>
+        </p:nvSpPr>
+        <p:spPr>
+          <a:xfrm>
+            <a:off x="457200" y="685800"/>
+            <a:ext cx="548640" cy="73152"/>
+          </a:xfrm>
+          <a:prstGeom prst="rect">
+            <a:avLst/>
+          </a:prstGeom>
+          <a:solidFill>
+            <a:srgbClr val="E8B54A"/>
+          </a:solidFill>
+          <a:ln>
+            <a:noFill/>
+          </a:ln>
+        </p:spPr>
+        <p:style>
+          <a:lnRef idx="1">
+            <a:schemeClr val="accent1"/>
+          </a:lnRef>
+          <a:fillRef idx="3">
+            <a:schemeClr val="accent1"/>
+          </a:fillRef>
+          <a:effectRef idx="2">
+            <a:schemeClr val="accent1"/>
+          </a:effectRef>
+          <a:fontRef idx="minor">
+            <a:schemeClr val="lt1"/>
+          </a:fontRef>
+        </p:style>
+        <p:txBody>
+          <a:bodyPr rtlCol="0" anchor="ctr"/>
+          <a:lstStyle/>
+          <a:p>
+            <a:pPr algn="ctr"/>
+          </a:p>
+        </p:txBody>
+      </p:sp>
+      <p:sp>
+        <p:nvSpPr>
+          <p:cNvPr id="6" name="TextBox 5"/>
+          <p:cNvSpPr txBox="1"/>
+          <p:nvPr/>
+        </p:nvSpPr>
+        <p:spPr>
+          <a:xfrm>
+            <a:off x="640080" y="1463040"/>
+            <a:ext cx="5303520" cy="457200"/>
+          </a:xfrm>
+          <a:prstGeom prst="rect">
+            <a:avLst/>
+          </a:prstGeom>
+          <a:noFill/>
+        </p:spPr>
+        <p:txBody>
+          <a:bodyPr wrap="square">
+            <a:spAutoFit/>
+          </a:bodyPr>
+          <a:lstStyle/>
+          <a:p>
+            <a:pPr algn="l"/>
+            <a:r>
+              <a:rPr sz="2000" b="1" i="0">
+                <a:solidFill>
+                  <a:srgbClr val="C0392B"/>
+                </a:solidFill>
+              </a:rPr>
+              <a:t>Limitations</a:t>
+            </a:r>
+          </a:p>
+        </p:txBody>
+      </p:sp>
+      <p:sp>
+        <p:nvSpPr>
+          <p:cNvPr id="7" name="TextBox 6"/>
+          <p:cNvSpPr txBox="1"/>
+          <p:nvPr/>
+        </p:nvSpPr>
+        <p:spPr>
+          <a:xfrm>
+            <a:off x="640080" y="2011680"/>
+            <a:ext cx="5303520" cy="4114800"/>
+          </a:xfrm>
+          <a:prstGeom prst="rect">
+            <a:avLst/>
+          </a:prstGeom>
+          <a:noFill/>
+        </p:spPr>
+        <p:txBody>
+          <a:bodyPr wrap="square">
+            <a:spAutoFit/>
+          </a:bodyPr>
+          <a:lstStyle/>
+          <a:p>
+            <a:pPr>
+              <a:spcAft>
+                <a:spcPts val="600"/>
+              </a:spcAft>
+            </a:pPr>
+            <a:r>
+              <a:rPr sz="1500">
+                <a:solidFill>
+                  <a:srgbClr val="4A4A4A"/>
+                </a:solidFill>
+              </a:rPr>
+              <a:t>  •  Reference misalignment in Cochrane caps BLEU</a:t>
+            </a:r>
+          </a:p>
+          <a:p>
+            <a:pPr>
+              <a:spcAft>
+                <a:spcPts val="600"/>
+              </a:spcAft>
+            </a:pPr>
+            <a:r>
+              <a:rPr sz="1500">
+                <a:solidFill>
+                  <a:srgbClr val="4A4A4A"/>
+                </a:solidFill>
+              </a:rPr>
+              <a:t>  •  60M-parameter model — larger models likely improve fluency</a:t>
+            </a:r>
+          </a:p>
+          <a:p>
+            <a:pPr>
+              <a:spcAft>
+                <a:spcPts val="600"/>
+              </a:spcAft>
+            </a:pPr>
+            <a:r>
+              <a:rPr sz="1500">
+                <a:solidFill>
+                  <a:srgbClr val="4A4A4A"/>
+                </a:solidFill>
+              </a:rPr>
+              <a:t>  •  No human evaluation (automatic metrics only)</a:t>
+            </a:r>
+          </a:p>
+          <a:p>
+            <a:pPr>
+              <a:spcAft>
+                <a:spcPts val="600"/>
+              </a:spcAft>
+            </a:pPr>
+            <a:r>
+              <a:rPr sz="1500">
+                <a:solidFill>
+                  <a:srgbClr val="4A4A4A"/>
+                </a:solidFill>
+              </a:rPr>
+              <a:t>  •  English only</a:t>
+            </a:r>
+          </a:p>
+        </p:txBody>
+      </p:sp>
+      <p:sp>
+        <p:nvSpPr>
+          <p:cNvPr id="8" name="TextBox 7"/>
+          <p:cNvSpPr txBox="1"/>
+          <p:nvPr/>
+        </p:nvSpPr>
+        <p:spPr>
+          <a:xfrm>
+            <a:off x="6400800" y="1463040"/>
+            <a:ext cx="5303520" cy="457200"/>
+          </a:xfrm>
+          <a:prstGeom prst="rect">
+            <a:avLst/>
+          </a:prstGeom>
+          <a:noFill/>
+        </p:spPr>
+        <p:txBody>
+          <a:bodyPr wrap="square">
+            <a:spAutoFit/>
+          </a:bodyPr>
+          <a:lstStyle/>
+          <a:p>
+            <a:pPr algn="l"/>
+            <a:r>
+              <a:rPr sz="2000" b="1" i="0">
+                <a:solidFill>
+                  <a:srgbClr val="148F96"/>
+                </a:solidFill>
+              </a:rPr>
+              <a:t>Future Work</a:t>
+            </a:r>
+          </a:p>
+        </p:txBody>
+      </p:sp>
+      <p:sp>
+        <p:nvSpPr>
+          <p:cNvPr id="9" name="TextBox 8"/>
+          <p:cNvSpPr txBox="1"/>
+          <p:nvPr/>
+        </p:nvSpPr>
+        <p:spPr>
+          <a:xfrm>
+            <a:off x="6400800" y="2011680"/>
+            <a:ext cx="5303520" cy="4114800"/>
+          </a:xfrm>
+          <a:prstGeom prst="rect">
+            <a:avLst/>
+          </a:prstGeom>
+          <a:noFill/>
+        </p:spPr>
+        <p:txBody>
+          <a:bodyPr wrap="square">
+            <a:spAutoFit/>
+          </a:bodyPr>
+          <a:lstStyle/>
+          <a:p>
+            <a:pPr>
+              <a:spcAft>
+                <a:spcPts val="600"/>
+              </a:spcAft>
+            </a:pPr>
+            <a:r>
+              <a:rPr sz="1500">
+                <a:solidFill>
+                  <a:srgbClr val="4A4A4A"/>
+                </a:solidFill>
+              </a:rPr>
+              <a:t>  •  Try LLaMA-3 / Flan-T5-large</a:t>
+            </a:r>
+          </a:p>
+          <a:p>
+            <a:pPr>
+              <a:spcAft>
+                <a:spcPts val="600"/>
+              </a:spcAft>
+            </a:pPr>
+            <a:r>
+              <a:rPr sz="1500">
+                <a:solidFill>
+                  <a:srgbClr val="4A4A4A"/>
+                </a:solidFill>
+              </a:rPr>
+              <a:t>  •  Human readability study with patients</a:t>
+            </a:r>
+          </a:p>
+          <a:p>
+            <a:pPr>
+              <a:spcAft>
+                <a:spcPts val="600"/>
+              </a:spcAft>
+            </a:pPr>
+            <a:r>
+              <a:rPr sz="1500">
+                <a:solidFill>
+                  <a:srgbClr val="4A4A4A"/>
+                </a:solidFill>
+              </a:rPr>
+              <a:t>  •  Smarter hybrid: rule pass AFTER T5, not before</a:t>
+            </a:r>
+          </a:p>
+          <a:p>
+            <a:pPr>
+              <a:spcAft>
+                <a:spcPts val="600"/>
+              </a:spcAft>
+            </a:pPr>
+            <a:r>
+              <a:rPr sz="1500">
+                <a:solidFill>
+                  <a:srgbClr val="4A4A4A"/>
+                </a:solidFill>
+              </a:rPr>
+              <a:t>  •  Multi-reference evaluation</a:t>
+            </a:r>
+          </a:p>
+        </p:txBody>
+      </p:sp>
+      <p:cxnSp>
+        <p:nvCxnSpPr>
+          <p:cNvPr id="10" name="Connector 9"/>
+          <p:cNvCxnSpPr/>
+          <p:nvPr/>
+        </p:nvCxnSpPr>
+        <p:spPr>
+          <a:xfrm>
+            <a:off x="457200" y="6446520"/>
+            <a:ext cx="11247120" cy="0"/>
+          </a:xfrm>
+          <a:prstGeom prst="line">
+            <a:avLst/>
+          </a:prstGeom>
+          <a:ln w="12700">
+            <a:solidFill>
+              <a:srgbClr val="148F96"/>
+            </a:solidFill>
+          </a:ln>
+        </p:spPr>
+        <p:style>
+          <a:lnRef idx="2">
+            <a:schemeClr val="accent1"/>
+          </a:lnRef>
+          <a:fillRef idx="0">
+            <a:schemeClr val="accent1"/>
+          </a:fillRef>
+          <a:effectRef idx="1">
+            <a:schemeClr val="accent1"/>
+          </a:effectRef>
+          <a:fontRef idx="minor">
+            <a:schemeClr val="tx1"/>
+          </a:fontRef>
+        </p:style>
+      </p:cxnSp>
+      <p:sp>
+        <p:nvSpPr>
+          <p:cNvPr id="11" name="TextBox 10"/>
+          <p:cNvSpPr txBox="1"/>
+          <p:nvPr/>
+        </p:nvSpPr>
+        <p:spPr>
+          <a:xfrm>
+            <a:off x="457200" y="6492240"/>
+            <a:ext cx="7315200" cy="320040"/>
+          </a:xfrm>
+          <a:prstGeom prst="rect">
+            <a:avLst/>
+          </a:prstGeom>
+          <a:noFill/>
+        </p:spPr>
+        <p:txBody>
+          <a:bodyPr wrap="none">
+            <a:spAutoFit/>
+          </a:bodyPr>
+          <a:lstStyle/>
+          <a:p>
+            <a:r>
+              <a:rPr sz="1000">
+                <a:solidFill>
+                  <a:srgbClr val="4A4A4A"/>
+                </a:solidFill>
+              </a:rPr>
+              <a:t>Medical Text Simplification · CIE 553 NLP · Ibrahim Hanafy</a:t>
+            </a:r>
+          </a:p>
+        </p:txBody>
+      </p:sp>
+      <p:sp>
+        <p:nvSpPr>
+          <p:cNvPr id="12" name="TextBox 11"/>
+          <p:cNvSpPr txBox="1"/>
+          <p:nvPr/>
+        </p:nvSpPr>
+        <p:spPr>
+          <a:xfrm>
+            <a:off x="10789920" y="6492240"/>
+            <a:ext cx="1188720" cy="320040"/>
+          </a:xfrm>
+          <a:prstGeom prst="rect">
+            <a:avLst/>
+          </a:prstGeom>
+          <a:noFill/>
+        </p:spPr>
+        <p:txBody>
+          <a:bodyPr wrap="none">
+            <a:spAutoFit/>
+          </a:bodyPr>
+          <a:lstStyle/>
+          <a:p>
+            <a:pPr algn="r"/>
+            <a:r>
+              <a:rPr sz="1000">
+                <a:solidFill>
+                  <a:srgbClr val="4A4A4A"/>
+                </a:solidFill>
+              </a:rPr>
+              <a:t>25 / 27</a:t>
+            </a:r>
+          </a:p>
+        </p:txBody>
+      </p:sp>
+    </p:spTree>
+  </p:cSld>
+  <p:clrMapOvr>
+    <a:masterClrMapping/>
+  </p:clrMapOvr>
+</p:sld>
+</file>
+
+<file path=ppt/slides/slide26.xml><?xml version="1.0" encoding="utf-8"?>
+<p:sld xmlns:a="http://schemas.openxmlformats.org/drawingml/2006/main" xmlns:p="http://schemas.openxmlformats.org/presentationml/2006/main" xmlns:r="http://schemas.openxmlformats.org/officeDocument/2006/relationships">
+  <p:cSld>
+    <p:spTree>
+      <p:nvGrpSpPr>
+        <p:cNvPr id="1" name=""/>
+        <p:cNvGrpSpPr/>
+        <p:nvPr/>
+      </p:nvGrpSpPr>
+      <p:grpSpPr/>
+      <p:sp>
+        <p:nvSpPr>
+          <p:cNvPr id="2" name="Rectangle 1"/>
+          <p:cNvSpPr/>
+          <p:nvPr/>
+        </p:nvSpPr>
+        <p:spPr>
+          <a:xfrm>
+            <a:off x="0" y="0"/>
+            <a:ext cx="12191695" cy="6858000"/>
+          </a:xfrm>
+          <a:prstGeom prst="rect">
+            <a:avLst/>
+          </a:prstGeom>
+          <a:solidFill>
+            <a:srgbClr val="FFFFFF"/>
+          </a:solidFill>
+          <a:ln>
+            <a:noFill/>
+          </a:ln>
+        </p:spPr>
+        <p:style>
+          <a:lnRef idx="1">
+            <a:schemeClr val="accent1"/>
+          </a:lnRef>
+          <a:fillRef idx="3">
+            <a:schemeClr val="accent1"/>
+          </a:fillRef>
+          <a:effectRef idx="2">
+            <a:schemeClr val="accent1"/>
+          </a:effectRef>
+          <a:fontRef idx="minor">
+            <a:schemeClr val="lt1"/>
+          </a:fontRef>
+        </p:style>
+        <p:txBody>
+          <a:bodyPr rtlCol="0" anchor="ctr"/>
+          <a:lstStyle/>
+          <a:p>
+            <a:pPr algn="ctr"/>
+          </a:p>
+        </p:txBody>
+      </p:sp>
+      <p:sp>
+        <p:nvSpPr>
+          <p:cNvPr id="3" name="Rectangle 2"/>
+          <p:cNvSpPr/>
+          <p:nvPr/>
+        </p:nvSpPr>
+        <p:spPr>
+          <a:xfrm>
+            <a:off x="0" y="0"/>
+            <a:ext cx="12191695" cy="502920"/>
+          </a:xfrm>
+          <a:prstGeom prst="rect">
+            <a:avLst/>
+          </a:prstGeom>
+          <a:solidFill>
+            <a:srgbClr val="0B1F3A"/>
+          </a:solidFill>
+          <a:ln>
+            <a:noFill/>
+          </a:ln>
+        </p:spPr>
+        <p:style>
+          <a:lnRef idx="1">
+            <a:schemeClr val="accent1"/>
+          </a:lnRef>
+          <a:fillRef idx="3">
+            <a:schemeClr val="accent1"/>
+          </a:fillRef>
+          <a:effectRef idx="2">
+            <a:schemeClr val="accent1"/>
+          </a:effectRef>
+          <a:fontRef idx="minor">
+            <a:schemeClr val="lt1"/>
+          </a:fontRef>
+        </p:style>
+        <p:txBody>
+          <a:bodyPr rtlCol="0" anchor="ctr"/>
+          <a:lstStyle/>
+          <a:p>
+            <a:pPr algn="ctr"/>
+          </a:p>
+        </p:txBody>
+      </p:sp>
+      <p:sp>
+        <p:nvSpPr>
+          <p:cNvPr id="4" name="TextBox 3"/>
+          <p:cNvSpPr txBox="1"/>
+          <p:nvPr/>
+        </p:nvSpPr>
+        <p:spPr>
+          <a:xfrm>
+            <a:off x="457200" y="45720"/>
+            <a:ext cx="11430000" cy="457200"/>
+          </a:xfrm>
+          <a:prstGeom prst="rect">
+            <a:avLst/>
+          </a:prstGeom>
+          <a:noFill/>
+        </p:spPr>
+        <p:txBody>
+          <a:bodyPr wrap="none">
+            <a:spAutoFit/>
+          </a:bodyPr>
+          <a:lstStyle/>
+          <a:p>
+            <a:r>
+              <a:rPr sz="2400" b="1">
+                <a:solidFill>
+                  <a:srgbClr val="FFFFFF"/>
+                </a:solidFill>
+              </a:rPr>
+              <a:t>Conclusion</a:t>
+            </a:r>
+          </a:p>
+        </p:txBody>
+      </p:sp>
+      <p:sp>
+        <p:nvSpPr>
+          <p:cNvPr id="5" name="Rectangle 4"/>
+          <p:cNvSpPr/>
+          <p:nvPr/>
+        </p:nvSpPr>
+        <p:spPr>
+          <a:xfrm>
+            <a:off x="457200" y="685800"/>
+            <a:ext cx="548640" cy="73152"/>
+          </a:xfrm>
+          <a:prstGeom prst="rect">
+            <a:avLst/>
+          </a:prstGeom>
+          <a:solidFill>
+            <a:srgbClr val="E8B54A"/>
+          </a:solidFill>
+          <a:ln>
+            <a:noFill/>
+          </a:ln>
+        </p:spPr>
+        <p:style>
+          <a:lnRef idx="1">
+            <a:schemeClr val="accent1"/>
+          </a:lnRef>
+          <a:fillRef idx="3">
+            <a:schemeClr val="accent1"/>
+          </a:fillRef>
+          <a:effectRef idx="2">
+            <a:schemeClr val="accent1"/>
+          </a:effectRef>
+          <a:fontRef idx="minor">
+            <a:schemeClr val="lt1"/>
+          </a:fontRef>
+        </p:style>
+        <p:txBody>
+          <a:bodyPr rtlCol="0" anchor="ctr"/>
+          <a:lstStyle/>
+          <a:p>
+            <a:pPr algn="ctr"/>
+          </a:p>
+        </p:txBody>
+      </p:sp>
+      <p:sp>
+        <p:nvSpPr>
+          <p:cNvPr id="6" name="Rounded Rectangle 5"/>
+          <p:cNvSpPr/>
+          <p:nvPr/>
+        </p:nvSpPr>
+        <p:spPr>
+          <a:xfrm>
+            <a:off x="914400" y="1554480"/>
+            <a:ext cx="10332720" cy="1828800"/>
+          </a:xfrm>
+          <a:prstGeom prst="roundRect">
+            <a:avLst/>
+          </a:prstGeom>
+          <a:solidFill>
+            <a:srgbClr val="F4F6F8"/>
+          </a:solidFill>
+          <a:ln w="25400">
+            <a:solidFill>
+              <a:srgbClr val="E8B54A"/>
+            </a:solidFill>
+          </a:ln>
+        </p:spPr>
+        <p:style>
+          <a:lnRef idx="1">
+            <a:schemeClr val="accent1"/>
+          </a:lnRef>
+          <a:fillRef idx="3">
+            <a:schemeClr val="accent1"/>
+          </a:fillRef>
+          <a:effectRef idx="2">
+            <a:schemeClr val="accent1"/>
+          </a:effectRef>
+          <a:fontRef idx="minor">
+            <a:schemeClr val="lt1"/>
+          </a:fontRef>
+        </p:style>
+        <p:txBody>
+          <a:bodyPr rtlCol="0" anchor="ctr" lIns="365760" tIns="274320" wrap="square"/>
+          <a:lstStyle/>
+          <a:p>
+            <a:pPr algn="ctr"/>
+            <a:r>
+              <a:rPr sz="1800" i="1">
+                <a:solidFill>
+                  <a:srgbClr val="0B1F3A"/>
+                </a:solidFill>
+              </a:rPr>
+              <a:t>Fine-tuned T5-Small (60M) beats biomedical pretraining (SciFive),
+naive hybrid, AND distribution-aware hybrid at biomedical text simplification.</a:t>
+            </a:r>
+          </a:p>
+        </p:txBody>
+      </p:sp>
+      <p:sp>
+        <p:nvSpPr>
+          <p:cNvPr id="7" name="TextBox 6"/>
+          <p:cNvSpPr txBox="1"/>
+          <p:nvPr/>
+        </p:nvSpPr>
+        <p:spPr>
+          <a:xfrm>
+            <a:off x="914400" y="3657600"/>
+            <a:ext cx="10058400" cy="457200"/>
+          </a:xfrm>
+          <a:prstGeom prst="rect">
+            <a:avLst/>
+          </a:prstGeom>
+          <a:noFill/>
+        </p:spPr>
+        <p:txBody>
+          <a:bodyPr wrap="square">
+            <a:spAutoFit/>
+          </a:bodyPr>
+          <a:lstStyle/>
+          <a:p>
+            <a:pPr algn="l"/>
+            <a:r>
+              <a:rPr sz="2000" b="1" i="0">
+                <a:solidFill>
+                  <a:srgbClr val="148F96"/>
+                </a:solidFill>
+              </a:rPr>
+              <a:t>Takeaways</a:t>
+            </a:r>
+          </a:p>
+        </p:txBody>
+      </p:sp>
+      <p:sp>
+        <p:nvSpPr>
+          <p:cNvPr id="8" name="TextBox 7"/>
+          <p:cNvSpPr txBox="1"/>
+          <p:nvPr/>
+        </p:nvSpPr>
+        <p:spPr>
+          <a:xfrm>
+            <a:off x="914400" y="4114800"/>
+            <a:ext cx="10058400" cy="2286000"/>
+          </a:xfrm>
+          <a:prstGeom prst="rect">
+            <a:avLst/>
+          </a:prstGeom>
+          <a:noFill/>
+        </p:spPr>
+        <p:txBody>
+          <a:bodyPr wrap="square">
+            <a:spAutoFit/>
+          </a:bodyPr>
+          <a:lstStyle/>
+          <a:p>
+            <a:pPr>
+              <a:spcAft>
+                <a:spcPts val="600"/>
+              </a:spcAft>
+            </a:pPr>
+            <a:r>
+              <a:rPr sz="1400">
+                <a:solidFill>
+                  <a:srgbClr val="4A4A4A"/>
+                </a:solidFill>
+              </a:rPr>
+              <a:t>  •  Task-specific fine-tuning &gt; generic domain pretraining at small scale</a:t>
+            </a:r>
+          </a:p>
+          <a:p>
+            <a:pPr>
+              <a:spcAft>
+                <a:spcPts val="600"/>
+              </a:spcAft>
+            </a:pPr>
+            <a:r>
+              <a:rPr sz="1400">
+                <a:solidFill>
+                  <a:srgbClr val="4A4A4A"/>
+                </a:solidFill>
+              </a:rPr>
+              <a:t>  •  Symbolic preprocessing can hurt strong neural models — even with matched train/inference distribution</a:t>
+            </a:r>
+          </a:p>
+          <a:p>
+            <a:pPr>
+              <a:spcAft>
+                <a:spcPts val="600"/>
+              </a:spcAft>
+            </a:pPr>
+            <a:r>
+              <a:rPr sz="1400">
+                <a:solidFill>
+                  <a:srgbClr val="4A4A4A"/>
+                </a:solidFill>
+              </a:rPr>
+              <a:t>  •  Lexical substitution imposes a residual cost beyond distributional shift</a:t>
+            </a:r>
+          </a:p>
+          <a:p>
+            <a:pPr>
+              <a:spcAft>
+                <a:spcPts val="600"/>
+              </a:spcAft>
+            </a:pPr>
+            <a:r>
+              <a:rPr sz="1400">
+                <a:solidFill>
+                  <a:srgbClr val="4A4A4A"/>
+                </a:solidFill>
+              </a:rPr>
+              <a:t>  •  Three complementary metrics (SARI + BLEU + FKGL) prevent gaming</a:t>
+            </a:r>
+          </a:p>
+          <a:p>
+            <a:pPr>
+              <a:spcAft>
+                <a:spcPts val="600"/>
+              </a:spcAft>
+            </a:pPr>
+            <a:r>
+              <a:rPr sz="1400">
+                <a:solidFill>
+                  <a:srgbClr val="4A4A4A"/>
+                </a:solidFill>
+              </a:rPr>
+              <a:t>  •  Reproducible, GPU-free demo pipeline shipped</a:t>
+            </a:r>
+          </a:p>
+        </p:txBody>
+      </p:sp>
+      <p:cxnSp>
+        <p:nvCxnSpPr>
+          <p:cNvPr id="9" name="Connector 8"/>
+          <p:cNvCxnSpPr/>
+          <p:nvPr/>
+        </p:nvCxnSpPr>
+        <p:spPr>
+          <a:xfrm>
+            <a:off x="457200" y="6446520"/>
+            <a:ext cx="11247120" cy="0"/>
+          </a:xfrm>
+          <a:prstGeom prst="line">
+            <a:avLst/>
+          </a:prstGeom>
+          <a:ln w="12700">
+            <a:solidFill>
+              <a:srgbClr val="148F96"/>
+            </a:solidFill>
+          </a:ln>
+        </p:spPr>
+        <p:style>
+          <a:lnRef idx="2">
+            <a:schemeClr val="accent1"/>
+          </a:lnRef>
+          <a:fillRef idx="0">
+            <a:schemeClr val="accent1"/>
+          </a:fillRef>
+          <a:effectRef idx="1">
+            <a:schemeClr val="accent1"/>
+          </a:effectRef>
+          <a:fontRef idx="minor">
+            <a:schemeClr val="tx1"/>
+          </a:fontRef>
+        </p:style>
+      </p:cxnSp>
+      <p:sp>
+        <p:nvSpPr>
+          <p:cNvPr id="10" name="TextBox 9"/>
+          <p:cNvSpPr txBox="1"/>
+          <p:nvPr/>
+        </p:nvSpPr>
+        <p:spPr>
+          <a:xfrm>
+            <a:off x="457200" y="6492240"/>
+            <a:ext cx="7315200" cy="320040"/>
+          </a:xfrm>
+          <a:prstGeom prst="rect">
+            <a:avLst/>
+          </a:prstGeom>
+          <a:noFill/>
+        </p:spPr>
+        <p:txBody>
+          <a:bodyPr wrap="none">
+            <a:spAutoFit/>
+          </a:bodyPr>
+          <a:lstStyle/>
+          <a:p>
+            <a:r>
+              <a:rPr sz="1000">
+                <a:solidFill>
+                  <a:srgbClr val="4A4A4A"/>
+                </a:solidFill>
+              </a:rPr>
+              <a:t>Medical Text Simplification · CIE 553 NLP · Ibrahim Hanafy</a:t>
+            </a:r>
+          </a:p>
+        </p:txBody>
+      </p:sp>
+      <p:sp>
+        <p:nvSpPr>
+          <p:cNvPr id="11" name="TextBox 10"/>
+          <p:cNvSpPr txBox="1"/>
+          <p:nvPr/>
+        </p:nvSpPr>
+        <p:spPr>
+          <a:xfrm>
+            <a:off x="10789920" y="6492240"/>
+            <a:ext cx="1188720" cy="320040"/>
+          </a:xfrm>
+          <a:prstGeom prst="rect">
+            <a:avLst/>
+          </a:prstGeom>
+          <a:noFill/>
+        </p:spPr>
+        <p:txBody>
+          <a:bodyPr wrap="none">
+            <a:spAutoFit/>
+          </a:bodyPr>
+          <a:lstStyle/>
+          <a:p>
+            <a:pPr algn="r"/>
+            <a:r>
+              <a:rPr sz="1000">
+                <a:solidFill>
+                  <a:srgbClr val="4A4A4A"/>
+                </a:solidFill>
+              </a:rPr>
+              <a:t>26 / 27</a:t>
+            </a:r>
+          </a:p>
+        </p:txBody>
+      </p:sp>
+    </p:spTree>
+  </p:cSld>
+  <p:clrMapOvr>
+    <a:masterClrMapping/>
+  </p:clrMapOvr>
+</p:sld>
+</file>
+
+<file path=ppt/slides/slide27.xml><?xml version="1.0" encoding="utf-8"?>
+<p:sld xmlns:a="http://schemas.openxmlformats.org/drawingml/2006/main" xmlns:p="http://schemas.openxmlformats.org/presentationml/2006/main" xmlns:r="http://schemas.openxmlformats.org/officeDocument/2006/relationships">
+  <p:cSld>
+    <p:spTree>
+      <p:nvGrpSpPr>
+        <p:cNvPr id="1" name=""/>
+        <p:cNvGrpSpPr/>
+        <p:nvPr/>
+      </p:nvGrpSpPr>
+      <p:grpSpPr/>
+      <p:sp>
+        <p:nvSpPr>
+          <p:cNvPr id="2" name="Rectangle 1"/>
+          <p:cNvSpPr/>
+          <p:nvPr/>
+        </p:nvSpPr>
+        <p:spPr>
+          <a:xfrm>
+            <a:off x="0" y="0"/>
+            <a:ext cx="12191695" cy="6858000"/>
+          </a:xfrm>
+          <a:prstGeom prst="rect">
+            <a:avLst/>
+          </a:prstGeom>
+          <a:solidFill>
+            <a:srgbClr val="FFFFFF"/>
+          </a:solidFill>
+          <a:ln>
+            <a:noFill/>
+          </a:ln>
+        </p:spPr>
+        <p:style>
+          <a:lnRef idx="1">
+            <a:schemeClr val="accent1"/>
+          </a:lnRef>
+          <a:fillRef idx="3">
+            <a:schemeClr val="accent1"/>
+          </a:fillRef>
+          <a:effectRef idx="2">
+            <a:schemeClr val="accent1"/>
+          </a:effectRef>
+          <a:fontRef idx="minor">
+            <a:schemeClr val="lt1"/>
+          </a:fontRef>
+        </p:style>
+        <p:txBody>
+          <a:bodyPr rtlCol="0" anchor="ctr"/>
+          <a:lstStyle/>
+          <a:p>
+            <a:pPr algn="ctr"/>
+          </a:p>
+        </p:txBody>
+      </p:sp>
+      <p:sp>
+        <p:nvSpPr>
+          <p:cNvPr id="3" name="Rectangle 2"/>
+          <p:cNvSpPr/>
+          <p:nvPr/>
+        </p:nvSpPr>
+        <p:spPr>
+          <a:xfrm>
+            <a:off x="0" y="0"/>
+            <a:ext cx="12191695" cy="6858000"/>
+          </a:xfrm>
+          <a:prstGeom prst="rect">
+            <a:avLst/>
+          </a:prstGeom>
+          <a:solidFill>
+            <a:srgbClr val="0B1F3A"/>
+          </a:solidFill>
+          <a:ln>
+            <a:noFill/>
+          </a:ln>
+        </p:spPr>
+        <p:style>
+          <a:lnRef idx="1">
+            <a:schemeClr val="accent1"/>
+          </a:lnRef>
+          <a:fillRef idx="3">
+            <a:schemeClr val="accent1"/>
+          </a:fillRef>
+          <a:effectRef idx="2">
+            <a:schemeClr val="accent1"/>
+          </a:effectRef>
+          <a:fontRef idx="minor">
+            <a:schemeClr val="lt1"/>
+          </a:fontRef>
+        </p:style>
+        <p:txBody>
+          <a:bodyPr rtlCol="0" anchor="ctr"/>
+          <a:lstStyle/>
+          <a:p>
+            <a:pPr algn="ctr"/>
+          </a:p>
+        </p:txBody>
+      </p:sp>
+      <p:sp>
+        <p:nvSpPr>
+          <p:cNvPr id="4" name="TextBox 3"/>
+          <p:cNvSpPr txBox="1"/>
+          <p:nvPr/>
+        </p:nvSpPr>
+        <p:spPr>
+          <a:xfrm>
+            <a:off x="914400" y="2286000"/>
+            <a:ext cx="10058400" cy="1371600"/>
+          </a:xfrm>
+          <a:prstGeom prst="rect">
+            <a:avLst/>
+          </a:prstGeom>
+          <a:noFill/>
+        </p:spPr>
+        <p:txBody>
+          <a:bodyPr wrap="none">
+            <a:spAutoFit/>
+          </a:bodyPr>
+          <a:lstStyle/>
+          <a:p>
+            <a:pPr algn="ctr"/>
+            <a:r>
+              <a:rPr sz="7200" b="1">
+                <a:solidFill>
+                  <a:srgbClr val="FFFFFF"/>
+                </a:solidFill>
+              </a:rPr>
+              <a:t>Q &amp; A</a:t>
+            </a:r>
+          </a:p>
+        </p:txBody>
+      </p:sp>
+      <p:sp>
+        <p:nvSpPr>
+          <p:cNvPr id="5" name="Rectangle 4"/>
+          <p:cNvSpPr/>
+          <p:nvPr/>
+        </p:nvSpPr>
+        <p:spPr>
+          <a:xfrm>
+            <a:off x="5394960" y="3931920"/>
+            <a:ext cx="1371600" cy="91440"/>
+          </a:xfrm>
+          <a:prstGeom prst="rect">
+            <a:avLst/>
+          </a:prstGeom>
+          <a:solidFill>
+            <a:srgbClr val="E8B54A"/>
+          </a:solidFill>
+          <a:ln>
+            <a:noFill/>
+          </a:ln>
+        </p:spPr>
+        <p:style>
+          <a:lnRef idx="1">
+            <a:schemeClr val="accent1"/>
+          </a:lnRef>
+          <a:fillRef idx="3">
+            <a:schemeClr val="accent1"/>
+          </a:fillRef>
+          <a:effectRef idx="2">
+            <a:schemeClr val="accent1"/>
+          </a:effectRef>
+          <a:fontRef idx="minor">
+            <a:schemeClr val="lt1"/>
+          </a:fontRef>
+        </p:style>
+        <p:txBody>
+          <a:bodyPr rtlCol="0" anchor="ctr"/>
+          <a:lstStyle/>
+          <a:p>
+            <a:pPr algn="ctr"/>
           </a:p>
         </p:txBody>
       </p:sp>
@@ -13034,7 +14631,7 @@
 </file>
 
 <file path=ppt/slides/slide3.xml><?xml version="1.0" encoding="utf-8"?>
-<p:sld xmlns:a="http://schemas.openxmlformats.org/drawingml/2006/main" xmlns:r="http://schemas.openxmlformats.org/officeDocument/2006/relationships" xmlns:p="http://schemas.openxmlformats.org/presentationml/2006/main">
+<p:sld xmlns:a="http://schemas.openxmlformats.org/drawingml/2006/main" xmlns:p="http://schemas.openxmlformats.org/presentationml/2006/main" xmlns:r="http://schemas.openxmlformats.org/officeDocument/2006/relationships">
   <p:cSld>
     <p:spTree>
       <p:nvGrpSpPr>
@@ -13042,14 +14639,7 @@
         <p:cNvGrpSpPr/>
         <p:nvPr/>
       </p:nvGrpSpPr>
-      <p:grpSpPr>
-        <a:xfrm>
-          <a:off x="0" y="0"/>
-          <a:ext cx="0" cy="0"/>
-          <a:chOff x="0" y="0"/>
-          <a:chExt cx="0" cy="0"/>
-        </a:xfrm>
-      </p:grpSpPr>
+      <p:grpSpPr/>
       <p:sp>
         <p:nvSpPr>
           <p:cNvPr id="2" name="Rectangle 1"/>
@@ -13090,7 +14680,6 @@
           <a:lstStyle/>
           <a:p>
             <a:pPr algn="ctr"/>
-            <a:endParaRPr/>
           </a:p>
         </p:txBody>
       </p:sp>
@@ -13134,7 +14723,6 @@
           <a:lstStyle/>
           <a:p>
             <a:pPr algn="ctr"/>
-            <a:endParaRPr/>
           </a:p>
         </p:txBody>
       </p:sp>
@@ -13211,7 +14799,6 @@
           <a:lstStyle/>
           <a:p>
             <a:pPr algn="ctr"/>
-            <a:endParaRPr/>
           </a:p>
         </p:txBody>
       </p:sp>
@@ -13288,7 +14875,6 @@
           <a:lstStyle/>
           <a:p>
             <a:pPr algn="ctr"/>
-            <a:endParaRPr/>
           </a:p>
         </p:txBody>
       </p:sp>
@@ -13398,7 +14984,6 @@
           <a:lstStyle/>
           <a:p>
             <a:pPr algn="ctr"/>
-            <a:endParaRPr/>
           </a:p>
         </p:txBody>
       </p:sp>
@@ -13508,7 +15093,6 @@
           <a:lstStyle/>
           <a:p>
             <a:pPr algn="ctr"/>
-            <a:endParaRPr/>
           </a:p>
         </p:txBody>
       </p:sp>
@@ -13618,7 +15202,6 @@
           <a:lstStyle/>
           <a:p>
             <a:pPr algn="ctr"/>
-            <a:endParaRPr/>
           </a:p>
         </p:txBody>
       </p:sp>
@@ -13728,7 +15311,6 @@
           <a:lstStyle/>
           <a:p>
             <a:pPr algn="ctr"/>
-            <a:endParaRPr/>
           </a:p>
         </p:txBody>
       </p:sp>
@@ -13895,7 +15477,7 @@
                   <a:srgbClr val="4A4A4A"/>
                 </a:solidFill>
               </a:rPr>
-              <a:t>3 / 26</a:t>
+              <a:t>3 / 27</a:t>
             </a:r>
           </a:p>
         </p:txBody>
@@ -13909,7 +15491,7 @@
 </file>
 
 <file path=ppt/slides/slide4.xml><?xml version="1.0" encoding="utf-8"?>
-<p:sld xmlns:a="http://schemas.openxmlformats.org/drawingml/2006/main" xmlns:r="http://schemas.openxmlformats.org/officeDocument/2006/relationships" xmlns:p="http://schemas.openxmlformats.org/presentationml/2006/main">
+<p:sld xmlns:a="http://schemas.openxmlformats.org/drawingml/2006/main" xmlns:p="http://schemas.openxmlformats.org/presentationml/2006/main" xmlns:r="http://schemas.openxmlformats.org/officeDocument/2006/relationships">
   <p:cSld>
     <p:spTree>
       <p:nvGrpSpPr>
@@ -13917,14 +15499,7 @@
         <p:cNvGrpSpPr/>
         <p:nvPr/>
       </p:nvGrpSpPr>
-      <p:grpSpPr>
-        <a:xfrm>
-          <a:off x="0" y="0"/>
-          <a:ext cx="0" cy="0"/>
-          <a:chOff x="0" y="0"/>
-          <a:chExt cx="0" cy="0"/>
-        </a:xfrm>
-      </p:grpSpPr>
+      <p:grpSpPr/>
       <p:sp>
         <p:nvSpPr>
           <p:cNvPr id="2" name="Rectangle 1"/>
@@ -13965,7 +15540,6 @@
           <a:lstStyle/>
           <a:p>
             <a:pPr algn="ctr"/>
-            <a:endParaRPr/>
           </a:p>
         </p:txBody>
       </p:sp>
@@ -14009,7 +15583,6 @@
           <a:lstStyle/>
           <a:p>
             <a:pPr algn="ctr"/>
-            <a:endParaRPr/>
           </a:p>
         </p:txBody>
       </p:sp>
@@ -14086,7 +15659,6 @@
           <a:lstStyle/>
           <a:p>
             <a:pPr algn="ctr"/>
-            <a:endParaRPr/>
           </a:p>
         </p:txBody>
       </p:sp>
@@ -14128,7 +15700,7 @@
           </a:fontRef>
         </p:style>
         <p:txBody>
-          <a:bodyPr wrap="square" lIns="365760" tIns="274320" rIns="365760" rtlCol="0" anchor="ctr"/>
+          <a:bodyPr rtlCol="0" anchor="ctr" lIns="365760" tIns="274320" rIns="365760" wrap="square"/>
           <a:lstStyle/>
           <a:p>
             <a:pPr algn="ctr"/>
@@ -14344,7 +15916,7 @@
                   <a:srgbClr val="4A4A4A"/>
                 </a:solidFill>
               </a:rPr>
-              <a:t>4 / 26</a:t>
+              <a:t>4 / 27</a:t>
             </a:r>
           </a:p>
         </p:txBody>
@@ -14358,7 +15930,7 @@
 </file>
 
 <file path=ppt/slides/slide5.xml><?xml version="1.0" encoding="utf-8"?>
-<p:sld xmlns:a="http://schemas.openxmlformats.org/drawingml/2006/main" xmlns:r="http://schemas.openxmlformats.org/officeDocument/2006/relationships" xmlns:p="http://schemas.openxmlformats.org/presentationml/2006/main">
+<p:sld xmlns:a="http://schemas.openxmlformats.org/drawingml/2006/main" xmlns:p="http://schemas.openxmlformats.org/presentationml/2006/main" xmlns:r="http://schemas.openxmlformats.org/officeDocument/2006/relationships">
   <p:cSld>
     <p:spTree>
       <p:nvGrpSpPr>
@@ -14366,14 +15938,7 @@
         <p:cNvGrpSpPr/>
         <p:nvPr/>
       </p:nvGrpSpPr>
-      <p:grpSpPr>
-        <a:xfrm>
-          <a:off x="0" y="0"/>
-          <a:ext cx="0" cy="0"/>
-          <a:chOff x="0" y="0"/>
-          <a:chExt cx="0" cy="0"/>
-        </a:xfrm>
-      </p:grpSpPr>
+      <p:grpSpPr/>
       <p:sp>
         <p:nvSpPr>
           <p:cNvPr id="2" name="Rectangle 1"/>
@@ -14414,7 +15979,6 @@
           <a:lstStyle/>
           <a:p>
             <a:pPr algn="ctr"/>
-            <a:endParaRPr/>
           </a:p>
         </p:txBody>
       </p:sp>
@@ -14458,7 +16022,6 @@
           <a:lstStyle/>
           <a:p>
             <a:pPr algn="ctr"/>
-            <a:endParaRPr/>
           </a:p>
         </p:txBody>
       </p:sp>
@@ -14535,7 +16098,6 @@
           <a:lstStyle/>
           <a:p>
             <a:pPr algn="ctr"/>
-            <a:endParaRPr/>
           </a:p>
         </p:txBody>
       </p:sp>
@@ -14567,7 +16129,7 @@
                   <a:srgbClr val="4A4A4A"/>
                 </a:solidFill>
               </a:rPr>
-              <a:t>Four lanes, one evaluation harness</a:t>
+              <a:t>Five lanes, one evaluation harness</a:t>
             </a:r>
           </a:p>
         </p:txBody>
@@ -14644,7 +16206,7 @@
           </a:fontRef>
         </p:style>
         <p:txBody>
-          <a:bodyPr wrap="square" lIns="137160" tIns="137160" rtlCol="0" anchor="ctr"/>
+          <a:bodyPr rtlCol="0" anchor="ctr" lIns="137160" tIns="137160" wrap="square"/>
           <a:lstStyle/>
           <a:p>
             <a:pPr algn="ctr"/>
@@ -14713,7 +16275,7 @@
           </a:fontRef>
         </p:style>
         <p:txBody>
-          <a:bodyPr wrap="square" lIns="137160" tIns="137160" rtlCol="0" anchor="ctr"/>
+          <a:bodyPr rtlCol="0" anchor="ctr" lIns="137160" tIns="137160" wrap="square"/>
           <a:lstStyle/>
           <a:p>
             <a:pPr algn="ctr"/>
@@ -14782,7 +16344,7 @@
           </a:fontRef>
         </p:style>
         <p:txBody>
-          <a:bodyPr wrap="square" lIns="137160" tIns="137160" rtlCol="0" anchor="ctr"/>
+          <a:bodyPr rtlCol="0" anchor="ctr" lIns="137160" tIns="137160" wrap="square"/>
           <a:lstStyle/>
           <a:p>
             <a:pPr algn="ctr"/>
@@ -14851,7 +16413,7 @@
           </a:fontRef>
         </p:style>
         <p:txBody>
-          <a:bodyPr wrap="square" lIns="137160" tIns="137160" rtlCol="0" anchor="ctr"/>
+          <a:bodyPr rtlCol="0" anchor="ctr" lIns="137160" tIns="137160" wrap="square"/>
           <a:lstStyle/>
           <a:p>
             <a:pPr algn="ctr"/>
@@ -15060,7 +16622,7 @@
           </a:fontRef>
         </p:style>
         <p:txBody>
-          <a:bodyPr wrap="square" lIns="182880" tIns="182880" rtlCol="0" anchor="ctr"/>
+          <a:bodyPr rtlCol="0" anchor="ctr" lIns="182880" tIns="182880" wrap="square"/>
           <a:lstStyle/>
           <a:p>
             <a:pPr algn="ctr"/>
@@ -15221,7 +16783,7 @@
                   <a:srgbClr val="4A4A4A"/>
                 </a:solidFill>
               </a:rPr>
-              <a:t>5 / 26</a:t>
+              <a:t>5 / 27</a:t>
             </a:r>
           </a:p>
         </p:txBody>
@@ -15235,7 +16797,7 @@
 </file>
 
 <file path=ppt/slides/slide6.xml><?xml version="1.0" encoding="utf-8"?>
-<p:sld xmlns:a="http://schemas.openxmlformats.org/drawingml/2006/main" xmlns:r="http://schemas.openxmlformats.org/officeDocument/2006/relationships" xmlns:p="http://schemas.openxmlformats.org/presentationml/2006/main">
+<p:sld xmlns:a="http://schemas.openxmlformats.org/drawingml/2006/main" xmlns:p="http://schemas.openxmlformats.org/presentationml/2006/main" xmlns:r="http://schemas.openxmlformats.org/officeDocument/2006/relationships">
   <p:cSld>
     <p:spTree>
       <p:nvGrpSpPr>
@@ -15243,14 +16805,7 @@
         <p:cNvGrpSpPr/>
         <p:nvPr/>
       </p:nvGrpSpPr>
-      <p:grpSpPr>
-        <a:xfrm>
-          <a:off x="0" y="0"/>
-          <a:ext cx="0" cy="0"/>
-          <a:chOff x="0" y="0"/>
-          <a:chExt cx="0" cy="0"/>
-        </a:xfrm>
-      </p:grpSpPr>
+      <p:grpSpPr/>
       <p:sp>
         <p:nvSpPr>
           <p:cNvPr id="2" name="Rectangle 1"/>
@@ -15291,7 +16846,6 @@
           <a:lstStyle/>
           <a:p>
             <a:pPr algn="ctr"/>
-            <a:endParaRPr/>
           </a:p>
         </p:txBody>
       </p:sp>
@@ -15335,7 +16889,6 @@
           <a:lstStyle/>
           <a:p>
             <a:pPr algn="ctr"/>
-            <a:endParaRPr/>
           </a:p>
         </p:txBody>
       </p:sp>
@@ -15412,7 +16965,6 @@
           <a:lstStyle/>
           <a:p>
             <a:pPr algn="ctr"/>
-            <a:endParaRPr/>
           </a:p>
         </p:txBody>
       </p:sp>
@@ -15468,27 +17020,9 @@
                 <a:tableStyleId>{5C22544A-7EE6-4342-B048-85BDC9FD1C3A}</a:tableStyleId>
               </a:tblPr>
               <a:tblGrid>
-                <a:gridCol w="1828800">
-                  <a:extLst>
-                    <a:ext uri="{9D8B030D-6E8A-4147-A177-3AD203B41FA5}">
-                      <a16:colId xmlns:a16="http://schemas.microsoft.com/office/drawing/2014/main" val="20000"/>
-                    </a:ext>
-                  </a:extLst>
-                </a:gridCol>
-                <a:gridCol w="1828800">
-                  <a:extLst>
-                    <a:ext uri="{9D8B030D-6E8A-4147-A177-3AD203B41FA5}">
-                      <a16:colId xmlns:a16="http://schemas.microsoft.com/office/drawing/2014/main" val="20001"/>
-                    </a:ext>
-                  </a:extLst>
-                </a:gridCol>
-                <a:gridCol w="1828800">
-                  <a:extLst>
-                    <a:ext uri="{9D8B030D-6E8A-4147-A177-3AD203B41FA5}">
-                      <a16:colId xmlns:a16="http://schemas.microsoft.com/office/drawing/2014/main" val="20002"/>
-                    </a:ext>
-                  </a:extLst>
-                </a:gridCol>
+                <a:gridCol w="1828800"/>
+                <a:gridCol w="1828800"/>
+                <a:gridCol w="1828800"/>
               </a:tblGrid>
               <a:tr h="457200">
                 <a:tc>
@@ -15557,11 +17091,6 @@
                     </a:solidFill>
                   </a:tcPr>
                 </a:tc>
-                <a:extLst>
-                  <a:ext uri="{0D108BD9-81ED-4DB2-BD59-A6C34878D82A}">
-                    <a16:rowId xmlns:a16="http://schemas.microsoft.com/office/drawing/2014/main" val="10000"/>
-                  </a:ext>
-                </a:extLst>
               </a:tr>
               <a:tr h="457200">
                 <a:tc>
@@ -15630,11 +17159,6 @@
                     </a:solidFill>
                   </a:tcPr>
                 </a:tc>
-                <a:extLst>
-                  <a:ext uri="{0D108BD9-81ED-4DB2-BD59-A6C34878D82A}">
-                    <a16:rowId xmlns:a16="http://schemas.microsoft.com/office/drawing/2014/main" val="10001"/>
-                  </a:ext>
-                </a:extLst>
               </a:tr>
               <a:tr h="457200">
                 <a:tc>
@@ -15703,11 +17227,6 @@
                     </a:solidFill>
                   </a:tcPr>
                 </a:tc>
-                <a:extLst>
-                  <a:ext uri="{0D108BD9-81ED-4DB2-BD59-A6C34878D82A}">
-                    <a16:rowId xmlns:a16="http://schemas.microsoft.com/office/drawing/2014/main" val="10002"/>
-                  </a:ext>
-                </a:extLst>
               </a:tr>
             </a:tbl>
           </a:graphicData>
@@ -15991,7 +17510,7 @@
                   <a:srgbClr val="4A4A4A"/>
                 </a:solidFill>
               </a:rPr>
-              <a:t>6 / 26</a:t>
+              <a:t>6 / 27</a:t>
             </a:r>
           </a:p>
         </p:txBody>
@@ -16005,7 +17524,7 @@
 </file>
 
 <file path=ppt/slides/slide7.xml><?xml version="1.0" encoding="utf-8"?>
-<p:sld xmlns:a="http://schemas.openxmlformats.org/drawingml/2006/main" xmlns:r="http://schemas.openxmlformats.org/officeDocument/2006/relationships" xmlns:p="http://schemas.openxmlformats.org/presentationml/2006/main">
+<p:sld xmlns:a="http://schemas.openxmlformats.org/drawingml/2006/main" xmlns:p="http://schemas.openxmlformats.org/presentationml/2006/main" xmlns:r="http://schemas.openxmlformats.org/officeDocument/2006/relationships">
   <p:cSld>
     <p:spTree>
       <p:nvGrpSpPr>
@@ -16013,14 +17532,7 @@
         <p:cNvGrpSpPr/>
         <p:nvPr/>
       </p:nvGrpSpPr>
-      <p:grpSpPr>
-        <a:xfrm>
-          <a:off x="0" y="0"/>
-          <a:ext cx="0" cy="0"/>
-          <a:chOff x="0" y="0"/>
-          <a:chExt cx="0" cy="0"/>
-        </a:xfrm>
-      </p:grpSpPr>
+      <p:grpSpPr/>
       <p:sp>
         <p:nvSpPr>
           <p:cNvPr id="2" name="Rectangle 1"/>
@@ -16061,7 +17573,6 @@
           <a:lstStyle/>
           <a:p>
             <a:pPr algn="ctr"/>
-            <a:endParaRPr/>
           </a:p>
         </p:txBody>
       </p:sp>
@@ -16105,7 +17616,6 @@
           <a:lstStyle/>
           <a:p>
             <a:pPr algn="ctr"/>
-            <a:endParaRPr/>
           </a:p>
         </p:txBody>
       </p:sp>
@@ -16182,7 +17692,6 @@
           <a:lstStyle/>
           <a:p>
             <a:pPr algn="ctr"/>
-            <a:endParaRPr/>
           </a:p>
         </p:txBody>
       </p:sp>
@@ -16291,7 +17800,7 @@
           </a:fontRef>
         </p:style>
         <p:txBody>
-          <a:bodyPr wrap="square" lIns="137160" tIns="91440" rIns="137160" bIns="91440" rtlCol="0" anchor="ctr"/>
+          <a:bodyPr rtlCol="0" anchor="ctr" lIns="137160" rIns="137160" tIns="91440" bIns="91440" wrap="square"/>
           <a:lstStyle/>
           <a:p>
             <a:pPr algn="ctr"/>
@@ -16367,7 +17876,7 @@
           </a:fontRef>
         </p:style>
         <p:txBody>
-          <a:bodyPr wrap="square" lIns="182880" tIns="137160" rtlCol="0" anchor="ctr"/>
+          <a:bodyPr rtlCol="0" anchor="ctr" lIns="182880" tIns="137160" wrap="square"/>
           <a:lstStyle/>
           <a:p>
             <a:pPr algn="ctr"/>
@@ -16450,7 +17959,7 @@
           </a:fontRef>
         </p:style>
         <p:txBody>
-          <a:bodyPr wrap="square" lIns="182880" tIns="137160" rtlCol="0" anchor="ctr"/>
+          <a:bodyPr rtlCol="0" anchor="ctr" lIns="182880" tIns="137160" wrap="square"/>
           <a:lstStyle/>
           <a:p>
             <a:pPr algn="ctr"/>
@@ -16592,7 +18101,7 @@
                   <a:srgbClr val="4A4A4A"/>
                 </a:solidFill>
               </a:rPr>
-              <a:t>7 / 26</a:t>
+              <a:t>7 / 27</a:t>
             </a:r>
           </a:p>
         </p:txBody>
@@ -16606,7 +18115,7 @@
 </file>
 
 <file path=ppt/slides/slide8.xml><?xml version="1.0" encoding="utf-8"?>
-<p:sld xmlns:a="http://schemas.openxmlformats.org/drawingml/2006/main" xmlns:r="http://schemas.openxmlformats.org/officeDocument/2006/relationships" xmlns:p="http://schemas.openxmlformats.org/presentationml/2006/main">
+<p:sld xmlns:a="http://schemas.openxmlformats.org/drawingml/2006/main" xmlns:p="http://schemas.openxmlformats.org/presentationml/2006/main" xmlns:r="http://schemas.openxmlformats.org/officeDocument/2006/relationships">
   <p:cSld>
     <p:spTree>
       <p:nvGrpSpPr>
@@ -16614,14 +18123,7 @@
         <p:cNvGrpSpPr/>
         <p:nvPr/>
       </p:nvGrpSpPr>
-      <p:grpSpPr>
-        <a:xfrm>
-          <a:off x="0" y="0"/>
-          <a:ext cx="0" cy="0"/>
-          <a:chOff x="0" y="0"/>
-          <a:chExt cx="0" cy="0"/>
-        </a:xfrm>
-      </p:grpSpPr>
+      <p:grpSpPr/>
       <p:sp>
         <p:nvSpPr>
           <p:cNvPr id="2" name="Rectangle 1"/>
@@ -16662,7 +18164,6 @@
           <a:lstStyle/>
           <a:p>
             <a:pPr algn="ctr"/>
-            <a:endParaRPr/>
           </a:p>
         </p:txBody>
       </p:sp>
@@ -16706,7 +18207,6 @@
           <a:lstStyle/>
           <a:p>
             <a:pPr algn="ctr"/>
-            <a:endParaRPr/>
           </a:p>
         </p:txBody>
       </p:sp>
@@ -16783,7 +18283,6 @@
           <a:lstStyle/>
           <a:p>
             <a:pPr algn="ctr"/>
-            <a:endParaRPr/>
           </a:p>
         </p:txBody>
       </p:sp>
@@ -16859,7 +18358,7 @@
           </a:fontRef>
         </p:style>
         <p:txBody>
-          <a:bodyPr wrap="square" lIns="137160" tIns="91440" rIns="137160" bIns="91440" rtlCol="0" anchor="ctr"/>
+          <a:bodyPr rtlCol="0" anchor="ctr" lIns="137160" rIns="137160" tIns="91440" bIns="91440" wrap="square"/>
           <a:lstStyle/>
           <a:p>
             <a:pPr algn="ctr"/>
@@ -16958,7 +18457,7 @@
           </a:fontRef>
         </p:style>
         <p:txBody>
-          <a:bodyPr wrap="square" lIns="137160" tIns="91440" rIns="137160" bIns="91440" rtlCol="0" anchor="ctr"/>
+          <a:bodyPr rtlCol="0" anchor="ctr" lIns="137160" rIns="137160" tIns="91440" bIns="91440" wrap="square"/>
           <a:lstStyle/>
           <a:p>
             <a:pPr algn="ctr"/>
@@ -17057,7 +18556,7 @@
           </a:fontRef>
         </p:style>
         <p:txBody>
-          <a:bodyPr wrap="square" lIns="137160" tIns="91440" rIns="137160" bIns="91440" rtlCol="0" anchor="ctr"/>
+          <a:bodyPr rtlCol="0" anchor="ctr" lIns="137160" rIns="137160" tIns="91440" bIns="91440" wrap="square"/>
           <a:lstStyle/>
           <a:p>
             <a:pPr algn="ctr"/>
@@ -17192,7 +18691,7 @@
                   <a:srgbClr val="4A4A4A"/>
                 </a:solidFill>
               </a:rPr>
-              <a:t>8 / 26</a:t>
+              <a:t>8 / 27</a:t>
             </a:r>
           </a:p>
         </p:txBody>
@@ -17206,7 +18705,7 @@
 </file>
 
 <file path=ppt/slides/slide9.xml><?xml version="1.0" encoding="utf-8"?>
-<p:sld xmlns:a="http://schemas.openxmlformats.org/drawingml/2006/main" xmlns:r="http://schemas.openxmlformats.org/officeDocument/2006/relationships" xmlns:p="http://schemas.openxmlformats.org/presentationml/2006/main">
+<p:sld xmlns:a="http://schemas.openxmlformats.org/drawingml/2006/main" xmlns:p="http://schemas.openxmlformats.org/presentationml/2006/main" xmlns:r="http://schemas.openxmlformats.org/officeDocument/2006/relationships">
   <p:cSld>
     <p:spTree>
       <p:nvGrpSpPr>
@@ -17214,14 +18713,7 @@
         <p:cNvGrpSpPr/>
         <p:nvPr/>
       </p:nvGrpSpPr>
-      <p:grpSpPr>
-        <a:xfrm>
-          <a:off x="0" y="0"/>
-          <a:ext cx="0" cy="0"/>
-          <a:chOff x="0" y="0"/>
-          <a:chExt cx="0" cy="0"/>
-        </a:xfrm>
-      </p:grpSpPr>
+      <p:grpSpPr/>
       <p:sp>
         <p:nvSpPr>
           <p:cNvPr id="2" name="Rectangle 1"/>
@@ -17262,7 +18754,6 @@
           <a:lstStyle/>
           <a:p>
             <a:pPr algn="ctr"/>
-            <a:endParaRPr/>
           </a:p>
         </p:txBody>
       </p:sp>
@@ -17306,7 +18797,6 @@
           <a:lstStyle/>
           <a:p>
             <a:pPr algn="ctr"/>
-            <a:endParaRPr/>
           </a:p>
         </p:txBody>
       </p:sp>
@@ -17383,7 +18873,6 @@
           <a:lstStyle/>
           <a:p>
             <a:pPr algn="ctr"/>
-            <a:endParaRPr/>
           </a:p>
         </p:txBody>
       </p:sp>
@@ -17492,7 +18981,7 @@
           </a:fontRef>
         </p:style>
         <p:txBody>
-          <a:bodyPr wrap="square" lIns="137160" tIns="91440" rIns="137160" bIns="91440" rtlCol="0" anchor="ctr"/>
+          <a:bodyPr rtlCol="0" anchor="ctr" lIns="137160" rIns="137160" tIns="91440" bIns="91440" wrap="square"/>
           <a:lstStyle/>
           <a:p>
             <a:pPr algn="ctr"/>
@@ -17710,7 +19199,7 @@
                   <a:srgbClr val="4A4A4A"/>
                 </a:solidFill>
               </a:rPr>
-              <a:t>9 / 26</a:t>
+              <a:t>9 / 27</a:t>
             </a:r>
           </a:p>
         </p:txBody>
